--- a/PicoAgent-Intro.pptx
+++ b/PicoAgent-Intro.pptx
@@ -4,6 +4,9 @@
   <p:sldMasterIdLst>
     <p:sldMasterId id="2147483648" r:id="rId1"/>
   </p:sldMasterIdLst>
+  <p:notesMasterIdLst>
+    <p:notesMasterId r:id="rId17"/>
+  </p:notesMasterIdLst>
   <p:sldIdLst>
     <p:sldId id="256" r:id="rId2"/>
     <p:sldId id="257" r:id="rId3"/>
@@ -21,9 +24,6 @@
     <p:sldId id="269" r:id="rId15"/>
     <p:sldId id="270" r:id="rId16"/>
   </p:sldIdLst>
-  <p:notesMasterIdLst>
-    <p:notesMasterId r:id="rId17"/>
-  </p:notesMasterIdLst>
   <p:sldSz cx="12192000" cy="6858000"/>
   <p:notesSz cx="6858000" cy="12192000"/>
   <p:defaultTextStyle>
@@ -118,6 +118,11 @@
       </a:defRPr>
     </a:lvl9pPr>
   </p:defaultTextStyle>
+  <p:extLst>
+    <p:ext uri="{EFAFB233-063F-42B5-8137-9DF3F51BA10A}">
+      <p15:sldGuideLst xmlns:p15="http://schemas.microsoft.com/office/powerpoint/2012/main"/>
+    </p:ext>
+  </p:extLst>
 </p:presentation>
 </file>
 
@@ -143,241 +148,17 @@
           <a:chExt cx="0" cy="0"/>
         </a:xfrm>
       </p:grpSpPr>
-      <p:sp>
-        <p:nvSpPr>
-          <p:cNvPr id="2" name="Header Placeholder 1"/>
-          <p:cNvSpPr>
-            <a:spLocks noGrp="1"/>
-          </p:cNvSpPr>
-          <p:nvPr>
-            <p:ph type="hdr" sz="quarter"/>
-          </p:nvPr>
-        </p:nvSpPr>
-        <p:spPr>
-          <a:xfrm>
-            <a:off x="0" y="0"/>
-            <a:ext cx="2971800" cy="458788"/>
-          </a:xfrm>
-          <a:prstGeom prst="rect">
-            <a:avLst/>
-          </a:prstGeom>
-        </p:spPr>
-        <p:txBody>
-          <a:bodyPr vert="horz" lIns="91440" tIns="45720" rIns="91440" bIns="45720" rtlCol="0"/>
-          <a:lstStyle>
-            <a:lvl1pPr algn="l">
-              <a:defRPr sz="1200"/>
-            </a:lvl1pPr>
-          </a:lstStyle>
-          <a:p>
-            <a:endParaRPr lang="en-US"/>
-          </a:p>
-        </p:txBody>
-      </p:sp>
-      <p:sp>
-        <p:nvSpPr>
-          <p:cNvPr id="3" name="Date Placeholder 2"/>
-          <p:cNvSpPr>
-            <a:spLocks noGrp="1"/>
-          </p:cNvSpPr>
-          <p:nvPr>
-            <p:ph type="dt" idx="1"/>
-          </p:nvPr>
-        </p:nvSpPr>
-        <p:spPr>
-          <a:xfrm>
-            <a:off x="3884613" y="0"/>
-            <a:ext cx="2971800" cy="458788"/>
-          </a:xfrm>
-          <a:prstGeom prst="rect">
-            <a:avLst/>
-          </a:prstGeom>
-        </p:spPr>
-        <p:txBody>
-          <a:bodyPr vert="horz" lIns="91440" tIns="45720" rIns="91440" bIns="45720" rtlCol="0"/>
-          <a:lstStyle>
-            <a:lvl1pPr algn="r">
-              <a:defRPr sz="1200"/>
-            </a:lvl1pPr>
-          </a:lstStyle>
-          <a:p>
-            <a:fld id="{5282F153-3F37-0F45-9E97-73ACFA13230C}" type="datetimeFigureOut">
-              <a:rPr lang="en-US"/>
-              <a:t>7/23/19</a:t>
-            </a:fld>
-            <a:endParaRPr lang="en-US"/>
-          </a:p>
-        </p:txBody>
-      </p:sp>
-      <p:sp>
-        <p:nvSpPr>
-          <p:cNvPr id="4" name="Slide Image Placeholder 3"/>
-          <p:cNvSpPr>
-            <a:spLocks noGrp="1" noRot="1" noChangeAspect="1"/>
-          </p:cNvSpPr>
-          <p:nvPr>
-            <p:ph type="sldImg" idx="2"/>
-          </p:nvPr>
-        </p:nvSpPr>
-        <p:spPr>
-          <a:xfrm>
-            <a:off x="685800" y="1143000"/>
-            <a:ext cx="5486400" cy="3086100"/>
-          </a:xfrm>
-          <a:prstGeom prst="rect">
-            <a:avLst/>
-          </a:prstGeom>
-          <a:noFill/>
-          <a:ln w="12700">
-            <a:solidFill>
-              <a:prstClr val="black"/>
-            </a:solidFill>
-          </a:ln>
-        </p:spPr>
-        <p:txBody>
-          <a:bodyPr vert="horz" lIns="91440" tIns="45720" rIns="91440" bIns="45720" rtlCol="0" anchor="ctr"/>
-          <a:lstStyle/>
-          <a:p>
-            <a:endParaRPr lang="en-US"/>
-          </a:p>
-        </p:txBody>
-      </p:sp>
-      <p:sp>
-        <p:nvSpPr>
-          <p:cNvPr id="5" name="Notes Placeholder 4"/>
-          <p:cNvSpPr>
-            <a:spLocks noGrp="1"/>
-          </p:cNvSpPr>
-          <p:nvPr>
-            <p:ph type="body" sz="quarter" idx="3"/>
-          </p:nvPr>
-        </p:nvSpPr>
-        <p:spPr>
-          <a:xfrm>
-            <a:off x="685800" y="4400550"/>
-            <a:ext cx="5486400" cy="3600450"/>
-          </a:xfrm>
-          <a:prstGeom prst="rect">
-            <a:avLst/>
-          </a:prstGeom>
-        </p:spPr>
-        <p:txBody>
-          <a:bodyPr vert="horz" lIns="91440" tIns="45720" rIns="91440" bIns="45720" rtlCol="0"/>
-          <a:lstStyle/>
-          <a:p>
-            <a:pPr lvl="0"/>
-            <a:r>
-              <a:rPr lang="en-US"/>
-              <a:t>Click to edit Master text styles</a:t>
-            </a:r>
-          </a:p>
-          <a:p>
-            <a:pPr lvl="1"/>
-            <a:r>
-              <a:rPr lang="en-US"/>
-              <a:t>Second level</a:t>
-            </a:r>
-          </a:p>
-          <a:p>
-            <a:pPr lvl="2"/>
-            <a:r>
-              <a:rPr lang="en-US"/>
-              <a:t>Third level</a:t>
-            </a:r>
-          </a:p>
-          <a:p>
-            <a:pPr lvl="3"/>
-            <a:r>
-              <a:rPr lang="en-US"/>
-              <a:t>Fourth level</a:t>
-            </a:r>
-          </a:p>
-          <a:p>
-            <a:pPr lvl="4"/>
-            <a:r>
-              <a:rPr lang="en-US"/>
-              <a:t>Fifth level</a:t>
-            </a:r>
-          </a:p>
-        </p:txBody>
-      </p:sp>
-      <p:sp>
-        <p:nvSpPr>
-          <p:cNvPr id="6" name="Footer Placeholder 5"/>
-          <p:cNvSpPr>
-            <a:spLocks noGrp="1"/>
-          </p:cNvSpPr>
-          <p:nvPr>
-            <p:ph type="ftr" sz="quarter" idx="4"/>
-          </p:nvPr>
-        </p:nvSpPr>
-        <p:spPr>
-          <a:xfrm>
-            <a:off x="0" y="8685213"/>
-            <a:ext cx="2971800" cy="458787"/>
-          </a:xfrm>
-          <a:prstGeom prst="rect">
-            <a:avLst/>
-          </a:prstGeom>
-        </p:spPr>
-        <p:txBody>
-          <a:bodyPr vert="horz" lIns="91440" tIns="45720" rIns="91440" bIns="45720" rtlCol="0" anchor="b"/>
-          <a:lstStyle>
-            <a:lvl1pPr algn="l">
-              <a:defRPr sz="1200"/>
-            </a:lvl1pPr>
-          </a:lstStyle>
-          <a:p>
-            <a:endParaRPr lang="en-US"/>
-          </a:p>
-        </p:txBody>
-      </p:sp>
-      <p:sp>
-        <p:nvSpPr>
-          <p:cNvPr id="7" name="Slide Number Placeholder 6"/>
-          <p:cNvSpPr>
-            <a:spLocks noGrp="1"/>
-          </p:cNvSpPr>
-          <p:nvPr>
-            <p:ph type="sldNum" sz="quarter" idx="5"/>
-          </p:nvPr>
-        </p:nvSpPr>
-        <p:spPr>
-          <a:xfrm>
-            <a:off x="3884613" y="8685213"/>
-            <a:ext cx="2971800" cy="458787"/>
-          </a:xfrm>
-          <a:prstGeom prst="rect">
-            <a:avLst/>
-          </a:prstGeom>
-        </p:spPr>
-        <p:txBody>
-          <a:bodyPr vert="horz" lIns="91440" tIns="45720" rIns="91440" bIns="45720" rtlCol="0" anchor="b"/>
-          <a:lstStyle>
-            <a:lvl1pPr algn="r">
-              <a:defRPr sz="1200"/>
-            </a:lvl1pPr>
-          </a:lstStyle>
-          <a:p>
-            <a:fld id="{CE5E9CC1-C706-0F49-92D6-E571CC5EEA8F}" type="slidenum">
-              <a:rPr lang="en-US"/>
-              <a:t>‹#›</a:t>
-            </a:fld>
-            <a:endParaRPr lang="en-US"/>
-          </a:p>
-        </p:txBody>
-      </p:sp>
     </p:spTree>
     <p:extLst>
       <p:ext uri="{BB962C8B-B14F-4D97-AF65-F5344CB8AC3E}">
-        <p14:creationId xmlns:p14="http://schemas.microsoft.com/office/powerpoint/2010/main" val="1024086991"/>
+        <p14:creationId xmlns:p14="http://schemas.microsoft.com/office/powerpoint/2010/main" val="383273677"/>
       </p:ext>
     </p:extLst>
   </p:cSld>
   <p:clrMap bg1="lt1" tx1="dk1" bg2="lt2" tx2="dk2" accent1="accent1" accent2="accent2" accent3="accent3" accent4="accent4" accent5="accent5" accent6="accent6" hlink="hlink" folHlink="folHlink"/>
   <p:notesStyle>
     <a:lvl1pPr marL="0" algn="l" defTabSz="914400" rtl="0" eaLnBrk="1" latinLnBrk="0" hangingPunct="1">
-      <a:defRPr sz="1200" kern="1200">
+      <a:defRPr kumimoji="1" sz="1200" kern="1200">
         <a:solidFill>
           <a:schemeClr val="tx1"/>
         </a:solidFill>
@@ -387,7 +168,7 @@
       </a:defRPr>
     </a:lvl1pPr>
     <a:lvl2pPr marL="457200" algn="l" defTabSz="914400" rtl="0" eaLnBrk="1" latinLnBrk="0" hangingPunct="1">
-      <a:defRPr sz="1200" kern="1200">
+      <a:defRPr kumimoji="1" sz="1200" kern="1200">
         <a:solidFill>
           <a:schemeClr val="tx1"/>
         </a:solidFill>
@@ -397,7 +178,7 @@
       </a:defRPr>
     </a:lvl2pPr>
     <a:lvl3pPr marL="914400" algn="l" defTabSz="914400" rtl="0" eaLnBrk="1" latinLnBrk="0" hangingPunct="1">
-      <a:defRPr sz="1200" kern="1200">
+      <a:defRPr kumimoji="1" sz="1200" kern="1200">
         <a:solidFill>
           <a:schemeClr val="tx1"/>
         </a:solidFill>
@@ -407,7 +188,7 @@
       </a:defRPr>
     </a:lvl3pPr>
     <a:lvl4pPr marL="1371600" algn="l" defTabSz="914400" rtl="0" eaLnBrk="1" latinLnBrk="0" hangingPunct="1">
-      <a:defRPr sz="1200" kern="1200">
+      <a:defRPr kumimoji="1" sz="1200" kern="1200">
         <a:solidFill>
           <a:schemeClr val="tx1"/>
         </a:solidFill>
@@ -417,7 +198,7 @@
       </a:defRPr>
     </a:lvl4pPr>
     <a:lvl5pPr marL="1828800" algn="l" defTabSz="914400" rtl="0" eaLnBrk="1" latinLnBrk="0" hangingPunct="1">
-      <a:defRPr sz="1200" kern="1200">
+      <a:defRPr kumimoji="1" sz="1200" kern="1200">
         <a:solidFill>
           <a:schemeClr val="tx1"/>
         </a:solidFill>
@@ -427,7 +208,7 @@
       </a:defRPr>
     </a:lvl5pPr>
     <a:lvl6pPr marL="2286000" algn="l" defTabSz="914400" rtl="0" eaLnBrk="1" latinLnBrk="0" hangingPunct="1">
-      <a:defRPr sz="1200" kern="1200">
+      <a:defRPr kumimoji="1" sz="1200" kern="1200">
         <a:solidFill>
           <a:schemeClr val="tx1"/>
         </a:solidFill>
@@ -437,7 +218,7 @@
       </a:defRPr>
     </a:lvl6pPr>
     <a:lvl7pPr marL="2743200" algn="l" defTabSz="914400" rtl="0" eaLnBrk="1" latinLnBrk="0" hangingPunct="1">
-      <a:defRPr sz="1200" kern="1200">
+      <a:defRPr kumimoji="1" sz="1200" kern="1200">
         <a:solidFill>
           <a:schemeClr val="tx1"/>
         </a:solidFill>
@@ -447,7 +228,7 @@
       </a:defRPr>
     </a:lvl7pPr>
     <a:lvl8pPr marL="3200400" algn="l" defTabSz="914400" rtl="0" eaLnBrk="1" latinLnBrk="0" hangingPunct="1">
-      <a:defRPr sz="1200" kern="1200">
+      <a:defRPr kumimoji="1" sz="1200" kern="1200">
         <a:solidFill>
           <a:schemeClr val="tx1"/>
         </a:solidFill>
@@ -457,7 +238,7 @@
       </a:defRPr>
     </a:lvl8pPr>
     <a:lvl9pPr marL="3657600" algn="l" defTabSz="914400" rtl="0" eaLnBrk="1" latinLnBrk="0" hangingPunct="1">
-      <a:defRPr sz="1200" kern="1200">
+      <a:defRPr kumimoji="1" sz="1200" kern="1200">
         <a:solidFill>
           <a:schemeClr val="tx1"/>
         </a:solidFill>
@@ -515,8 +296,65 @@
           <a:lstStyle/>
           <a:p>
             <a:r>
-              <a:rPr lang="en-US" dirty="0"/>
-              <a:t>PicoAgentは、透明なウィンドウ上にキャラクターとフキダシだけを表示するWindows向けAIデスクトップペットです。会話も、PC作業の手伝いも、同じキャラが担当します。現在は開発中のv1.0.2 Betaを無料で配布しています。</a:t>
+              <a:rPr lang="en-US" altLang="ja-JP"/>
+              <a:t>PicoAgent</a:t>
+            </a:r>
+            <a:r>
+              <a:rPr lang="ja-JP" altLang="en-US"/>
+              <a:t>は、透明なウィンドウ上にキャラクターとフキダシだけを表示する</a:t>
+            </a:r>
+            <a:r>
+              <a:rPr lang="en-US" altLang="ja-JP"/>
+              <a:t>Windows</a:t>
+            </a:r>
+            <a:r>
+              <a:rPr lang="ja-JP" altLang="en-US"/>
+              <a:t>向け</a:t>
+            </a:r>
+            <a:r>
+              <a:rPr lang="en-US" altLang="ja-JP"/>
+              <a:t>AI</a:t>
+            </a:r>
+            <a:r>
+              <a:rPr lang="ja-JP" altLang="en-US"/>
+              <a:t>デスクトップペットです。会話も、</a:t>
+            </a:r>
+            <a:r>
+              <a:rPr lang="en-US" altLang="ja-JP"/>
+              <a:t>PC</a:t>
+            </a:r>
+            <a:r>
+              <a:rPr lang="ja-JP" altLang="en-US"/>
+              <a:t>作業の手伝いも、同じキャラが担当します。現在は開発中の</a:t>
+            </a:r>
+            <a:r>
+              <a:rPr lang="en-US" altLang="ja-JP"/>
+              <a:t>v1.0.2 ALPHA</a:t>
+            </a:r>
+            <a:r>
+              <a:rPr lang="ja-JP" altLang="en-US"/>
+              <a:t>を無料で配布しています。</a:t>
+            </a:r>
+          </a:p>
+          <a:p>
+            <a:endParaRPr lang="ja-JP" altLang="en-US"/>
+          </a:p>
+          <a:p>
+            <a:r>
+              <a:rPr lang="en-US" altLang="ja-JP"/>
+              <a:t>[Sources]</a:t>
+            </a:r>
+          </a:p>
+          <a:p>
+            <a:r>
+              <a:rPr lang="en-US" altLang="ja-JP"/>
+              <a:t>- distribution/site/index.html</a:t>
+            </a:r>
+          </a:p>
+          <a:p>
+            <a:r>
+              <a:rPr lang="en-US" altLang="ja-JP"/>
+              <a:t>- docs/images/layout-pet.webp</a:t>
             </a:r>
             <a:endParaRPr lang="en-US" dirty="0"/>
           </a:p>
@@ -603,8 +441,85 @@
           <a:lstStyle/>
           <a:p>
             <a:r>
-              <a:rPr lang="en-US" dirty="0"/>
-              <a:t>Ollama風の /api/chat と OpenAI互換の /v1/chat/completions に対応します。</a:t>
+              <a:rPr lang="en-US"/>
+              <a:t>Ollama</a:t>
+            </a:r>
+            <a:r>
+              <a:rPr lang="ja-JP" altLang="en-US"/>
+              <a:t>風の </a:t>
+            </a:r>
+            <a:r>
+              <a:rPr lang="en-US" altLang="ja-JP"/>
+              <a:t>/</a:t>
+            </a:r>
+            <a:r>
+              <a:rPr lang="en-US"/>
+              <a:t>api/chat </a:t>
+            </a:r>
+            <a:r>
+              <a:rPr lang="ja-JP" altLang="en-US"/>
+              <a:t>と </a:t>
+            </a:r>
+            <a:r>
+              <a:rPr lang="en-US"/>
+              <a:t>OpenAI</a:t>
+            </a:r>
+            <a:r>
+              <a:rPr lang="ja-JP" altLang="en-US"/>
+              <a:t>互換の </a:t>
+            </a:r>
+            <a:r>
+              <a:rPr lang="en-US" altLang="ja-JP"/>
+              <a:t>/</a:t>
+            </a:r>
+            <a:r>
+              <a:rPr lang="en-US"/>
+              <a:t>v1/chat/completions </a:t>
+            </a:r>
+            <a:r>
+              <a:rPr lang="ja-JP" altLang="en-US"/>
+              <a:t>に対応します。</a:t>
+            </a:r>
+          </a:p>
+          <a:p>
+            <a:endParaRPr lang="ja-JP" altLang="en-US"/>
+          </a:p>
+          <a:p>
+            <a:r>
+              <a:rPr lang="en-US" altLang="ja-JP"/>
+              <a:t>[</a:t>
+            </a:r>
+            <a:r>
+              <a:rPr lang="en-US"/>
+              <a:t>Sources]</a:t>
+            </a:r>
+          </a:p>
+          <a:p>
+            <a:r>
+              <a:rPr lang="en-US"/>
+              <a:t>- README.md </a:t>
+            </a:r>
+            <a:r>
+              <a:rPr lang="ja-JP" altLang="en-US"/>
+              <a:t>のローカル</a:t>
+            </a:r>
+            <a:r>
+              <a:rPr lang="en-US"/>
+              <a:t>HTTP API・MCP</a:t>
+            </a:r>
+            <a:r>
+              <a:rPr lang="ja-JP" altLang="en-US"/>
+              <a:t>節</a:t>
+            </a:r>
+          </a:p>
+          <a:p>
+            <a:r>
+              <a:rPr lang="en-US" altLang="ja-JP"/>
+              <a:t>- </a:t>
+            </a:r>
+            <a:r>
+              <a:rPr lang="en-US"/>
+              <a:t>SPEC.md</a:t>
             </a:r>
             <a:endParaRPr lang="en-US" dirty="0"/>
           </a:p>
@@ -691,8 +606,53 @@
           <a:lstStyle/>
           <a:p>
             <a:r>
-              <a:rPr lang="en-US" dirty="0"/>
-              <a:t>macOS版は、macOS上でのビルドと実機確認を終えてから公開します。</a:t>
+              <a:rPr lang="en-US"/>
+              <a:t>macOS</a:t>
+            </a:r>
+            <a:r>
+              <a:rPr lang="ja-JP" altLang="en-US"/>
+              <a:t>版は、</a:t>
+            </a:r>
+            <a:r>
+              <a:rPr lang="en-US"/>
+              <a:t>macOS</a:t>
+            </a:r>
+            <a:r>
+              <a:rPr lang="ja-JP" altLang="en-US"/>
+              <a:t>上でのビルドと実機確認を終えてから公開します。</a:t>
+            </a:r>
+          </a:p>
+          <a:p>
+            <a:endParaRPr lang="ja-JP" altLang="en-US"/>
+          </a:p>
+          <a:p>
+            <a:r>
+              <a:rPr lang="en-US" altLang="ja-JP"/>
+              <a:t>[</a:t>
+            </a:r>
+            <a:r>
+              <a:rPr lang="en-US"/>
+              <a:t>Sources]</a:t>
+            </a:r>
+          </a:p>
+          <a:p>
+            <a:r>
+              <a:rPr lang="en-US"/>
+              <a:t>- distribution/site/index.html </a:t>
+            </a:r>
+            <a:r>
+              <a:rPr lang="ja-JP" altLang="en-US"/>
+              <a:t>の動作環境節</a:t>
+            </a:r>
+          </a:p>
+          <a:p>
+            <a:r>
+              <a:rPr lang="en-US" altLang="ja-JP"/>
+              <a:t>- </a:t>
+            </a:r>
+            <a:r>
+              <a:rPr lang="en-US"/>
+              <a:t>distribution/site/latest.json</a:t>
             </a:r>
             <a:endParaRPr lang="en-US" dirty="0"/>
           </a:p>
@@ -779,8 +739,41 @@
           <a:lstStyle/>
           <a:p>
             <a:r>
-              <a:rPr lang="en-US" dirty="0"/>
+              <a:rPr lang="ja-JP" altLang="en-US"/>
               <a:t>バー表示なら、呼んで、話しかけて、消す。ひと言だけ頼みたいときに向いています。</a:t>
+            </a:r>
+          </a:p>
+          <a:p>
+            <a:endParaRPr lang="ja-JP" altLang="en-US"/>
+          </a:p>
+          <a:p>
+            <a:r>
+              <a:rPr lang="en-US" altLang="ja-JP"/>
+              <a:t>[</a:t>
+            </a:r>
+            <a:r>
+              <a:rPr lang="en-US"/>
+              <a:t>Sources]</a:t>
+            </a:r>
+          </a:p>
+          <a:p>
+            <a:r>
+              <a:rPr lang="en-US"/>
+              <a:t>- distribution/site/index.html </a:t>
+            </a:r>
+            <a:r>
+              <a:rPr lang="ja-JP" altLang="en-US"/>
+              <a:t>のクイックスタート節</a:t>
+            </a:r>
+          </a:p>
+          <a:p>
+            <a:r>
+              <a:rPr lang="en-US" altLang="ja-JP"/>
+              <a:t>- </a:t>
+            </a:r>
+            <a:r>
+              <a:rPr lang="en-US"/>
+              <a:t>docs/images/composer-light.webp</a:t>
             </a:r>
             <a:endParaRPr lang="en-US" dirty="0"/>
           </a:p>
@@ -867,8 +860,39 @@
           <a:lstStyle/>
           <a:p>
             <a:r>
-              <a:rPr lang="en-US" dirty="0"/>
+              <a:rPr lang="ja-JP" altLang="en-US"/>
               <a:t>先に制限を伝えることで、期待とのずれを減らします。</a:t>
+            </a:r>
+          </a:p>
+          <a:p>
+            <a:endParaRPr lang="ja-JP" altLang="en-US"/>
+          </a:p>
+          <a:p>
+            <a:r>
+              <a:rPr lang="en-US" altLang="ja-JP"/>
+              <a:t>[</a:t>
+            </a:r>
+            <a:r>
+              <a:rPr lang="en-US"/>
+              <a:t>Sources]</a:t>
+            </a:r>
+          </a:p>
+          <a:p>
+            <a:r>
+              <a:rPr lang="en-US"/>
+              <a:t>- distribution/site/index.html </a:t>
+            </a:r>
+            <a:r>
+              <a:rPr lang="ja-JP" altLang="en-US"/>
+              <a:t>の</a:t>
+            </a:r>
+            <a:r>
+              <a:rPr lang="en-US"/>
+              <a:t>ALPHA STATUS</a:t>
+            </a:r>
+            <a:r>
+              <a:rPr lang="ja-JP" altLang="en-US"/>
+              <a:t>節</a:t>
             </a:r>
             <a:endParaRPr lang="en-US" dirty="0"/>
           </a:p>
@@ -955,8 +979,31 @@
           <a:lstStyle/>
           <a:p>
             <a:r>
-              <a:rPr lang="en-US" dirty="0"/>
+              <a:rPr lang="ja-JP" altLang="en-US"/>
               <a:t>区分の内容と価格は、販売開始時に案内します。</a:t>
+            </a:r>
+          </a:p>
+          <a:p>
+            <a:endParaRPr lang="ja-JP" altLang="en-US"/>
+          </a:p>
+          <a:p>
+            <a:r>
+              <a:rPr lang="en-US" altLang="ja-JP"/>
+              <a:t>[</a:t>
+            </a:r>
+            <a:r>
+              <a:rPr lang="en-US"/>
+              <a:t>Sources]</a:t>
+            </a:r>
+          </a:p>
+          <a:p>
+            <a:r>
+              <a:rPr lang="en-US"/>
+              <a:t>- distribution/site/index.html </a:t>
+            </a:r>
+            <a:r>
+              <a:rPr lang="ja-JP" altLang="en-US"/>
+              <a:t>の無料公開節</a:t>
             </a:r>
             <a:endParaRPr lang="en-US" dirty="0"/>
           </a:p>
@@ -1043,8 +1090,41 @@
           <a:lstStyle/>
           <a:p>
             <a:r>
-              <a:rPr lang="en-US" dirty="0"/>
-              <a:t>公式ページからインストーラを取得できます。まずは無料のベータ版で、ご自身のPCでの動作をご確認ください。</a:t>
+              <a:rPr lang="ja-JP" altLang="en-US"/>
+              <a:t>公式ページからインストーラを取得できます。まずは無料のアルファ版で、ご自身の</a:t>
+            </a:r>
+            <a:r>
+              <a:rPr lang="en-US" altLang="ja-JP"/>
+              <a:t>PC</a:t>
+            </a:r>
+            <a:r>
+              <a:rPr lang="ja-JP" altLang="en-US"/>
+              <a:t>での動作をご確認ください。</a:t>
+            </a:r>
+          </a:p>
+          <a:p>
+            <a:endParaRPr lang="ja-JP" altLang="en-US"/>
+          </a:p>
+          <a:p>
+            <a:r>
+              <a:rPr lang="en-US" altLang="ja-JP"/>
+              <a:t>[Sources]</a:t>
+            </a:r>
+          </a:p>
+          <a:p>
+            <a:r>
+              <a:rPr lang="en-US" altLang="ja-JP"/>
+              <a:t>- distribution/site/index.html </a:t>
+            </a:r>
+            <a:r>
+              <a:rPr lang="ja-JP" altLang="en-US"/>
+              <a:t>の取得導線</a:t>
+            </a:r>
+          </a:p>
+          <a:p>
+            <a:r>
+              <a:rPr lang="en-US" altLang="ja-JP"/>
+              <a:t>- docs/images/character-mugi.webp</a:t>
             </a:r>
             <a:endParaRPr lang="en-US" dirty="0"/>
           </a:p>
@@ -1131,8 +1211,41 @@
           <a:lstStyle/>
           <a:p>
             <a:r>
-              <a:rPr lang="en-US" dirty="0"/>
-              <a:t>上：ペット表示（キャラとフキダシだけ）／下：作業表示（履歴・回答・実行状況の3ペイン）。</a:t>
+              <a:rPr lang="ja-JP" altLang="en-US"/>
+              <a:t>上：ペット表示（キャラとフキダシだけ）／下：作業表示（履歴・回答・実行状況の</a:t>
+            </a:r>
+            <a:r>
+              <a:rPr lang="en-US" altLang="ja-JP"/>
+              <a:t>3</a:t>
+            </a:r>
+            <a:r>
+              <a:rPr lang="ja-JP" altLang="en-US"/>
+              <a:t>ペイン）。</a:t>
+            </a:r>
+          </a:p>
+          <a:p>
+            <a:endParaRPr lang="ja-JP" altLang="en-US"/>
+          </a:p>
+          <a:p>
+            <a:r>
+              <a:rPr lang="en-US" altLang="ja-JP"/>
+              <a:t>[</a:t>
+            </a:r>
+            <a:r>
+              <a:rPr lang="en-US"/>
+              <a:t>Sources]</a:t>
+            </a:r>
+          </a:p>
+          <a:p>
+            <a:r>
+              <a:rPr lang="en-US"/>
+              <a:t>- distribution/site/index.html</a:t>
+            </a:r>
+          </a:p>
+          <a:p>
+            <a:r>
+              <a:rPr lang="en-US"/>
+              <a:t>- README.md</a:t>
             </a:r>
             <a:endParaRPr lang="en-US" dirty="0"/>
           </a:p>
@@ -1219,8 +1332,23 @@
           <a:lstStyle/>
           <a:p>
             <a:r>
-              <a:rPr lang="en-US" dirty="0"/>
+              <a:rPr lang="ja-JP" altLang="en-US"/>
               <a:t>外部サービスを使う機能は、利用者が設定して有効にしたものだけが動きます。</a:t>
+            </a:r>
+          </a:p>
+          <a:p>
+            <a:endParaRPr lang="ja-JP" altLang="en-US"/>
+          </a:p>
+          <a:p>
+            <a:r>
+              <a:rPr lang="en-US" altLang="ja-JP"/>
+              <a:t>[Sources]</a:t>
+            </a:r>
+          </a:p>
+          <a:p>
+            <a:r>
+              <a:rPr lang="en-US" altLang="ja-JP"/>
+              <a:t>- distribution/site/index.html</a:t>
             </a:r>
             <a:endParaRPr lang="en-US" dirty="0"/>
           </a:p>
@@ -1307,8 +1435,27 @@
           <a:lstStyle/>
           <a:p>
             <a:r>
-              <a:rPr lang="en-US" dirty="0"/>
+              <a:rPr lang="ja-JP" altLang="en-US"/>
               <a:t>スキルは会話の内容から自動で選ばれます。使わない連携は設定しなければ動きません。</a:t>
+            </a:r>
+          </a:p>
+          <a:p>
+            <a:endParaRPr lang="ja-JP" altLang="en-US"/>
+          </a:p>
+          <a:p>
+            <a:r>
+              <a:rPr lang="en-US" altLang="ja-JP"/>
+              <a:t>[Sources]</a:t>
+            </a:r>
+          </a:p>
+          <a:p>
+            <a:r>
+              <a:rPr lang="en-US" altLang="ja-JP"/>
+              <a:t>- README.md </a:t>
+            </a:r>
+            <a:r>
+              <a:rPr lang="ja-JP" altLang="en-US"/>
+              <a:t>の機能一覧とスキル一覧</a:t>
             </a:r>
             <a:endParaRPr lang="en-US" dirty="0"/>
           </a:p>
@@ -1395,8 +1542,61 @@
           <a:lstStyle/>
           <a:p>
             <a:r>
-              <a:rPr lang="en-US" dirty="0"/>
-              <a:t>既定はローカル。クラウドAIは、使うと決めたときだけ送信されます。</a:t>
+              <a:rPr lang="ja-JP" altLang="en-US"/>
+              <a:t>既定はローカル。クラウド</a:t>
+            </a:r>
+            <a:r>
+              <a:rPr lang="en-US" altLang="ja-JP"/>
+              <a:t>AI</a:t>
+            </a:r>
+            <a:r>
+              <a:rPr lang="ja-JP" altLang="en-US"/>
+              <a:t>は、使うと決めたときだけ送信されます。</a:t>
+            </a:r>
+          </a:p>
+          <a:p>
+            <a:endParaRPr lang="ja-JP" altLang="en-US"/>
+          </a:p>
+          <a:p>
+            <a:r>
+              <a:rPr lang="en-US" altLang="ja-JP"/>
+              <a:t>[Sources]</a:t>
+            </a:r>
+          </a:p>
+          <a:p>
+            <a:r>
+              <a:rPr lang="en-US" altLang="ja-JP"/>
+              <a:t>- distribution/site/index.html </a:t>
+            </a:r>
+            <a:r>
+              <a:rPr lang="ja-JP" altLang="en-US"/>
+              <a:t>の</a:t>
+            </a:r>
+            <a:r>
+              <a:rPr lang="en-US" altLang="ja-JP"/>
+              <a:t>AI</a:t>
+            </a:r>
+            <a:r>
+              <a:rPr lang="ja-JP" altLang="en-US"/>
+              <a:t>モデル節</a:t>
+            </a:r>
+          </a:p>
+          <a:p>
+            <a:r>
+              <a:rPr lang="en-US" altLang="ja-JP"/>
+              <a:t>- README.md </a:t>
+            </a:r>
+            <a:r>
+              <a:rPr lang="ja-JP" altLang="en-US"/>
+              <a:t>の</a:t>
+            </a:r>
+            <a:r>
+              <a:rPr lang="en-US" altLang="ja-JP"/>
+              <a:t>9</a:t>
+            </a:r>
+            <a:r>
+              <a:rPr lang="ja-JP" altLang="en-US"/>
+              <a:t>プロバイダ一覧</a:t>
             </a:r>
             <a:endParaRPr lang="en-US" dirty="0"/>
           </a:p>
@@ -1483,8 +1683,41 @@
           <a:lstStyle/>
           <a:p>
             <a:r>
-              <a:rPr lang="en-US" dirty="0"/>
+              <a:rPr lang="ja-JP" altLang="en-US"/>
               <a:t>読み上げの既定はオフ。静かに使いたいときはそのままで大丈夫です。</a:t>
+            </a:r>
+          </a:p>
+          <a:p>
+            <a:endParaRPr lang="ja-JP" altLang="en-US"/>
+          </a:p>
+          <a:p>
+            <a:r>
+              <a:rPr lang="en-US" altLang="ja-JP"/>
+              <a:t>[</a:t>
+            </a:r>
+            <a:r>
+              <a:rPr lang="en-US"/>
+              <a:t>Sources]</a:t>
+            </a:r>
+          </a:p>
+          <a:p>
+            <a:r>
+              <a:rPr lang="en-US"/>
+              <a:t>- distribution/site/index.html </a:t>
+            </a:r>
+            <a:r>
+              <a:rPr lang="ja-JP" altLang="en-US"/>
+              <a:t>の音声・ふれあい節</a:t>
+            </a:r>
+          </a:p>
+          <a:p>
+            <a:r>
+              <a:rPr lang="en-US" altLang="ja-JP"/>
+              <a:t>- </a:t>
+            </a:r>
+            <a:r>
+              <a:rPr lang="en-US"/>
+              <a:t>docs/images/character-mugi.webp</a:t>
             </a:r>
             <a:endParaRPr lang="en-US" dirty="0"/>
           </a:p>
@@ -1571,8 +1804,57 @@
           <a:lstStyle/>
           <a:p>
             <a:r>
-              <a:rPr lang="en-US" dirty="0"/>
-              <a:t>同梱の2Dキャラは全て同じフルモーション仕様です。Live2Dのモデル素材は同梱しません。</a:t>
+              <a:rPr lang="ja-JP" altLang="en-US"/>
+              <a:t>同梱の</a:t>
+            </a:r>
+            <a:r>
+              <a:rPr lang="en-US" altLang="ja-JP"/>
+              <a:t>2</a:t>
+            </a:r>
+            <a:r>
+              <a:rPr lang="en-US"/>
+              <a:t>D</a:t>
+            </a:r>
+            <a:r>
+              <a:rPr lang="ja-JP" altLang="en-US"/>
+              <a:t>キャラは全て同じフルモーション仕様です。</a:t>
+            </a:r>
+            <a:r>
+              <a:rPr lang="en-US"/>
+              <a:t>Live2D</a:t>
+            </a:r>
+            <a:r>
+              <a:rPr lang="ja-JP" altLang="en-US"/>
+              <a:t>のモデル素材は同梱しません。</a:t>
+            </a:r>
+          </a:p>
+          <a:p>
+            <a:endParaRPr lang="ja-JP" altLang="en-US"/>
+          </a:p>
+          <a:p>
+            <a:r>
+              <a:rPr lang="en-US" altLang="ja-JP"/>
+              <a:t>[</a:t>
+            </a:r>
+            <a:r>
+              <a:rPr lang="en-US"/>
+              <a:t>Sources]</a:t>
+            </a:r>
+          </a:p>
+          <a:p>
+            <a:r>
+              <a:rPr lang="en-US"/>
+              <a:t>- distribution/site/characters.html</a:t>
+            </a:r>
+          </a:p>
+          <a:p>
+            <a:r>
+              <a:rPr lang="en-US"/>
+              <a:t>- distribution/site/index.html </a:t>
+            </a:r>
+            <a:r>
+              <a:rPr lang="ja-JP" altLang="en-US"/>
+              <a:t>の同梱キャラクター節</a:t>
             </a:r>
             <a:endParaRPr lang="en-US" dirty="0"/>
           </a:p>
@@ -1659,8 +1941,65 @@
           <a:lstStyle/>
           <a:p>
             <a:r>
-              <a:rPr lang="en-US" dirty="0"/>
+              <a:rPr lang="ja-JP" altLang="en-US"/>
               <a:t>再起動なしで切り替わります。右クリックまたは設定画面から選べます。</a:t>
+            </a:r>
+          </a:p>
+          <a:p>
+            <a:endParaRPr lang="ja-JP" altLang="en-US"/>
+          </a:p>
+          <a:p>
+            <a:r>
+              <a:rPr lang="en-US" altLang="ja-JP"/>
+              <a:t>[</a:t>
+            </a:r>
+            <a:r>
+              <a:rPr lang="en-US"/>
+              <a:t>Sources]</a:t>
+            </a:r>
+          </a:p>
+          <a:p>
+            <a:r>
+              <a:rPr lang="en-US"/>
+              <a:t>- distribution/site/index.html </a:t>
+            </a:r>
+            <a:r>
+              <a:rPr lang="ja-JP" altLang="en-US"/>
+              <a:t>の表示形式節</a:t>
+            </a:r>
+          </a:p>
+          <a:p>
+            <a:r>
+              <a:rPr lang="en-US" altLang="ja-JP"/>
+              <a:t>- </a:t>
+            </a:r>
+            <a:r>
+              <a:rPr lang="en-US"/>
+              <a:t>docs/images/character-mugi-stream.webp </a:t>
+            </a:r>
+            <a:r>
+              <a:rPr lang="ja-JP" altLang="en-US"/>
+              <a:t>を</a:t>
+            </a:r>
+            <a:r>
+              <a:rPr lang="en-US" altLang="ja-JP"/>
+              <a:t>480</a:t>
+            </a:r>
+            <a:r>
+              <a:rPr lang="en-US"/>
+              <a:t>x270・16fps・6</a:t>
+            </a:r>
+            <a:r>
+              <a:rPr lang="ja-JP" altLang="en-US"/>
+              <a:t>秒の</a:t>
+            </a:r>
+            <a:r>
+              <a:rPr lang="en-US"/>
+              <a:t>H.264</a:t>
+            </a:r>
+            <a:r>
+              <a:rPr lang="ja-JP" altLang="en-US"/>
+              <a:t>動画へ変換</a:t>
             </a:r>
             <a:endParaRPr lang="en-US" dirty="0"/>
           </a:p>
@@ -1747,8 +2086,57 @@
           <a:lstStyle/>
           <a:p>
             <a:r>
-              <a:rPr lang="en-US" dirty="0"/>
-              <a:t>設定・会話履歴・長期記憶・関係性・追加キャラ・AIモデルは、すべて利用者のPC内に保存されます。</a:t>
+              <a:rPr lang="ja-JP" altLang="en-US"/>
+              <a:t>設定・会話履歴・長期記憶・関係性・追加キャラ・</a:t>
+            </a:r>
+            <a:r>
+              <a:rPr lang="en-US"/>
+              <a:t>AI</a:t>
+            </a:r>
+            <a:r>
+              <a:rPr lang="ja-JP" altLang="en-US"/>
+              <a:t>モデルは、すべて利用者の</a:t>
+            </a:r>
+            <a:r>
+              <a:rPr lang="en-US"/>
+              <a:t>PC</a:t>
+            </a:r>
+            <a:r>
+              <a:rPr lang="ja-JP" altLang="en-US"/>
+              <a:t>内に保存されます。</a:t>
+            </a:r>
+          </a:p>
+          <a:p>
+            <a:endParaRPr lang="ja-JP" altLang="en-US"/>
+          </a:p>
+          <a:p>
+            <a:r>
+              <a:rPr lang="en-US" altLang="ja-JP"/>
+              <a:t>[</a:t>
+            </a:r>
+            <a:r>
+              <a:rPr lang="en-US"/>
+              <a:t>Sources]</a:t>
+            </a:r>
+          </a:p>
+          <a:p>
+            <a:r>
+              <a:rPr lang="en-US"/>
+              <a:t>- distribution/site/index.html </a:t>
+            </a:r>
+            <a:r>
+              <a:rPr lang="ja-JP" altLang="en-US"/>
+              <a:t>のプライバシー節</a:t>
+            </a:r>
+          </a:p>
+          <a:p>
+            <a:r>
+              <a:rPr lang="en-US" altLang="ja-JP"/>
+              <a:t>- </a:t>
+            </a:r>
+            <a:r>
+              <a:rPr lang="en-US"/>
+              <a:t>distribution/site/privacy.html</a:t>
             </a:r>
             <a:endParaRPr lang="en-US" dirty="0"/>
           </a:p>
@@ -1823,6 +2211,11 @@
 <file path=ppt/slideMasters/slideMaster1.xml><?xml version="1.0" encoding="utf-8"?>
 <p:sldMaster xmlns:a="http://schemas.openxmlformats.org/drawingml/2006/main" xmlns:r="http://schemas.openxmlformats.org/officeDocument/2006/relationships" xmlns:p="http://schemas.openxmlformats.org/presentationml/2006/main">
   <p:cSld>
+    <p:bg>
+      <p:bgRef idx="1001">
+        <a:schemeClr val="bg1"/>
+      </p:bgRef>
+    </p:bg>
     <p:spTree>
       <p:nvGrpSpPr>
         <p:cNvPr id="1" name=""/>
@@ -2103,7 +2496,7 @@
     <p:bg>
       <p:bgPr>
         <a:blipFill dpi="0" rotWithShape="1">
-          <a:blip r:embed="rId1">
+          <a:blip r:embed="rId3">
             <a:lum/>
           </a:blip>
           <a:srcRect/>
@@ -2149,11 +2542,11 @@
           <a:bodyPr wrap="square" lIns="0" tIns="0" rIns="0" bIns="0" rtlCol="0" anchor="ctr"/>
           <a:lstStyle/>
           <a:p>
-            <a:pPr indent="0" marL="0">
-              <a:buNone/>
-            </a:pPr>
-            <a:r>
-              <a:rPr lang="en-US" sz="1100" b="1" spc="300" kern="0" dirty="0">
+            <a:pPr marL="0" indent="0">
+              <a:buNone/>
+            </a:pPr>
+            <a:r>
+              <a:rPr lang="en-US" sz="1100" b="1" kern="0" spc="300" dirty="0">
                 <a:solidFill>
                   <a:srgbClr val="F2A8B8"/>
                 </a:solidFill>
@@ -2188,7 +2581,7 @@
           <a:bodyPr wrap="square" lIns="0" tIns="0" rIns="0" bIns="0" rtlCol="0" anchor="ctr"/>
           <a:lstStyle/>
           <a:p>
-            <a:pPr indent="0" marL="0">
+            <a:pPr marL="0" indent="0">
               <a:lnSpc>
                 <a:spcPts val="6200"/>
               </a:lnSpc>
@@ -2208,7 +2601,7 @@
             <a:endParaRPr lang="en-US" sz="5200" dirty="0"/>
           </a:p>
           <a:p>
-            <a:pPr indent="0" marL="0">
+            <a:pPr marL="0" indent="0">
               <a:lnSpc>
                 <a:spcPts val="6200"/>
               </a:lnSpc>
@@ -2250,7 +2643,7 @@
           <a:bodyPr wrap="square" lIns="0" tIns="0" rIns="0" bIns="0" rtlCol="0" anchor="ctr"/>
           <a:lstStyle/>
           <a:p>
-            <a:pPr indent="0" marL="0">
+            <a:pPr marL="0" indent="0">
               <a:lnSpc>
                 <a:spcPts val="2300"/>
               </a:lnSpc>
@@ -2270,7 +2663,7 @@
             <a:endParaRPr lang="en-US" sz="1200" dirty="0"/>
           </a:p>
           <a:p>
-            <a:pPr indent="0" marL="0">
+            <a:pPr marL="0" indent="0">
               <a:lnSpc>
                 <a:spcPts val="2300"/>
               </a:lnSpc>
@@ -2290,7 +2683,7 @@
             <a:endParaRPr lang="en-US" sz="1200" dirty="0"/>
           </a:p>
           <a:p>
-            <a:pPr indent="0" marL="0">
+            <a:pPr marL="0" indent="0">
               <a:lnSpc>
                 <a:spcPts val="2300"/>
               </a:lnSpc>
@@ -2354,11 +2747,11 @@
           <a:bodyPr wrap="square" lIns="0" tIns="0" rIns="0" bIns="0" rtlCol="0" anchor="ctr"/>
           <a:lstStyle/>
           <a:p>
-            <a:pPr algn="ctr" indent="0" marL="0">
-              <a:buNone/>
-            </a:pPr>
-            <a:r>
-              <a:rPr lang="en-US" sz="1100" b="1" spc="60" kern="0" dirty="0">
+            <a:pPr marL="0" indent="0" algn="ctr">
+              <a:buNone/>
+            </a:pPr>
+            <a:r>
+              <a:rPr lang="en-US" sz="1100" b="1" kern="0" spc="60">
                 <a:solidFill>
                   <a:srgbClr val="FFFFFF"/>
                 </a:solidFill>
@@ -2366,7 +2759,7 @@
                 <a:ea typeface="Meiryo" pitchFamily="34" charset="-122"/>
                 <a:cs typeface="Meiryo" pitchFamily="34" charset="-120"/>
               </a:rPr>
-              <a:t>v1.0.2 Beta</a:t>
+              <a:t>v1.0.2 ALPHA</a:t>
             </a:r>
             <a:endParaRPr lang="en-US" sz="1100" dirty="0"/>
           </a:p>
@@ -2420,11 +2813,11 @@
           <a:bodyPr wrap="square" lIns="0" tIns="0" rIns="0" bIns="0" rtlCol="0" anchor="ctr"/>
           <a:lstStyle/>
           <a:p>
-            <a:pPr algn="ctr" indent="0" marL="0">
-              <a:buNone/>
-            </a:pPr>
-            <a:r>
-              <a:rPr lang="en-US" sz="1100" b="1" spc="60" kern="0" dirty="0">
+            <a:pPr marL="0" indent="0" algn="ctr">
+              <a:buNone/>
+            </a:pPr>
+            <a:r>
+              <a:rPr lang="en-US" sz="1100" b="1" kern="0" spc="60" dirty="0">
                 <a:solidFill>
                   <a:srgbClr val="FFFFFF"/>
                 </a:solidFill>
@@ -2486,11 +2879,11 @@
           <a:bodyPr wrap="square" lIns="0" tIns="0" rIns="0" bIns="0" rtlCol="0" anchor="ctr"/>
           <a:lstStyle/>
           <a:p>
-            <a:pPr algn="ctr" indent="0" marL="0">
-              <a:buNone/>
-            </a:pPr>
-            <a:r>
-              <a:rPr lang="en-US" sz="1100" b="1" spc="60" kern="0" dirty="0">
+            <a:pPr marL="0" indent="0" algn="ctr">
+              <a:buNone/>
+            </a:pPr>
+            <a:r>
+              <a:rPr lang="en-US" sz="1100" b="1" kern="0" spc="60" dirty="0">
                 <a:solidFill>
                   <a:srgbClr val="FFFFFF"/>
                 </a:solidFill>
@@ -2525,7 +2918,7 @@
           <a:bodyPr wrap="square" lIns="0" tIns="0" rIns="0" bIns="0" rtlCol="0" anchor="ctr"/>
           <a:lstStyle/>
           <a:p>
-            <a:pPr indent="0" marL="0">
+            <a:pPr marL="0" indent="0">
               <a:buNone/>
             </a:pPr>
             <a:r>
@@ -2564,7 +2957,7 @@
           </a:solidFill>
           <a:ln/>
           <a:effectLst>
-            <a:outerShdw sx="100000" sy="100000" kx="0" ky="0" algn="bl" rotWithShape="0" blurRad="152400" dist="38100" dir="5400000">
+            <a:outerShdw blurRad="152400" dist="38100" dir="5400000" algn="bl" rotWithShape="0">
               <a:srgbClr val="8A6070">
                 <a:alpha val="11000"/>
               </a:srgbClr>
@@ -2574,14 +2967,14 @@
       </p:sp>
       <p:pic>
         <p:nvPicPr>
-          <p:cNvPr id="13" name="Image 0" descr="/tmp/claude-0/-home-user-PicoAgent/7130734a-69b9-54b3-90f7-bb7bb9043f8d/scratchpad/deck/img/flat-hero.jpg">    </p:cNvPr>
+          <p:cNvPr id="13" name="Image 0" descr="/tmp/claude-0/-home-user-PicoAgent/7130734a-69b9-54b3-90f7-bb7bb9043f8d/scratchpad/deck/img/flat-hero.jpg"/>
           <p:cNvPicPr>
             <a:picLocks noChangeAspect="1"/>
           </p:cNvPicPr>
           <p:nvPr/>
         </p:nvPicPr>
         <p:blipFill>
-          <a:blip r:embed="rId2"/>
+          <a:blip r:embed="rId4"/>
           <a:stretch>
             <a:fillRect/>
           </a:stretch>
@@ -2617,7 +3010,7 @@
           <a:bodyPr wrap="square" lIns="0" tIns="0" rIns="0" bIns="0" rtlCol="0" anchor="ctr"/>
           <a:lstStyle/>
           <a:p>
-            <a:pPr algn="ctr" indent="0" marL="0">
+            <a:pPr marL="0" indent="0" algn="ctr">
               <a:buNone/>
             </a:pPr>
             <a:r>
@@ -2649,7 +3042,7 @@
     <p:bg>
       <p:bgPr>
         <a:blipFill dpi="0" rotWithShape="1">
-          <a:blip r:embed="rId1">
+          <a:blip r:embed="rId3">
             <a:lum/>
           </a:blip>
           <a:srcRect/>
@@ -2695,11 +3088,11 @@
           <a:bodyPr wrap="square" lIns="0" tIns="0" rIns="0" bIns="0" rtlCol="0" anchor="ctr"/>
           <a:lstStyle/>
           <a:p>
-            <a:pPr indent="0" marL="0">
-              <a:buNone/>
-            </a:pPr>
-            <a:r>
-              <a:rPr lang="en-US" sz="1050" b="1" spc="240" kern="0" dirty="0">
+            <a:pPr marL="0" indent="0">
+              <a:buNone/>
+            </a:pPr>
+            <a:r>
+              <a:rPr lang="en-US" sz="1050" b="1" kern="0" spc="240" dirty="0">
                 <a:solidFill>
                   <a:srgbClr val="B54862"/>
                 </a:solidFill>
@@ -2734,7 +3127,7 @@
           <a:bodyPr wrap="square" lIns="0" tIns="0" rIns="0" bIns="0" rtlCol="0" anchor="ctr"/>
           <a:lstStyle/>
           <a:p>
-            <a:pPr indent="0" marL="0">
+            <a:pPr marL="0" indent="0">
               <a:lnSpc>
                 <a:spcPts val="4000"/>
               </a:lnSpc>
@@ -2776,7 +3169,7 @@
           <a:bodyPr wrap="square" lIns="0" tIns="0" rIns="0" bIns="0" rtlCol="0" anchor="ctr"/>
           <a:lstStyle/>
           <a:p>
-            <a:pPr indent="0" marL="0">
+            <a:pPr marL="0" indent="0">
               <a:lnSpc>
                 <a:spcPts val="2100"/>
               </a:lnSpc>
@@ -2823,7 +3216,7 @@
             <a:prstDash val="solid"/>
           </a:ln>
           <a:effectLst>
-            <a:outerShdw sx="100000" sy="100000" kx="0" ky="0" algn="bl" rotWithShape="0" blurRad="152400" dist="38100" dir="5400000">
+            <a:outerShdw blurRad="152400" dist="38100" dir="5400000" algn="bl" rotWithShape="0">
               <a:srgbClr val="8A6070">
                 <a:alpha val="11000"/>
               </a:srgbClr>
@@ -2852,7 +3245,7 @@
           <a:bodyPr wrap="square" lIns="0" tIns="0" rIns="0" bIns="0" rtlCol="0" anchor="ctr"/>
           <a:lstStyle/>
           <a:p>
-            <a:pPr indent="0" marL="0">
+            <a:pPr marL="0" indent="0">
               <a:buNone/>
             </a:pPr>
             <a:r>
@@ -2891,7 +3284,7 @@
           <a:bodyPr wrap="square" lIns="0" tIns="0" rIns="0" bIns="0" rtlCol="0" anchor="ctr"/>
           <a:lstStyle/>
           <a:p>
-            <a:pPr indent="0" marL="0">
+            <a:pPr marL="0" indent="0">
               <a:lnSpc>
                 <a:spcPts val="1800"/>
               </a:lnSpc>
@@ -2955,7 +3348,7 @@
           <a:bodyPr wrap="square" lIns="0" tIns="0" rIns="0" bIns="0" rtlCol="0" anchor="ctr"/>
           <a:lstStyle/>
           <a:p>
-            <a:pPr algn="ctr" indent="0" marL="0">
+            <a:pPr marL="0" indent="0" algn="ctr">
               <a:buNone/>
             </a:pPr>
             <a:r>
@@ -3016,7 +3409,7 @@
           <a:bodyPr wrap="square" lIns="0" tIns="0" rIns="0" bIns="0" rtlCol="0" anchor="ctr"/>
           <a:lstStyle/>
           <a:p>
-            <a:pPr algn="ctr" indent="0" marL="0">
+            <a:pPr marL="0" indent="0" algn="ctr">
               <a:buNone/>
             </a:pPr>
             <a:r>
@@ -3060,7 +3453,7 @@
             <a:prstDash val="solid"/>
           </a:ln>
           <a:effectLst>
-            <a:outerShdw sx="100000" sy="100000" kx="0" ky="0" algn="bl" rotWithShape="0" blurRad="152400" dist="38100" dir="5400000">
+            <a:outerShdw blurRad="152400" dist="38100" dir="5400000" algn="bl" rotWithShape="0">
               <a:srgbClr val="8A6070">
                 <a:alpha val="11000"/>
               </a:srgbClr>
@@ -3089,7 +3482,7 @@
           <a:bodyPr wrap="square" lIns="0" tIns="0" rIns="0" bIns="0" rtlCol="0" anchor="ctr"/>
           <a:lstStyle/>
           <a:p>
-            <a:pPr indent="0" marL="0">
+            <a:pPr marL="0" indent="0">
               <a:buNone/>
             </a:pPr>
             <a:r>
@@ -3128,7 +3521,7 @@
           <a:bodyPr wrap="square" lIns="0" tIns="0" rIns="0" bIns="0" rtlCol="0" anchor="ctr"/>
           <a:lstStyle/>
           <a:p>
-            <a:pPr indent="0" marL="0">
+            <a:pPr marL="0" indent="0">
               <a:lnSpc>
                 <a:spcPts val="1800"/>
               </a:lnSpc>
@@ -3192,7 +3585,7 @@
           <a:bodyPr wrap="square" lIns="0" tIns="0" rIns="0" bIns="0" rtlCol="0" anchor="ctr"/>
           <a:lstStyle/>
           <a:p>
-            <a:pPr algn="ctr" indent="0" marL="0">
+            <a:pPr marL="0" indent="0" algn="ctr">
               <a:buNone/>
             </a:pPr>
             <a:r>
@@ -3236,7 +3629,7 @@
             <a:prstDash val="solid"/>
           </a:ln>
           <a:effectLst>
-            <a:outerShdw sx="100000" sy="100000" kx="0" ky="0" algn="bl" rotWithShape="0" blurRad="152400" dist="38100" dir="5400000">
+            <a:outerShdw blurRad="152400" dist="38100" dir="5400000" algn="bl" rotWithShape="0">
               <a:srgbClr val="8A6070">
                 <a:alpha val="11000"/>
               </a:srgbClr>
@@ -3265,7 +3658,7 @@
           <a:bodyPr wrap="square" lIns="0" tIns="0" rIns="0" bIns="0" rtlCol="0" anchor="ctr"/>
           <a:lstStyle/>
           <a:p>
-            <a:pPr indent="0" marL="0">
+            <a:pPr marL="0" indent="0">
               <a:buNone/>
             </a:pPr>
             <a:r>
@@ -3304,7 +3697,7 @@
           <a:bodyPr wrap="square" lIns="0" tIns="0" rIns="0" bIns="0" rtlCol="0" anchor="ctr"/>
           <a:lstStyle/>
           <a:p>
-            <a:pPr indent="0" marL="0">
+            <a:pPr marL="0" indent="0">
               <a:lnSpc>
                 <a:spcPts val="1800"/>
               </a:lnSpc>
@@ -3368,7 +3761,7 @@
           <a:bodyPr wrap="square" lIns="0" tIns="0" rIns="0" bIns="0" rtlCol="0" anchor="ctr"/>
           <a:lstStyle/>
           <a:p>
-            <a:pPr algn="ctr" indent="0" marL="0">
+            <a:pPr marL="0" indent="0" algn="ctr">
               <a:buNone/>
             </a:pPr>
             <a:r>
@@ -3407,7 +3800,7 @@
           <a:bodyPr wrap="square" lIns="0" tIns="0" rIns="0" bIns="0" rtlCol="0" anchor="ctr"/>
           <a:lstStyle/>
           <a:p>
-            <a:pPr indent="0" marL="0">
+            <a:pPr marL="0" indent="0">
               <a:buNone/>
             </a:pPr>
             <a:r>
@@ -3446,7 +3839,7 @@
           <a:bodyPr wrap="square" lIns="0" tIns="0" rIns="0" bIns="0" rtlCol="0" anchor="ctr"/>
           <a:lstStyle/>
           <a:p>
-            <a:pPr indent="0" marL="0">
+            <a:pPr marL="0" indent="0">
               <a:buNone/>
             </a:pPr>
             <a:r>
@@ -3458,7 +3851,18 @@
                 <a:ea typeface="Meiryo" pitchFamily="34" charset="-122"/>
                 <a:cs typeface="Meiryo" pitchFamily="34" charset="-120"/>
               </a:rPr>
-              <a:t>PicoAgent v1.0.2 Beta</a:t>
+              <a:t>PicoAgent </a:t>
+            </a:r>
+            <a:r>
+              <a:rPr lang="en-US" sz="850">
+                <a:solidFill>
+                  <a:srgbClr val="A79AA1"/>
+                </a:solidFill>
+                <a:latin typeface="Meiryo" pitchFamily="34" charset="0"/>
+                <a:ea typeface="Meiryo" pitchFamily="34" charset="-122"/>
+                <a:cs typeface="Meiryo" pitchFamily="34" charset="-120"/>
+              </a:rPr>
+              <a:t>v1.0.2 ALPHA</a:t>
             </a:r>
             <a:endParaRPr lang="en-US" sz="850" dirty="0"/>
           </a:p>
@@ -3485,7 +3889,7 @@
           <a:bodyPr wrap="square" lIns="0" tIns="0" rIns="0" bIns="0" rtlCol="0" anchor="ctr"/>
           <a:lstStyle/>
           <a:p>
-            <a:pPr algn="r" indent="0" marL="0">
+            <a:pPr marL="0" indent="0" algn="r">
               <a:buNone/>
             </a:pPr>
             <a:r>
@@ -3517,7 +3921,7 @@
     <p:bg>
       <p:bgPr>
         <a:blipFill dpi="0" rotWithShape="1">
-          <a:blip r:embed="rId1">
+          <a:blip r:embed="rId3">
             <a:lum/>
           </a:blip>
           <a:srcRect/>
@@ -3563,11 +3967,11 @@
           <a:bodyPr wrap="square" lIns="0" tIns="0" rIns="0" bIns="0" rtlCol="0" anchor="ctr"/>
           <a:lstStyle/>
           <a:p>
-            <a:pPr indent="0" marL="0">
-              <a:buNone/>
-            </a:pPr>
-            <a:r>
-              <a:rPr lang="en-US" sz="1050" b="1" spc="240" kern="0" dirty="0">
+            <a:pPr marL="0" indent="0">
+              <a:buNone/>
+            </a:pPr>
+            <a:r>
+              <a:rPr lang="en-US" sz="1050" b="1" kern="0" spc="240" dirty="0">
                 <a:solidFill>
                   <a:srgbClr val="B54862"/>
                 </a:solidFill>
@@ -3602,7 +4006,7 @@
           <a:bodyPr wrap="square" lIns="0" tIns="0" rIns="0" bIns="0" rtlCol="0" anchor="ctr"/>
           <a:lstStyle/>
           <a:p>
-            <a:pPr indent="0" marL="0">
+            <a:pPr marL="0" indent="0">
               <a:lnSpc>
                 <a:spcPts val="4000"/>
               </a:lnSpc>
@@ -3644,7 +4048,7 @@
           <a:bodyPr wrap="square" lIns="0" tIns="0" rIns="0" bIns="0" rtlCol="0" anchor="ctr"/>
           <a:lstStyle/>
           <a:p>
-            <a:pPr indent="0" marL="0">
+            <a:pPr marL="0" indent="0">
               <a:lnSpc>
                 <a:spcPts val="2100"/>
               </a:lnSpc>
@@ -3691,7 +4095,7 @@
             <a:prstDash val="solid"/>
           </a:ln>
           <a:effectLst>
-            <a:outerShdw sx="100000" sy="100000" kx="0" ky="0" algn="bl" rotWithShape="0" blurRad="152400" dist="38100" dir="5400000">
+            <a:outerShdw blurRad="152400" dist="38100" dir="5400000" algn="bl" rotWithShape="0">
               <a:srgbClr val="8A6070">
                 <a:alpha val="11000"/>
               </a:srgbClr>
@@ -3720,11 +4124,11 @@
           <a:bodyPr wrap="square" lIns="0" tIns="0" rIns="0" bIns="0" rtlCol="0" anchor="ctr"/>
           <a:lstStyle/>
           <a:p>
-            <a:pPr indent="0" marL="0">
-              <a:buNone/>
-            </a:pPr>
-            <a:r>
-              <a:rPr lang="en-US" sz="900" b="1" spc="180" kern="0" dirty="0">
+            <a:pPr marL="0" indent="0">
+              <a:buNone/>
+            </a:pPr>
+            <a:r>
+              <a:rPr lang="en-US" sz="900" b="1" kern="0" spc="180" dirty="0">
                 <a:solidFill>
                   <a:srgbClr val="B54862"/>
                 </a:solidFill>
@@ -3759,7 +4163,7 @@
           <a:bodyPr wrap="square" lIns="0" tIns="0" rIns="0" bIns="0" rtlCol="0" anchor="ctr"/>
           <a:lstStyle/>
           <a:p>
-            <a:pPr indent="0" marL="0">
+            <a:pPr marL="0" indent="0">
               <a:buNone/>
             </a:pPr>
             <a:r>
@@ -3798,7 +4202,7 @@
           <a:bodyPr wrap="square" lIns="0" tIns="0" rIns="0" bIns="0" rtlCol="0" anchor="ctr"/>
           <a:lstStyle/>
           <a:p>
-            <a:pPr indent="0" marL="0">
+            <a:pPr marL="0" indent="0">
               <a:lnSpc>
                 <a:spcPts val="1400"/>
               </a:lnSpc>
@@ -3845,7 +4249,7 @@
             <a:prstDash val="solid"/>
           </a:ln>
           <a:effectLst>
-            <a:outerShdw sx="100000" sy="100000" kx="0" ky="0" algn="bl" rotWithShape="0" blurRad="152400" dist="38100" dir="5400000">
+            <a:outerShdw blurRad="152400" dist="38100" dir="5400000" algn="bl" rotWithShape="0">
               <a:srgbClr val="8A6070">
                 <a:alpha val="11000"/>
               </a:srgbClr>
@@ -3874,11 +4278,11 @@
           <a:bodyPr wrap="square" lIns="0" tIns="0" rIns="0" bIns="0" rtlCol="0" anchor="ctr"/>
           <a:lstStyle/>
           <a:p>
-            <a:pPr indent="0" marL="0">
-              <a:buNone/>
-            </a:pPr>
-            <a:r>
-              <a:rPr lang="en-US" sz="900" b="1" spc="180" kern="0" dirty="0">
+            <a:pPr marL="0" indent="0">
+              <a:buNone/>
+            </a:pPr>
+            <a:r>
+              <a:rPr lang="en-US" sz="900" b="1" kern="0" spc="180" dirty="0">
                 <a:solidFill>
                   <a:srgbClr val="B54862"/>
                 </a:solidFill>
@@ -3913,7 +4317,7 @@
           <a:bodyPr wrap="square" lIns="0" tIns="0" rIns="0" bIns="0" rtlCol="0" anchor="ctr"/>
           <a:lstStyle/>
           <a:p>
-            <a:pPr indent="0" marL="0">
+            <a:pPr marL="0" indent="0">
               <a:buNone/>
             </a:pPr>
             <a:r>
@@ -3952,7 +4356,7 @@
           <a:bodyPr wrap="square" lIns="0" tIns="0" rIns="0" bIns="0" rtlCol="0" anchor="ctr"/>
           <a:lstStyle/>
           <a:p>
-            <a:pPr indent="0" marL="0">
+            <a:pPr marL="0" indent="0">
               <a:lnSpc>
                 <a:spcPts val="1400"/>
               </a:lnSpc>
@@ -3999,7 +4403,7 @@
             <a:prstDash val="solid"/>
           </a:ln>
           <a:effectLst>
-            <a:outerShdw sx="100000" sy="100000" kx="0" ky="0" algn="bl" rotWithShape="0" blurRad="152400" dist="38100" dir="5400000">
+            <a:outerShdw blurRad="152400" dist="38100" dir="5400000" algn="bl" rotWithShape="0">
               <a:srgbClr val="8A6070">
                 <a:alpha val="11000"/>
               </a:srgbClr>
@@ -4028,11 +4432,11 @@
           <a:bodyPr wrap="square" lIns="0" tIns="0" rIns="0" bIns="0" rtlCol="0" anchor="ctr"/>
           <a:lstStyle/>
           <a:p>
-            <a:pPr indent="0" marL="0">
-              <a:buNone/>
-            </a:pPr>
-            <a:r>
-              <a:rPr lang="en-US" sz="900" b="1" spc="180" kern="0" dirty="0">
+            <a:pPr marL="0" indent="0">
+              <a:buNone/>
+            </a:pPr>
+            <a:r>
+              <a:rPr lang="en-US" sz="900" b="1" kern="0" spc="180" dirty="0">
                 <a:solidFill>
                   <a:srgbClr val="B54862"/>
                 </a:solidFill>
@@ -4067,7 +4471,7 @@
           <a:bodyPr wrap="square" lIns="0" tIns="0" rIns="0" bIns="0" rtlCol="0" anchor="ctr"/>
           <a:lstStyle/>
           <a:p>
-            <a:pPr indent="0" marL="0">
+            <a:pPr marL="0" indent="0">
               <a:buNone/>
             </a:pPr>
             <a:r>
@@ -4106,7 +4510,7 @@
           <a:bodyPr wrap="square" lIns="0" tIns="0" rIns="0" bIns="0" rtlCol="0" anchor="ctr"/>
           <a:lstStyle/>
           <a:p>
-            <a:pPr indent="0" marL="0">
+            <a:pPr marL="0" indent="0">
               <a:lnSpc>
                 <a:spcPts val="1400"/>
               </a:lnSpc>
@@ -4153,7 +4557,7 @@
             <a:prstDash val="solid"/>
           </a:ln>
           <a:effectLst>
-            <a:outerShdw sx="100000" sy="100000" kx="0" ky="0" algn="bl" rotWithShape="0" blurRad="152400" dist="38100" dir="5400000">
+            <a:outerShdw blurRad="152400" dist="38100" dir="5400000" algn="bl" rotWithShape="0">
               <a:srgbClr val="8A6070">
                 <a:alpha val="11000"/>
               </a:srgbClr>
@@ -4182,11 +4586,11 @@
           <a:bodyPr wrap="square" lIns="0" tIns="0" rIns="0" bIns="0" rtlCol="0" anchor="ctr"/>
           <a:lstStyle/>
           <a:p>
-            <a:pPr indent="0" marL="0">
-              <a:buNone/>
-            </a:pPr>
-            <a:r>
-              <a:rPr lang="en-US" sz="900" b="1" spc="180" kern="0" dirty="0">
+            <a:pPr marL="0" indent="0">
+              <a:buNone/>
+            </a:pPr>
+            <a:r>
+              <a:rPr lang="en-US" sz="900" b="1" kern="0" spc="180" dirty="0">
                 <a:solidFill>
                   <a:srgbClr val="B54862"/>
                 </a:solidFill>
@@ -4221,7 +4625,7 @@
           <a:bodyPr wrap="square" lIns="0" tIns="0" rIns="0" bIns="0" rtlCol="0" anchor="ctr"/>
           <a:lstStyle/>
           <a:p>
-            <a:pPr indent="0" marL="0">
+            <a:pPr marL="0" indent="0">
               <a:buNone/>
             </a:pPr>
             <a:r>
@@ -4260,7 +4664,7 @@
           <a:bodyPr wrap="square" lIns="0" tIns="0" rIns="0" bIns="0" rtlCol="0" anchor="ctr"/>
           <a:lstStyle/>
           <a:p>
-            <a:pPr indent="0" marL="0">
+            <a:pPr marL="0" indent="0">
               <a:lnSpc>
                 <a:spcPts val="1400"/>
               </a:lnSpc>
@@ -4307,7 +4711,7 @@
             <a:prstDash val="solid"/>
           </a:ln>
           <a:effectLst>
-            <a:outerShdw sx="100000" sy="100000" kx="0" ky="0" algn="bl" rotWithShape="0" blurRad="152400" dist="38100" dir="5400000">
+            <a:outerShdw blurRad="152400" dist="38100" dir="5400000" algn="bl" rotWithShape="0">
               <a:srgbClr val="8A6070">
                 <a:alpha val="11000"/>
               </a:srgbClr>
@@ -4336,11 +4740,11 @@
           <a:bodyPr wrap="square" lIns="0" tIns="0" rIns="0" bIns="0" rtlCol="0" anchor="ctr"/>
           <a:lstStyle/>
           <a:p>
-            <a:pPr indent="0" marL="0">
-              <a:buNone/>
-            </a:pPr>
-            <a:r>
-              <a:rPr lang="en-US" sz="900" b="1" spc="180" kern="0" dirty="0">
+            <a:pPr marL="0" indent="0">
+              <a:buNone/>
+            </a:pPr>
+            <a:r>
+              <a:rPr lang="en-US" sz="900" b="1" kern="0" spc="180" dirty="0">
                 <a:solidFill>
                   <a:srgbClr val="B54862"/>
                 </a:solidFill>
@@ -4375,11 +4779,11 @@
           <a:bodyPr wrap="square" lIns="0" tIns="0" rIns="0" bIns="0" rtlCol="0" anchor="ctr"/>
           <a:lstStyle/>
           <a:p>
-            <a:pPr indent="0" marL="0">
-              <a:buNone/>
-            </a:pPr>
-            <a:r>
-              <a:rPr lang="en-US" sz="1500" b="1" dirty="0">
+            <a:pPr marL="0" indent="0">
+              <a:buNone/>
+            </a:pPr>
+            <a:r>
+              <a:rPr lang="ja-JP" altLang="en-US" sz="1500" b="1">
                 <a:solidFill>
                   <a:srgbClr val="292B3D"/>
                 </a:solidFill>
@@ -4387,7 +4791,29 @@
                 <a:ea typeface="Yu Gothic" pitchFamily="34" charset="-122"/>
                 <a:cs typeface="Yu Gothic" pitchFamily="34" charset="-120"/>
               </a:rPr>
-              <a:t>本体 約382MiB</a:t>
+              <a:t>本体 約</a:t>
+            </a:r>
+            <a:r>
+              <a:rPr lang="en-US" altLang="ja-JP" sz="1500" b="1">
+                <a:solidFill>
+                  <a:srgbClr val="292B3D"/>
+                </a:solidFill>
+                <a:latin typeface="Yu Gothic" pitchFamily="34" charset="0"/>
+                <a:ea typeface="Yu Gothic" pitchFamily="34" charset="-122"/>
+                <a:cs typeface="Yu Gothic" pitchFamily="34" charset="-120"/>
+              </a:rPr>
+              <a:t>401</a:t>
+            </a:r>
+            <a:r>
+              <a:rPr lang="en-US" sz="1500" b="1">
+                <a:solidFill>
+                  <a:srgbClr val="292B3D"/>
+                </a:solidFill>
+                <a:latin typeface="Yu Gothic" pitchFamily="34" charset="0"/>
+                <a:ea typeface="Yu Gothic" pitchFamily="34" charset="-122"/>
+                <a:cs typeface="Yu Gothic" pitchFamily="34" charset="-120"/>
+              </a:rPr>
+              <a:t>MB</a:t>
             </a:r>
             <a:endParaRPr lang="en-US" sz="1500" dirty="0"/>
           </a:p>
@@ -4414,7 +4840,7 @@
           <a:bodyPr wrap="square" lIns="0" tIns="0" rIns="0" bIns="0" rtlCol="0" anchor="ctr"/>
           <a:lstStyle/>
           <a:p>
-            <a:pPr indent="0" marL="0">
+            <a:pPr marL="0" indent="0">
               <a:lnSpc>
                 <a:spcPts val="1400"/>
               </a:lnSpc>
@@ -4461,7 +4887,7 @@
             <a:prstDash val="solid"/>
           </a:ln>
           <a:effectLst>
-            <a:outerShdw sx="100000" sy="100000" kx="0" ky="0" algn="bl" rotWithShape="0" blurRad="152400" dist="38100" dir="5400000">
+            <a:outerShdw blurRad="152400" dist="38100" dir="5400000" algn="bl" rotWithShape="0">
               <a:srgbClr val="8A6070">
                 <a:alpha val="11000"/>
               </a:srgbClr>
@@ -4490,11 +4916,11 @@
           <a:bodyPr wrap="square" lIns="0" tIns="0" rIns="0" bIns="0" rtlCol="0" anchor="ctr"/>
           <a:lstStyle/>
           <a:p>
-            <a:pPr indent="0" marL="0">
-              <a:buNone/>
-            </a:pPr>
-            <a:r>
-              <a:rPr lang="en-US" sz="900" b="1" spc="180" kern="0" dirty="0">
+            <a:pPr marL="0" indent="0">
+              <a:buNone/>
+            </a:pPr>
+            <a:r>
+              <a:rPr lang="en-US" sz="900" b="1" kern="0" spc="180" dirty="0">
                 <a:solidFill>
                   <a:srgbClr val="B54862"/>
                 </a:solidFill>
@@ -4529,7 +4955,7 @@
           <a:bodyPr wrap="square" lIns="0" tIns="0" rIns="0" bIns="0" rtlCol="0" anchor="ctr"/>
           <a:lstStyle/>
           <a:p>
-            <a:pPr indent="0" marL="0">
+            <a:pPr marL="0" indent="0">
               <a:buNone/>
             </a:pPr>
             <a:r>
@@ -4568,7 +4994,7 @@
           <a:bodyPr wrap="square" lIns="0" tIns="0" rIns="0" bIns="0" rtlCol="0" anchor="ctr"/>
           <a:lstStyle/>
           <a:p>
-            <a:pPr indent="0" marL="0">
+            <a:pPr marL="0" indent="0">
               <a:lnSpc>
                 <a:spcPts val="1400"/>
               </a:lnSpc>
@@ -4632,7 +5058,7 @@
           <a:bodyPr wrap="square" lIns="0" tIns="0" rIns="0" bIns="0" rtlCol="0" anchor="ctr"/>
           <a:lstStyle/>
           <a:p>
-            <a:pPr indent="0" marL="0">
+            <a:pPr marL="0" indent="0">
               <a:buNone/>
             </a:pPr>
             <a:r>
@@ -4671,7 +5097,7 @@
           <a:bodyPr wrap="square" lIns="0" tIns="0" rIns="0" bIns="0" rtlCol="0" anchor="ctr"/>
           <a:lstStyle/>
           <a:p>
-            <a:pPr indent="0" marL="0">
+            <a:pPr marL="0" indent="0">
               <a:buNone/>
             </a:pPr>
             <a:r>
@@ -4710,7 +5136,7 @@
           <a:bodyPr wrap="square" lIns="0" tIns="0" rIns="0" bIns="0" rtlCol="0" anchor="ctr"/>
           <a:lstStyle/>
           <a:p>
-            <a:pPr indent="0" marL="0">
+            <a:pPr marL="0" indent="0">
               <a:buNone/>
             </a:pPr>
             <a:r>
@@ -4722,7 +5148,18 @@
                 <a:ea typeface="Meiryo" pitchFamily="34" charset="-122"/>
                 <a:cs typeface="Meiryo" pitchFamily="34" charset="-120"/>
               </a:rPr>
-              <a:t>PicoAgent v1.0.2 Beta</a:t>
+              <a:t>PicoAgent </a:t>
+            </a:r>
+            <a:r>
+              <a:rPr lang="en-US" sz="850">
+                <a:solidFill>
+                  <a:srgbClr val="A79AA1"/>
+                </a:solidFill>
+                <a:latin typeface="Meiryo" pitchFamily="34" charset="0"/>
+                <a:ea typeface="Meiryo" pitchFamily="34" charset="-122"/>
+                <a:cs typeface="Meiryo" pitchFamily="34" charset="-120"/>
+              </a:rPr>
+              <a:t>v1.0.2 ALPHA</a:t>
             </a:r>
             <a:endParaRPr lang="en-US" sz="850" dirty="0"/>
           </a:p>
@@ -4749,7 +5186,7 @@
           <a:bodyPr wrap="square" lIns="0" tIns="0" rIns="0" bIns="0" rtlCol="0" anchor="ctr"/>
           <a:lstStyle/>
           <a:p>
-            <a:pPr algn="r" indent="0" marL="0">
+            <a:pPr marL="0" indent="0" algn="r">
               <a:buNone/>
             </a:pPr>
             <a:r>
@@ -4781,7 +5218,7 @@
     <p:bg>
       <p:bgPr>
         <a:blipFill dpi="0" rotWithShape="1">
-          <a:blip r:embed="rId1">
+          <a:blip r:embed="rId3">
             <a:lum/>
           </a:blip>
           <a:srcRect/>
@@ -4827,11 +5264,11 @@
           <a:bodyPr wrap="square" lIns="0" tIns="0" rIns="0" bIns="0" rtlCol="0" anchor="ctr"/>
           <a:lstStyle/>
           <a:p>
-            <a:pPr indent="0" marL="0">
-              <a:buNone/>
-            </a:pPr>
-            <a:r>
-              <a:rPr lang="en-US" sz="1050" b="1" spc="240" kern="0" dirty="0">
+            <a:pPr marL="0" indent="0">
+              <a:buNone/>
+            </a:pPr>
+            <a:r>
+              <a:rPr lang="en-US" sz="1050" b="1" kern="0" spc="240" dirty="0">
                 <a:solidFill>
                   <a:srgbClr val="B54862"/>
                 </a:solidFill>
@@ -4866,7 +5303,7 @@
           <a:bodyPr wrap="square" lIns="0" tIns="0" rIns="0" bIns="0" rtlCol="0" anchor="ctr"/>
           <a:lstStyle/>
           <a:p>
-            <a:pPr indent="0" marL="0">
+            <a:pPr marL="0" indent="0">
               <a:lnSpc>
                 <a:spcPts val="4000"/>
               </a:lnSpc>
@@ -4908,7 +5345,7 @@
           <a:bodyPr wrap="square" lIns="0" tIns="0" rIns="0" bIns="0" rtlCol="0" anchor="ctr"/>
           <a:lstStyle/>
           <a:p>
-            <a:pPr indent="0" marL="0">
+            <a:pPr marL="0" indent="0">
               <a:lnSpc>
                 <a:spcPts val="2100"/>
               </a:lnSpc>
@@ -4972,7 +5409,7 @@
           <a:bodyPr wrap="square" lIns="0" tIns="0" rIns="0" bIns="0" rtlCol="0" anchor="ctr"/>
           <a:lstStyle/>
           <a:p>
-            <a:pPr indent="0" marL="0">
+            <a:pPr marL="0" indent="0">
               <a:buNone/>
             </a:pPr>
             <a:r>
@@ -5011,7 +5448,7 @@
           <a:bodyPr wrap="square" lIns="0" tIns="0" rIns="0" bIns="0" rtlCol="0" anchor="ctr"/>
           <a:lstStyle/>
           <a:p>
-            <a:pPr indent="0" marL="0">
+            <a:pPr marL="0" indent="0">
               <a:buNone/>
             </a:pPr>
             <a:r>
@@ -5050,7 +5487,7 @@
           <a:bodyPr wrap="square" lIns="0" tIns="0" rIns="0" bIns="0" rtlCol="0" anchor="ctr"/>
           <a:lstStyle/>
           <a:p>
-            <a:pPr indent="0" marL="0">
+            <a:pPr marL="0" indent="0">
               <a:lnSpc>
                 <a:spcPts val="1800"/>
               </a:lnSpc>
@@ -5065,7 +5502,51 @@
                 <a:ea typeface="Meiryo" pitchFamily="34" charset="-122"/>
                 <a:cs typeface="Meiryo" pitchFamily="34" charset="-120"/>
               </a:rPr>
-              <a:t>GitHub ReleasesからWindowsベータ版のインストーラを取得します。</a:t>
+              <a:t>GitHub Releases</a:t>
+            </a:r>
+            <a:r>
+              <a:rPr lang="en-US" sz="1100">
+                <a:solidFill>
+                  <a:srgbClr val="686A7D"/>
+                </a:solidFill>
+                <a:latin typeface="Meiryo" pitchFamily="34" charset="0"/>
+                <a:ea typeface="Meiryo" pitchFamily="34" charset="-122"/>
+                <a:cs typeface="Meiryo" pitchFamily="34" charset="-120"/>
+              </a:rPr>
+              <a:t>からWindows</a:t>
+            </a:r>
+            <a:r>
+              <a:rPr lang="ja-JP" altLang="en-US" sz="1100">
+                <a:solidFill>
+                  <a:srgbClr val="686A7D"/>
+                </a:solidFill>
+                <a:latin typeface="Meiryo" pitchFamily="34" charset="0"/>
+                <a:ea typeface="Meiryo" pitchFamily="34" charset="-122"/>
+                <a:cs typeface="Meiryo" pitchFamily="34" charset="-120"/>
+              </a:rPr>
+              <a:t>アルファ</a:t>
+            </a:r>
+            <a:r>
+              <a:rPr lang="en-US" sz="1100">
+                <a:solidFill>
+                  <a:srgbClr val="686A7D"/>
+                </a:solidFill>
+                <a:latin typeface="Meiryo" pitchFamily="34" charset="0"/>
+                <a:ea typeface="Meiryo" pitchFamily="34" charset="-122"/>
+                <a:cs typeface="Meiryo" pitchFamily="34" charset="-120"/>
+              </a:rPr>
+              <a:t>版のインストーラを取得します</a:t>
+            </a:r>
+            <a:r>
+              <a:rPr lang="en-US" sz="1100" dirty="0">
+                <a:solidFill>
+                  <a:srgbClr val="686A7D"/>
+                </a:solidFill>
+                <a:latin typeface="Meiryo" pitchFamily="34" charset="0"/>
+                <a:ea typeface="Meiryo" pitchFamily="34" charset="-122"/>
+                <a:cs typeface="Meiryo" pitchFamily="34" charset="-120"/>
+              </a:rPr>
+              <a:t>。</a:t>
             </a:r>
             <a:endParaRPr lang="en-US" sz="1100" dirty="0"/>
           </a:p>
@@ -5092,7 +5573,7 @@
           <a:bodyPr wrap="square" lIns="0" tIns="0" rIns="0" bIns="0" rtlCol="0" anchor="ctr"/>
           <a:lstStyle/>
           <a:p>
-            <a:pPr algn="ctr" indent="0" marL="0">
+            <a:pPr marL="0" indent="0" algn="ctr">
               <a:buNone/>
             </a:pPr>
             <a:r>
@@ -5153,7 +5634,7 @@
           <a:bodyPr wrap="square" lIns="0" tIns="0" rIns="0" bIns="0" rtlCol="0" anchor="ctr"/>
           <a:lstStyle/>
           <a:p>
-            <a:pPr indent="0" marL="0">
+            <a:pPr marL="0" indent="0">
               <a:buNone/>
             </a:pPr>
             <a:r>
@@ -5192,7 +5673,7 @@
           <a:bodyPr wrap="square" lIns="0" tIns="0" rIns="0" bIns="0" rtlCol="0" anchor="ctr"/>
           <a:lstStyle/>
           <a:p>
-            <a:pPr indent="0" marL="0">
+            <a:pPr marL="0" indent="0">
               <a:buNone/>
             </a:pPr>
             <a:r>
@@ -5231,7 +5712,7 @@
           <a:bodyPr wrap="square" lIns="0" tIns="0" rIns="0" bIns="0" rtlCol="0" anchor="ctr"/>
           <a:lstStyle/>
           <a:p>
-            <a:pPr indent="0" marL="0">
+            <a:pPr marL="0" indent="0">
               <a:lnSpc>
                 <a:spcPts val="1800"/>
               </a:lnSpc>
@@ -5273,7 +5754,7 @@
           <a:bodyPr wrap="square" lIns="0" tIns="0" rIns="0" bIns="0" rtlCol="0" anchor="ctr"/>
           <a:lstStyle/>
           <a:p>
-            <a:pPr algn="ctr" indent="0" marL="0">
+            <a:pPr marL="0" indent="0" algn="ctr">
               <a:buNone/>
             </a:pPr>
             <a:r>
@@ -5334,7 +5815,7 @@
           <a:bodyPr wrap="square" lIns="0" tIns="0" rIns="0" bIns="0" rtlCol="0" anchor="ctr"/>
           <a:lstStyle/>
           <a:p>
-            <a:pPr indent="0" marL="0">
+            <a:pPr marL="0" indent="0">
               <a:buNone/>
             </a:pPr>
             <a:r>
@@ -5373,7 +5854,7 @@
           <a:bodyPr wrap="square" lIns="0" tIns="0" rIns="0" bIns="0" rtlCol="0" anchor="ctr"/>
           <a:lstStyle/>
           <a:p>
-            <a:pPr indent="0" marL="0">
+            <a:pPr marL="0" indent="0">
               <a:buNone/>
             </a:pPr>
             <a:r>
@@ -5412,7 +5893,7 @@
           <a:bodyPr wrap="square" lIns="0" tIns="0" rIns="0" bIns="0" rtlCol="0" anchor="ctr"/>
           <a:lstStyle/>
           <a:p>
-            <a:pPr indent="0" marL="0">
+            <a:pPr marL="0" indent="0">
               <a:lnSpc>
                 <a:spcPts val="1800"/>
               </a:lnSpc>
@@ -5454,7 +5935,7 @@
           </a:solidFill>
           <a:ln/>
           <a:effectLst>
-            <a:outerShdw sx="100000" sy="100000" kx="0" ky="0" algn="bl" rotWithShape="0" blurRad="152400" dist="38100" dir="5400000">
+            <a:outerShdw blurRad="152400" dist="38100" dir="5400000" algn="bl" rotWithShape="0">
               <a:srgbClr val="8A6070">
                 <a:alpha val="11000"/>
               </a:srgbClr>
@@ -5464,14 +5945,14 @@
       </p:sp>
       <p:pic>
         <p:nvPicPr>
-          <p:cNvPr id="20" name="Image 0" descr="/tmp/claude-0/-home-user-PicoAgent/7130734a-69b9-54b3-90f7-bb7bb9043f8d/scratchpad/deck/img/flat-bar.jpg">    </p:cNvPr>
+          <p:cNvPr id="20" name="Image 0" descr="/tmp/claude-0/-home-user-PicoAgent/7130734a-69b9-54b3-90f7-bb7bb9043f8d/scratchpad/deck/img/flat-bar.jpg"/>
           <p:cNvPicPr>
             <a:picLocks noChangeAspect="1"/>
           </p:cNvPicPr>
           <p:nvPr/>
         </p:nvPicPr>
         <p:blipFill>
-          <a:blip r:embed="rId2"/>
+          <a:blip r:embed="rId4"/>
           <a:stretch>
             <a:fillRect/>
           </a:stretch>
@@ -5507,7 +5988,7 @@
           <a:bodyPr wrap="square" lIns="0" tIns="0" rIns="0" bIns="0" rtlCol="0" anchor="ctr"/>
           <a:lstStyle/>
           <a:p>
-            <a:pPr indent="0" marL="0">
+            <a:pPr marL="0" indent="0">
               <a:buNone/>
             </a:pPr>
             <a:r>
@@ -5519,7 +6000,18 @@
                 <a:ea typeface="Meiryo" pitchFamily="34" charset="-122"/>
                 <a:cs typeface="Meiryo" pitchFamily="34" charset="-120"/>
               </a:rPr>
-              <a:t>PicoAgent v1.0.2 Beta</a:t>
+              <a:t>PicoAgent </a:t>
+            </a:r>
+            <a:r>
+              <a:rPr lang="en-US" sz="850">
+                <a:solidFill>
+                  <a:srgbClr val="A79AA1"/>
+                </a:solidFill>
+                <a:latin typeface="Meiryo" pitchFamily="34" charset="0"/>
+                <a:ea typeface="Meiryo" pitchFamily="34" charset="-122"/>
+                <a:cs typeface="Meiryo" pitchFamily="34" charset="-120"/>
+              </a:rPr>
+              <a:t>v1.0.2 ALPHA</a:t>
             </a:r>
             <a:endParaRPr lang="en-US" sz="850" dirty="0"/>
           </a:p>
@@ -5546,7 +6038,7 @@
           <a:bodyPr wrap="square" lIns="0" tIns="0" rIns="0" bIns="0" rtlCol="0" anchor="ctr"/>
           <a:lstStyle/>
           <a:p>
-            <a:pPr algn="r" indent="0" marL="0">
+            <a:pPr marL="0" indent="0" algn="r">
               <a:buNone/>
             </a:pPr>
             <a:r>
@@ -5578,7 +6070,7 @@
     <p:bg>
       <p:bgPr>
         <a:blipFill dpi="0" rotWithShape="1">
-          <a:blip r:embed="rId1">
+          <a:blip r:embed="rId3">
             <a:lum/>
           </a:blip>
           <a:srcRect/>
@@ -5624,11 +6116,11 @@
           <a:bodyPr wrap="square" lIns="0" tIns="0" rIns="0" bIns="0" rtlCol="0" anchor="ctr"/>
           <a:lstStyle/>
           <a:p>
-            <a:pPr indent="0" marL="0">
-              <a:buNone/>
-            </a:pPr>
-            <a:r>
-              <a:rPr lang="en-US" sz="1050" b="1" spc="240" kern="0" dirty="0">
+            <a:pPr marL="0" indent="0">
+              <a:buNone/>
+            </a:pPr>
+            <a:r>
+              <a:rPr lang="en-US" sz="1050" b="1" kern="0" spc="240">
                 <a:solidFill>
                   <a:srgbClr val="B54862"/>
                 </a:solidFill>
@@ -5636,7 +6128,18 @@
                 <a:ea typeface="Meiryo" pitchFamily="34" charset="-122"/>
                 <a:cs typeface="Meiryo" pitchFamily="34" charset="-120"/>
               </a:rPr>
-              <a:t>BETA STATUS</a:t>
+              <a:t>ALPHA </a:t>
+            </a:r>
+            <a:r>
+              <a:rPr lang="en-US" sz="1050" b="1" kern="0" spc="240" dirty="0">
+                <a:solidFill>
+                  <a:srgbClr val="B54862"/>
+                </a:solidFill>
+                <a:latin typeface="Meiryo" pitchFamily="34" charset="0"/>
+                <a:ea typeface="Meiryo" pitchFamily="34" charset="-122"/>
+                <a:cs typeface="Meiryo" pitchFamily="34" charset="-120"/>
+              </a:rPr>
+              <a:t>STATUS</a:t>
             </a:r>
             <a:endParaRPr lang="en-US" sz="1050" dirty="0"/>
           </a:p>
@@ -5663,7 +6166,7 @@
           <a:bodyPr wrap="square" lIns="0" tIns="0" rIns="0" bIns="0" rtlCol="0" anchor="ctr"/>
           <a:lstStyle/>
           <a:p>
-            <a:pPr indent="0" marL="0">
+            <a:pPr marL="0" indent="0">
               <a:lnSpc>
                 <a:spcPts val="4000"/>
               </a:lnSpc>
@@ -5705,13 +6208,46 @@
           <a:bodyPr wrap="square" lIns="0" tIns="0" rIns="0" bIns="0" rtlCol="0" anchor="ctr"/>
           <a:lstStyle/>
           <a:p>
-            <a:pPr indent="0" marL="0">
+            <a:pPr marL="0" indent="0">
               <a:lnSpc>
                 <a:spcPts val="2100"/>
               </a:lnSpc>
               <a:buNone/>
             </a:pPr>
             <a:r>
+              <a:rPr lang="en-US" sz="1250">
+                <a:solidFill>
+                  <a:srgbClr val="686A7D"/>
+                </a:solidFill>
+                <a:latin typeface="Meiryo" pitchFamily="34" charset="0"/>
+                <a:ea typeface="Meiryo" pitchFamily="34" charset="-122"/>
+                <a:cs typeface="Meiryo" pitchFamily="34" charset="-120"/>
+              </a:rPr>
+              <a:t>開発中の</a:t>
+            </a:r>
+            <a:r>
+              <a:rPr lang="ja-JP" altLang="en-US" sz="1250">
+                <a:solidFill>
+                  <a:srgbClr val="686A7D"/>
+                </a:solidFill>
+                <a:latin typeface="Meiryo" pitchFamily="34" charset="0"/>
+                <a:ea typeface="Meiryo" pitchFamily="34" charset="-122"/>
+                <a:cs typeface="Meiryo" pitchFamily="34" charset="-120"/>
+              </a:rPr>
+              <a:t>アルファ</a:t>
+            </a:r>
+            <a:r>
+              <a:rPr lang="en-US" sz="1250">
+                <a:solidFill>
+                  <a:srgbClr val="686A7D"/>
+                </a:solidFill>
+                <a:latin typeface="Meiryo" pitchFamily="34" charset="0"/>
+                <a:ea typeface="Meiryo" pitchFamily="34" charset="-122"/>
+                <a:cs typeface="Meiryo" pitchFamily="34" charset="-120"/>
+              </a:rPr>
+              <a:t>版なので</a:t>
+            </a:r>
+            <a:r>
               <a:rPr lang="en-US" sz="1250" dirty="0">
                 <a:solidFill>
                   <a:srgbClr val="686A7D"/>
@@ -5720,7 +6256,7 @@
                 <a:ea typeface="Meiryo" pitchFamily="34" charset="-122"/>
                 <a:cs typeface="Meiryo" pitchFamily="34" charset="-120"/>
               </a:rPr>
-              <a:t>開発中のベータ版なので、先に正直にお伝えします。</a:t>
+              <a:t>、先に正直にお伝えします。</a:t>
             </a:r>
             <a:endParaRPr lang="en-US" sz="1250" dirty="0"/>
           </a:p>
@@ -5752,7 +6288,7 @@
             <a:prstDash val="solid"/>
           </a:ln>
           <a:effectLst>
-            <a:outerShdw sx="100000" sy="100000" kx="0" ky="0" algn="bl" rotWithShape="0" blurRad="152400" dist="38100" dir="5400000">
+            <a:outerShdw blurRad="152400" dist="38100" dir="5400000" algn="bl" rotWithShape="0">
               <a:srgbClr val="8A6070">
                 <a:alpha val="11000"/>
               </a:srgbClr>
@@ -5781,7 +6317,7 @@
           <a:bodyPr wrap="square" lIns="0" tIns="0" rIns="0" bIns="0" rtlCol="0" anchor="ctr"/>
           <a:lstStyle/>
           <a:p>
-            <a:pPr algn="ctr" indent="0" marL="0">
+            <a:pPr marL="0" indent="0" algn="ctr">
               <a:buNone/>
             </a:pPr>
             <a:r>
@@ -5820,7 +6356,7 @@
           <a:bodyPr wrap="square" lIns="0" tIns="0" rIns="0" bIns="0" rtlCol="0" anchor="ctr"/>
           <a:lstStyle/>
           <a:p>
-            <a:pPr indent="0" marL="0">
+            <a:pPr marL="0" indent="0">
               <a:buNone/>
             </a:pPr>
             <a:r>
@@ -5859,7 +6395,7 @@
           <a:bodyPr wrap="square" lIns="0" tIns="0" rIns="0" bIns="0" rtlCol="0" anchor="ctr"/>
           <a:lstStyle/>
           <a:p>
-            <a:pPr indent="0" marL="0">
+            <a:pPr marL="0" indent="0">
               <a:lnSpc>
                 <a:spcPts val="1500"/>
               </a:lnSpc>
@@ -5906,7 +6442,7 @@
             <a:prstDash val="solid"/>
           </a:ln>
           <a:effectLst>
-            <a:outerShdw sx="100000" sy="100000" kx="0" ky="0" algn="bl" rotWithShape="0" blurRad="152400" dist="38100" dir="5400000">
+            <a:outerShdw blurRad="152400" dist="38100" dir="5400000" algn="bl" rotWithShape="0">
               <a:srgbClr val="8A6070">
                 <a:alpha val="11000"/>
               </a:srgbClr>
@@ -5935,7 +6471,7 @@
           <a:bodyPr wrap="square" lIns="0" tIns="0" rIns="0" bIns="0" rtlCol="0" anchor="ctr"/>
           <a:lstStyle/>
           <a:p>
-            <a:pPr algn="ctr" indent="0" marL="0">
+            <a:pPr marL="0" indent="0" algn="ctr">
               <a:buNone/>
             </a:pPr>
             <a:r>
@@ -5974,7 +6510,7 @@
           <a:bodyPr wrap="square" lIns="0" tIns="0" rIns="0" bIns="0" rtlCol="0" anchor="ctr"/>
           <a:lstStyle/>
           <a:p>
-            <a:pPr indent="0" marL="0">
+            <a:pPr marL="0" indent="0">
               <a:buNone/>
             </a:pPr>
             <a:r>
@@ -6013,7 +6549,7 @@
           <a:bodyPr wrap="square" lIns="0" tIns="0" rIns="0" bIns="0" rtlCol="0" anchor="ctr"/>
           <a:lstStyle/>
           <a:p>
-            <a:pPr indent="0" marL="0">
+            <a:pPr marL="0" indent="0">
               <a:lnSpc>
                 <a:spcPts val="1500"/>
               </a:lnSpc>
@@ -6060,7 +6596,7 @@
             <a:prstDash val="solid"/>
           </a:ln>
           <a:effectLst>
-            <a:outerShdw sx="100000" sy="100000" kx="0" ky="0" algn="bl" rotWithShape="0" blurRad="152400" dist="38100" dir="5400000">
+            <a:outerShdw blurRad="152400" dist="38100" dir="5400000" algn="bl" rotWithShape="0">
               <a:srgbClr val="8A6070">
                 <a:alpha val="11000"/>
               </a:srgbClr>
@@ -6089,7 +6625,7 @@
           <a:bodyPr wrap="square" lIns="0" tIns="0" rIns="0" bIns="0" rtlCol="0" anchor="ctr"/>
           <a:lstStyle/>
           <a:p>
-            <a:pPr algn="ctr" indent="0" marL="0">
+            <a:pPr marL="0" indent="0" algn="ctr">
               <a:buNone/>
             </a:pPr>
             <a:r>
@@ -6128,7 +6664,7 @@
           <a:bodyPr wrap="square" lIns="0" tIns="0" rIns="0" bIns="0" rtlCol="0" anchor="ctr"/>
           <a:lstStyle/>
           <a:p>
-            <a:pPr indent="0" marL="0">
+            <a:pPr marL="0" indent="0">
               <a:buNone/>
             </a:pPr>
             <a:r>
@@ -6167,14 +6703,14 @@
           <a:bodyPr wrap="square" lIns="0" tIns="0" rIns="0" bIns="0" rtlCol="0" anchor="ctr"/>
           <a:lstStyle/>
           <a:p>
-            <a:pPr indent="0" marL="0">
+            <a:pPr marL="0" indent="0">
               <a:lnSpc>
                 <a:spcPts val="1500"/>
               </a:lnSpc>
               <a:buNone/>
             </a:pPr>
             <a:r>
-              <a:rPr lang="en-US" sz="950" dirty="0">
+              <a:rPr lang="ja-JP" altLang="en-US" sz="950">
                 <a:solidFill>
                   <a:srgbClr val="686A7D"/>
                 </a:solidFill>
@@ -6182,7 +6718,7 @@
                 <a:ea typeface="Meiryo" pitchFamily="34" charset="-122"/>
                 <a:cs typeface="Meiryo" pitchFamily="34" charset="-120"/>
               </a:rPr>
-              <a:t>設定画面から確認して実行します。自動更新は正式版で対応します。</a:t>
+              <a:t>設定画面から確認して実行します。自動更新は今後のバージョンで対応します。</a:t>
             </a:r>
             <a:endParaRPr lang="en-US" sz="950" dirty="0"/>
           </a:p>
@@ -6214,7 +6750,7 @@
             <a:prstDash val="solid"/>
           </a:ln>
           <a:effectLst>
-            <a:outerShdw sx="100000" sy="100000" kx="0" ky="0" algn="bl" rotWithShape="0" blurRad="152400" dist="38100" dir="5400000">
+            <a:outerShdw blurRad="152400" dist="38100" dir="5400000" algn="bl" rotWithShape="0">
               <a:srgbClr val="8A6070">
                 <a:alpha val="11000"/>
               </a:srgbClr>
@@ -6243,7 +6779,7 @@
           <a:bodyPr wrap="square" lIns="0" tIns="0" rIns="0" bIns="0" rtlCol="0" anchor="ctr"/>
           <a:lstStyle/>
           <a:p>
-            <a:pPr algn="ctr" indent="0" marL="0">
+            <a:pPr marL="0" indent="0" algn="ctr">
               <a:buNone/>
             </a:pPr>
             <a:r>
@@ -6282,7 +6818,7 @@
           <a:bodyPr wrap="square" lIns="0" tIns="0" rIns="0" bIns="0" rtlCol="0" anchor="ctr"/>
           <a:lstStyle/>
           <a:p>
-            <a:pPr indent="0" marL="0">
+            <a:pPr marL="0" indent="0">
               <a:buNone/>
             </a:pPr>
             <a:r>
@@ -6321,7 +6857,7 @@
           <a:bodyPr wrap="square" lIns="0" tIns="0" rIns="0" bIns="0" rtlCol="0" anchor="ctr"/>
           <a:lstStyle/>
           <a:p>
-            <a:pPr indent="0" marL="0">
+            <a:pPr marL="0" indent="0">
               <a:lnSpc>
                 <a:spcPts val="1500"/>
               </a:lnSpc>
@@ -6368,7 +6904,7 @@
             <a:prstDash val="solid"/>
           </a:ln>
           <a:effectLst>
-            <a:outerShdw sx="100000" sy="100000" kx="0" ky="0" algn="bl" rotWithShape="0" blurRad="152400" dist="38100" dir="5400000">
+            <a:outerShdw blurRad="152400" dist="38100" dir="5400000" algn="bl" rotWithShape="0">
               <a:srgbClr val="8A6070">
                 <a:alpha val="11000"/>
               </a:srgbClr>
@@ -6397,7 +6933,7 @@
           <a:bodyPr wrap="square" lIns="0" tIns="0" rIns="0" bIns="0" rtlCol="0" anchor="ctr"/>
           <a:lstStyle/>
           <a:p>
-            <a:pPr algn="ctr" indent="0" marL="0">
+            <a:pPr marL="0" indent="0" algn="ctr">
               <a:buNone/>
             </a:pPr>
             <a:r>
@@ -6436,7 +6972,7 @@
           <a:bodyPr wrap="square" lIns="0" tIns="0" rIns="0" bIns="0" rtlCol="0" anchor="ctr"/>
           <a:lstStyle/>
           <a:p>
-            <a:pPr indent="0" marL="0">
+            <a:pPr marL="0" indent="0">
               <a:buNone/>
             </a:pPr>
             <a:r>
@@ -6475,13 +7011,35 @@
           <a:bodyPr wrap="square" lIns="0" tIns="0" rIns="0" bIns="0" rtlCol="0" anchor="ctr"/>
           <a:lstStyle/>
           <a:p>
-            <a:pPr indent="0" marL="0">
+            <a:pPr marL="0" indent="0">
               <a:lnSpc>
                 <a:spcPts val="1500"/>
               </a:lnSpc>
               <a:buNone/>
             </a:pPr>
             <a:r>
+              <a:rPr lang="ja-JP" altLang="en-US" sz="950">
+                <a:solidFill>
+                  <a:srgbClr val="686A7D"/>
+                </a:solidFill>
+                <a:latin typeface="Meiryo" pitchFamily="34" charset="0"/>
+                <a:ea typeface="Meiryo" pitchFamily="34" charset="-122"/>
+                <a:cs typeface="Meiryo" pitchFamily="34" charset="-120"/>
+              </a:rPr>
+              <a:t>アルファ</a:t>
+            </a:r>
+            <a:r>
+              <a:rPr lang="en-US" sz="950">
+                <a:solidFill>
+                  <a:srgbClr val="686A7D"/>
+                </a:solidFill>
+                <a:latin typeface="Meiryo" pitchFamily="34" charset="0"/>
+                <a:ea typeface="Meiryo" pitchFamily="34" charset="-122"/>
+                <a:cs typeface="Meiryo" pitchFamily="34" charset="-120"/>
+              </a:rPr>
+              <a:t>期間中は機能</a:t>
+            </a:r>
+            <a:r>
               <a:rPr lang="en-US" sz="950" dirty="0">
                 <a:solidFill>
                   <a:srgbClr val="686A7D"/>
@@ -6490,7 +7048,7 @@
                 <a:ea typeface="Meiryo" pitchFamily="34" charset="-122"/>
                 <a:cs typeface="Meiryo" pitchFamily="34" charset="-120"/>
               </a:rPr>
-              <a:t>ベータ期間中は機能・画面・設定が変更される場合があります。</a:t>
+              <a:t>・画面・設定が変更される場合があります。</a:t>
             </a:r>
             <a:endParaRPr lang="en-US" sz="950" dirty="0"/>
           </a:p>
@@ -6522,7 +7080,7 @@
             <a:prstDash val="solid"/>
           </a:ln>
           <a:effectLst>
-            <a:outerShdw sx="100000" sy="100000" kx="0" ky="0" algn="bl" rotWithShape="0" blurRad="152400" dist="38100" dir="5400000">
+            <a:outerShdw blurRad="152400" dist="38100" dir="5400000" algn="bl" rotWithShape="0">
               <a:srgbClr val="8A6070">
                 <a:alpha val="11000"/>
               </a:srgbClr>
@@ -6551,7 +7109,7 @@
           <a:bodyPr wrap="square" lIns="0" tIns="0" rIns="0" bIns="0" rtlCol="0" anchor="ctr"/>
           <a:lstStyle/>
           <a:p>
-            <a:pPr algn="ctr" indent="0" marL="0">
+            <a:pPr marL="0" indent="0" algn="ctr">
               <a:buNone/>
             </a:pPr>
             <a:r>
@@ -6590,7 +7148,7 @@
           <a:bodyPr wrap="square" lIns="0" tIns="0" rIns="0" bIns="0" rtlCol="0" anchor="ctr"/>
           <a:lstStyle/>
           <a:p>
-            <a:pPr indent="0" marL="0">
+            <a:pPr marL="0" indent="0">
               <a:buNone/>
             </a:pPr>
             <a:r>
@@ -6629,7 +7187,7 @@
           <a:bodyPr wrap="square" lIns="0" tIns="0" rIns="0" bIns="0" rtlCol="0" anchor="ctr"/>
           <a:lstStyle/>
           <a:p>
-            <a:pPr indent="0" marL="0">
+            <a:pPr marL="0" indent="0">
               <a:lnSpc>
                 <a:spcPts val="1500"/>
               </a:lnSpc>
@@ -6671,7 +7229,7 @@
           <a:bodyPr wrap="square" lIns="0" tIns="0" rIns="0" bIns="0" rtlCol="0" anchor="ctr"/>
           <a:lstStyle/>
           <a:p>
-            <a:pPr indent="0" marL="0">
+            <a:pPr marL="0" indent="0">
               <a:buNone/>
             </a:pPr>
             <a:r>
@@ -6710,7 +7268,7 @@
           <a:bodyPr wrap="square" lIns="0" tIns="0" rIns="0" bIns="0" rtlCol="0" anchor="ctr"/>
           <a:lstStyle/>
           <a:p>
-            <a:pPr indent="0" marL="0">
+            <a:pPr marL="0" indent="0">
               <a:buNone/>
             </a:pPr>
             <a:r>
@@ -6722,7 +7280,18 @@
                 <a:ea typeface="Meiryo" pitchFamily="34" charset="-122"/>
                 <a:cs typeface="Meiryo" pitchFamily="34" charset="-120"/>
               </a:rPr>
-              <a:t>PicoAgent v1.0.2 Beta</a:t>
+              <a:t>PicoAgent </a:t>
+            </a:r>
+            <a:r>
+              <a:rPr lang="en-US" sz="850">
+                <a:solidFill>
+                  <a:srgbClr val="A79AA1"/>
+                </a:solidFill>
+                <a:latin typeface="Meiryo" pitchFamily="34" charset="0"/>
+                <a:ea typeface="Meiryo" pitchFamily="34" charset="-122"/>
+                <a:cs typeface="Meiryo" pitchFamily="34" charset="-120"/>
+              </a:rPr>
+              <a:t>v1.0.2 ALPHA</a:t>
             </a:r>
             <a:endParaRPr lang="en-US" sz="850" dirty="0"/>
           </a:p>
@@ -6749,7 +7318,7 @@
           <a:bodyPr wrap="square" lIns="0" tIns="0" rIns="0" bIns="0" rtlCol="0" anchor="ctr"/>
           <a:lstStyle/>
           <a:p>
-            <a:pPr algn="r" indent="0" marL="0">
+            <a:pPr marL="0" indent="0" algn="r">
               <a:buNone/>
             </a:pPr>
             <a:r>
@@ -6781,7 +7350,7 @@
     <p:bg>
       <p:bgPr>
         <a:blipFill dpi="0" rotWithShape="1">
-          <a:blip r:embed="rId1">
+          <a:blip r:embed="rId3">
             <a:lum/>
           </a:blip>
           <a:srcRect/>
@@ -6827,11 +7396,11 @@
           <a:bodyPr wrap="square" lIns="0" tIns="0" rIns="0" bIns="0" rtlCol="0" anchor="ctr"/>
           <a:lstStyle/>
           <a:p>
-            <a:pPr indent="0" marL="0">
-              <a:buNone/>
-            </a:pPr>
-            <a:r>
-              <a:rPr lang="en-US" sz="1050" b="1" spc="240" kern="0" dirty="0">
+            <a:pPr marL="0" indent="0">
+              <a:buNone/>
+            </a:pPr>
+            <a:r>
+              <a:rPr lang="en-US" sz="1050" b="1" kern="0" spc="240" dirty="0">
                 <a:solidFill>
                   <a:srgbClr val="B54862"/>
                 </a:solidFill>
@@ -6866,14 +7435,14 @@
           <a:bodyPr wrap="square" lIns="0" tIns="0" rIns="0" bIns="0" rtlCol="0" anchor="ctr"/>
           <a:lstStyle/>
           <a:p>
-            <a:pPr indent="0" marL="0">
+            <a:pPr marL="0" indent="0">
               <a:lnSpc>
                 <a:spcPts val="4000"/>
               </a:lnSpc>
               <a:buNone/>
             </a:pPr>
             <a:r>
-              <a:rPr lang="en-US" sz="3300" b="1" dirty="0">
+              <a:rPr lang="ja-JP" altLang="en-US" sz="3300" b="1">
                 <a:solidFill>
                   <a:srgbClr val="292B3D"/>
                 </a:solidFill>
@@ -6881,7 +7450,7 @@
                 <a:ea typeface="Yu Gothic" pitchFamily="34" charset="-122"/>
                 <a:cs typeface="Yu Gothic" pitchFamily="34" charset="-120"/>
               </a:rPr>
-              <a:t>ベータ期間中は、全機能を試せます。</a:t>
+              <a:t>すべての機能を、無料で試せます。</a:t>
             </a:r>
             <a:endParaRPr lang="en-US" sz="3300" dirty="0"/>
           </a:p>
@@ -6908,14 +7477,14 @@
           <a:bodyPr wrap="square" lIns="0" tIns="0" rIns="0" bIns="0" rtlCol="0" anchor="ctr"/>
           <a:lstStyle/>
           <a:p>
-            <a:pPr indent="0" marL="0">
+            <a:pPr marL="0" indent="0">
               <a:lnSpc>
                 <a:spcPts val="2100"/>
               </a:lnSpc>
               <a:buNone/>
             </a:pPr>
             <a:r>
-              <a:rPr lang="en-US" sz="1250" dirty="0">
+              <a:rPr lang="ja-JP" altLang="en-US" sz="1250">
                 <a:solidFill>
                   <a:srgbClr val="686A7D"/>
                 </a:solidFill>
@@ -6923,7 +7492,29 @@
                 <a:ea typeface="Meiryo" pitchFamily="34" charset="-122"/>
                 <a:cs typeface="Meiryo" pitchFamily="34" charset="-120"/>
               </a:rPr>
-              <a:t>正式リリース時はFree／Proの機能区分を有効にします。外部API料金や追加コンポーネントの導入条件は別です。</a:t>
+              <a:t>開発中のアルファ版として公開しています。外部</a:t>
+            </a:r>
+            <a:r>
+              <a:rPr lang="en-US" altLang="ja-JP" sz="1250">
+                <a:solidFill>
+                  <a:srgbClr val="686A7D"/>
+                </a:solidFill>
+                <a:latin typeface="Meiryo" pitchFamily="34" charset="0"/>
+                <a:ea typeface="Meiryo" pitchFamily="34" charset="-122"/>
+                <a:cs typeface="Meiryo" pitchFamily="34" charset="-120"/>
+              </a:rPr>
+              <a:t>AI</a:t>
+            </a:r>
+            <a:r>
+              <a:rPr lang="ja-JP" altLang="en-US" sz="1250">
+                <a:solidFill>
+                  <a:srgbClr val="686A7D"/>
+                </a:solidFill>
+                <a:latin typeface="Meiryo" pitchFamily="34" charset="0"/>
+                <a:ea typeface="Meiryo" pitchFamily="34" charset="-122"/>
+                <a:cs typeface="Meiryo" pitchFamily="34" charset="-120"/>
+              </a:rPr>
+              <a:t>サービスや追加コンポーネントには、各社・各配布元の条件が別途適用されます。</a:t>
             </a:r>
             <a:endParaRPr lang="en-US" sz="1250" dirty="0"/>
           </a:p>
@@ -6950,7 +7541,7 @@
           </a:solidFill>
           <a:ln/>
           <a:effectLst>
-            <a:outerShdw sx="100000" sy="100000" kx="0" ky="0" algn="bl" rotWithShape="0" blurRad="152400" dist="38100" dir="5400000">
+            <a:outerShdw blurRad="152400" dist="38100" dir="5400000" algn="bl" rotWithShape="0">
               <a:srgbClr val="8A6070">
                 <a:alpha val="11000"/>
               </a:srgbClr>
@@ -7001,11 +7592,11 @@
           <a:bodyPr wrap="square" lIns="0" tIns="0" rIns="0" bIns="0" rtlCol="0" anchor="ctr"/>
           <a:lstStyle/>
           <a:p>
-            <a:pPr algn="ctr" indent="0" marL="0">
-              <a:buNone/>
-            </a:pPr>
-            <a:r>
-              <a:rPr lang="en-US" sz="850" b="1" spc="60" kern="0" dirty="0">
+            <a:pPr marL="0" indent="0" algn="ctr">
+              <a:buNone/>
+            </a:pPr>
+            <a:r>
+              <a:rPr lang="en-US" sz="850" b="1" kern="0" spc="60">
                 <a:solidFill>
                   <a:srgbClr val="FFFFFF"/>
                 </a:solidFill>
@@ -7013,7 +7604,7 @@
                 <a:ea typeface="Meiryo" pitchFamily="34" charset="-122"/>
                 <a:cs typeface="Meiryo" pitchFamily="34" charset="-120"/>
               </a:rPr>
-              <a:t>BETA · FULL ACCESS</a:t>
+              <a:t>ALPHA · FULL ACCESS</a:t>
             </a:r>
             <a:endParaRPr lang="en-US" sz="850" dirty="0"/>
           </a:p>
@@ -7040,11 +7631,11 @@
           <a:bodyPr wrap="square" lIns="0" tIns="0" rIns="0" bIns="0" rtlCol="0" anchor="ctr"/>
           <a:lstStyle/>
           <a:p>
-            <a:pPr indent="0" marL="0">
-              <a:buNone/>
-            </a:pPr>
-            <a:r>
-              <a:rPr lang="en-US" sz="2400" b="1" dirty="0">
+            <a:pPr marL="0" indent="0">
+              <a:buNone/>
+            </a:pPr>
+            <a:r>
+              <a:rPr lang="ja-JP" altLang="en-US" sz="2400" b="1">
                 <a:solidFill>
                   <a:srgbClr val="FFFFFF"/>
                 </a:solidFill>
@@ -7052,7 +7643,7 @@
                 <a:ea typeface="Yu Gothic" pitchFamily="34" charset="-122"/>
                 <a:cs typeface="Yu Gothic" pitchFamily="34" charset="-120"/>
               </a:rPr>
-              <a:t>開発中ベータ版</a:t>
+              <a:t>開発中アルファ版</a:t>
             </a:r>
             <a:endParaRPr lang="en-US" sz="2400" dirty="0"/>
           </a:p>
@@ -7079,7 +7670,7 @@
           <a:bodyPr wrap="square" lIns="0" tIns="0" rIns="0" bIns="0" rtlCol="0" anchor="ctr"/>
           <a:lstStyle/>
           <a:p>
-            <a:pPr algn="r" indent="0" marL="0">
+            <a:pPr marL="0" indent="0" algn="r">
               <a:buNone/>
             </a:pPr>
             <a:r>
@@ -7118,7 +7709,7 @@
           <a:bodyPr wrap="square" lIns="0" tIns="0" rIns="0" bIns="0" rtlCol="0" anchor="ctr"/>
           <a:lstStyle/>
           <a:p>
-            <a:pPr indent="0" marL="0">
+            <a:pPr marL="0" indent="0">
               <a:buNone/>
             </a:pPr>
             <a:r>
@@ -7157,7 +7748,7 @@
           <a:bodyPr wrap="square" lIns="0" tIns="0" rIns="0" bIns="0" rtlCol="0" anchor="ctr"/>
           <a:lstStyle/>
           <a:p>
-            <a:pPr indent="0" marL="0">
+            <a:pPr marL="0" indent="0">
               <a:buNone/>
             </a:pPr>
             <a:r>
@@ -7196,7 +7787,7 @@
           <a:bodyPr wrap="square" lIns="0" tIns="0" rIns="0" bIns="0" rtlCol="0" anchor="ctr"/>
           <a:lstStyle/>
           <a:p>
-            <a:pPr indent="0" marL="0">
+            <a:pPr marL="0" indent="0">
               <a:buNone/>
             </a:pPr>
             <a:r>
@@ -7235,7 +7826,7 @@
           <a:bodyPr wrap="square" lIns="0" tIns="0" rIns="0" bIns="0" rtlCol="0" anchor="ctr"/>
           <a:lstStyle/>
           <a:p>
-            <a:pPr indent="0" marL="0">
+            <a:pPr marL="0" indent="0">
               <a:buNone/>
             </a:pPr>
             <a:r>
@@ -7274,7 +7865,7 @@
           <a:bodyPr wrap="square" lIns="0" tIns="0" rIns="0" bIns="0" rtlCol="0" anchor="ctr"/>
           <a:lstStyle/>
           <a:p>
-            <a:pPr indent="0" marL="0">
+            <a:pPr marL="0" indent="0">
               <a:buNone/>
             </a:pPr>
             <a:r>
@@ -7313,7 +7904,7 @@
           <a:bodyPr wrap="square" lIns="0" tIns="0" rIns="0" bIns="0" rtlCol="0" anchor="ctr"/>
           <a:lstStyle/>
           <a:p>
-            <a:pPr indent="0" marL="0">
+            <a:pPr marL="0" indent="0">
               <a:buNone/>
             </a:pPr>
             <a:r>
@@ -7352,7 +7943,7 @@
           <a:bodyPr wrap="square" lIns="0" tIns="0" rIns="0" bIns="0" rtlCol="0" anchor="ctr"/>
           <a:lstStyle/>
           <a:p>
-            <a:pPr indent="0" marL="0">
+            <a:pPr marL="0" indent="0">
               <a:buNone/>
             </a:pPr>
             <a:r>
@@ -7391,11 +7982,11 @@
           <a:bodyPr wrap="square" lIns="0" tIns="0" rIns="0" bIns="0" rtlCol="0" anchor="ctr"/>
           <a:lstStyle/>
           <a:p>
-            <a:pPr indent="0" marL="0">
-              <a:buNone/>
-            </a:pPr>
-            <a:r>
-              <a:rPr lang="en-US" sz="1150" dirty="0">
+            <a:pPr marL="0" indent="0">
+              <a:buNone/>
+            </a:pPr>
+            <a:r>
+              <a:rPr lang="ja-JP" altLang="en-US" sz="1150">
                 <a:solidFill>
                   <a:srgbClr val="FFFFFF"/>
                 </a:solidFill>
@@ -7403,7 +7994,7 @@
                 <a:ea typeface="Meiryo" pitchFamily="34" charset="-122"/>
                 <a:cs typeface="Meiryo" pitchFamily="34" charset="-120"/>
               </a:rPr>
-              <a:t>正式リリース前の全機能試用</a:t>
+              <a:t>すべての機能を無料公開中</a:t>
             </a:r>
             <a:endParaRPr lang="en-US" sz="1150" dirty="0"/>
           </a:p>
@@ -7435,7 +8026,7 @@
             <a:prstDash val="solid"/>
           </a:ln>
           <a:effectLst>
-            <a:outerShdw sx="100000" sy="100000" kx="0" ky="0" algn="bl" rotWithShape="0" blurRad="152400" dist="38100" dir="5400000">
+            <a:outerShdw blurRad="152400" dist="38100" dir="5400000" algn="bl" rotWithShape="0">
               <a:srgbClr val="8A6070">
                 <a:alpha val="11000"/>
               </a:srgbClr>
@@ -7486,11 +8077,11 @@
           <a:bodyPr wrap="square" lIns="0" tIns="0" rIns="0" bIns="0" rtlCol="0" anchor="ctr"/>
           <a:lstStyle/>
           <a:p>
-            <a:pPr algn="ctr" indent="0" marL="0">
-              <a:buNone/>
-            </a:pPr>
-            <a:r>
-              <a:rPr lang="en-US" sz="850" b="1" spc="60" kern="0" dirty="0">
+            <a:pPr marL="0" indent="0" algn="ctr">
+              <a:buNone/>
+            </a:pPr>
+            <a:r>
+              <a:rPr lang="ja-JP" altLang="en-US" sz="850" b="1" kern="0" spc="60">
                 <a:solidFill>
                   <a:srgbClr val="8F80C9"/>
                 </a:solidFill>
@@ -7498,7 +8089,7 @@
                 <a:ea typeface="Meiryo" pitchFamily="34" charset="-122"/>
                 <a:cs typeface="Meiryo" pitchFamily="34" charset="-120"/>
               </a:rPr>
-              <a:t>PRO</a:t>
+              <a:t>任意</a:t>
             </a:r>
             <a:endParaRPr lang="en-US" sz="850" dirty="0"/>
           </a:p>
@@ -7525,11 +8116,11 @@
           <a:bodyPr wrap="square" lIns="0" tIns="0" rIns="0" bIns="0" rtlCol="0" anchor="ctr"/>
           <a:lstStyle/>
           <a:p>
-            <a:pPr indent="0" marL="0">
-              <a:buNone/>
-            </a:pPr>
-            <a:r>
-              <a:rPr lang="en-US" sz="2400" b="1" dirty="0">
+            <a:pPr marL="0" indent="0">
+              <a:buNone/>
+            </a:pPr>
+            <a:r>
+              <a:rPr lang="ja-JP" altLang="en-US" sz="2400" b="1">
                 <a:solidFill>
                   <a:srgbClr val="292B3D"/>
                 </a:solidFill>
@@ -7537,7 +8128,7 @@
                 <a:ea typeface="Yu Gothic" pitchFamily="34" charset="-122"/>
                 <a:cs typeface="Yu Gothic" pitchFamily="34" charset="-120"/>
               </a:rPr>
-              <a:t>Pro版</a:t>
+              <a:t>外部サービス</a:t>
             </a:r>
             <a:endParaRPr lang="en-US" sz="2400" dirty="0"/>
           </a:p>
@@ -7564,11 +8155,11 @@
           <a:bodyPr wrap="square" lIns="0" tIns="0" rIns="0" bIns="0" rtlCol="0" anchor="ctr"/>
           <a:lstStyle/>
           <a:p>
-            <a:pPr algn="r" indent="0" marL="0">
-              <a:buNone/>
-            </a:pPr>
-            <a:r>
-              <a:rPr lang="en-US" sz="1700" b="1" dirty="0">
+            <a:pPr marL="0" indent="0" algn="r">
+              <a:buNone/>
+            </a:pPr>
+            <a:r>
+              <a:rPr lang="ja-JP" altLang="en-US" sz="1700" b="1">
                 <a:solidFill>
                   <a:srgbClr val="8F80C9"/>
                 </a:solidFill>
@@ -7576,7 +8167,7 @@
                 <a:ea typeface="Yu Gothic" pitchFamily="34" charset="-122"/>
                 <a:cs typeface="Yu Gothic" pitchFamily="34" charset="-120"/>
               </a:rPr>
-              <a:t>買い切り予定</a:t>
+              <a:t>必要な場合だけ</a:t>
             </a:r>
             <a:endParaRPr lang="en-US" sz="1700" dirty="0"/>
           </a:p>
@@ -7603,7 +8194,7 @@
           <a:bodyPr wrap="square" lIns="0" tIns="0" rIns="0" bIns="0" rtlCol="0" anchor="ctr"/>
           <a:lstStyle/>
           <a:p>
-            <a:pPr indent="0" marL="0">
+            <a:pPr marL="0" indent="0">
               <a:buNone/>
             </a:pPr>
             <a:r>
@@ -7642,11 +8233,11 @@
           <a:bodyPr wrap="square" lIns="0" tIns="0" rIns="0" bIns="0" rtlCol="0" anchor="ctr"/>
           <a:lstStyle/>
           <a:p>
-            <a:pPr indent="0" marL="0">
-              <a:buNone/>
-            </a:pPr>
-            <a:r>
-              <a:rPr lang="en-US" sz="1150" dirty="0">
+            <a:pPr marL="0" indent="0">
+              <a:buNone/>
+            </a:pPr>
+            <a:r>
+              <a:rPr lang="ja-JP" altLang="en-US" sz="1150">
                 <a:solidFill>
                   <a:srgbClr val="292B3D"/>
                 </a:solidFill>
@@ -7654,7 +8245,29 @@
                 <a:ea typeface="Meiryo" pitchFamily="34" charset="-122"/>
                 <a:cs typeface="Meiryo" pitchFamily="34" charset="-120"/>
               </a:rPr>
-              <a:t>無料版のすべて</a:t>
+              <a:t>クラウド</a:t>
+            </a:r>
+            <a:r>
+              <a:rPr lang="en-US" altLang="ja-JP" sz="1150">
+                <a:solidFill>
+                  <a:srgbClr val="292B3D"/>
+                </a:solidFill>
+                <a:latin typeface="Meiryo" pitchFamily="34" charset="0"/>
+                <a:ea typeface="Meiryo" pitchFamily="34" charset="-122"/>
+                <a:cs typeface="Meiryo" pitchFamily="34" charset="-120"/>
+              </a:rPr>
+              <a:t>AI</a:t>
+            </a:r>
+            <a:r>
+              <a:rPr lang="ja-JP" altLang="en-US" sz="1150">
+                <a:solidFill>
+                  <a:srgbClr val="292B3D"/>
+                </a:solidFill>
+                <a:latin typeface="Meiryo" pitchFamily="34" charset="0"/>
+                <a:ea typeface="Meiryo" pitchFamily="34" charset="-122"/>
+                <a:cs typeface="Meiryo" pitchFamily="34" charset="-120"/>
+              </a:rPr>
+              <a:t>各社の利用料</a:t>
             </a:r>
             <a:endParaRPr lang="en-US" sz="1150" dirty="0"/>
           </a:p>
@@ -7681,7 +8294,7 @@
           <a:bodyPr wrap="square" lIns="0" tIns="0" rIns="0" bIns="0" rtlCol="0" anchor="ctr"/>
           <a:lstStyle/>
           <a:p>
-            <a:pPr indent="0" marL="0">
+            <a:pPr marL="0" indent="0">
               <a:buNone/>
             </a:pPr>
             <a:r>
@@ -7720,11 +8333,11 @@
           <a:bodyPr wrap="square" lIns="0" tIns="0" rIns="0" bIns="0" rtlCol="0" anchor="ctr"/>
           <a:lstStyle/>
           <a:p>
-            <a:pPr indent="0" marL="0">
-              <a:buNone/>
-            </a:pPr>
-            <a:r>
-              <a:rPr lang="en-US" sz="1150" dirty="0">
+            <a:pPr marL="0" indent="0">
+              <a:buNone/>
+            </a:pPr>
+            <a:r>
+              <a:rPr lang="ja-JP" altLang="en-US" sz="1150">
                 <a:solidFill>
                   <a:srgbClr val="292B3D"/>
                 </a:solidFill>
@@ -7732,7 +8345,7 @@
                 <a:ea typeface="Meiryo" pitchFamily="34" charset="-122"/>
                 <a:cs typeface="Meiryo" pitchFamily="34" charset="-120"/>
               </a:rPr>
-              <a:t>より広いPC操作スキル</a:t>
+              <a:t>追加コンポーネントの利用条件</a:t>
             </a:r>
             <a:endParaRPr lang="en-US" sz="1150" dirty="0"/>
           </a:p>
@@ -7759,7 +8372,7 @@
           <a:bodyPr wrap="square" lIns="0" tIns="0" rIns="0" bIns="0" rtlCol="0" anchor="ctr"/>
           <a:lstStyle/>
           <a:p>
-            <a:pPr indent="0" marL="0">
+            <a:pPr marL="0" indent="0">
               <a:buNone/>
             </a:pPr>
             <a:r>
@@ -7798,11 +8411,11 @@
           <a:bodyPr wrap="square" lIns="0" tIns="0" rIns="0" bIns="0" rtlCol="0" anchor="ctr"/>
           <a:lstStyle/>
           <a:p>
-            <a:pPr indent="0" marL="0">
-              <a:buNone/>
-            </a:pPr>
-            <a:r>
-              <a:rPr lang="en-US" sz="1150" dirty="0">
+            <a:pPr marL="0" indent="0">
+              <a:buNone/>
+            </a:pPr>
+            <a:r>
+              <a:rPr lang="ja-JP" altLang="en-US" sz="1150">
                 <a:solidFill>
                   <a:srgbClr val="292B3D"/>
                 </a:solidFill>
@@ -7810,7 +8423,29 @@
                 <a:ea typeface="Meiryo" pitchFamily="34" charset="-122"/>
                 <a:cs typeface="Meiryo" pitchFamily="34" charset="-120"/>
               </a:rPr>
-              <a:t>外部サービス連携</a:t>
+              <a:t>利用者が用意する</a:t>
+            </a:r>
+            <a:r>
+              <a:rPr lang="en-US" altLang="ja-JP" sz="1150">
+                <a:solidFill>
+                  <a:srgbClr val="292B3D"/>
+                </a:solidFill>
+                <a:latin typeface="Meiryo" pitchFamily="34" charset="0"/>
+                <a:ea typeface="Meiryo" pitchFamily="34" charset="-122"/>
+                <a:cs typeface="Meiryo" pitchFamily="34" charset="-120"/>
+              </a:rPr>
+              <a:t>Live2D</a:t>
+            </a:r>
+            <a:r>
+              <a:rPr lang="ja-JP" altLang="en-US" sz="1150">
+                <a:solidFill>
+                  <a:srgbClr val="292B3D"/>
+                </a:solidFill>
+                <a:latin typeface="Meiryo" pitchFamily="34" charset="0"/>
+                <a:ea typeface="Meiryo" pitchFamily="34" charset="-122"/>
+                <a:cs typeface="Meiryo" pitchFamily="34" charset="-120"/>
+              </a:rPr>
+              <a:t>モデル</a:t>
             </a:r>
             <a:endParaRPr lang="en-US" sz="1150" dirty="0"/>
           </a:p>
@@ -7837,7 +8472,7 @@
           <a:bodyPr wrap="square" lIns="0" tIns="0" rIns="0" bIns="0" rtlCol="0" anchor="ctr"/>
           <a:lstStyle/>
           <a:p>
-            <a:pPr indent="0" marL="0">
+            <a:pPr marL="0" indent="0">
               <a:buNone/>
             </a:pPr>
             <a:r>
@@ -7876,11 +8511,11 @@
           <a:bodyPr wrap="square" lIns="0" tIns="0" rIns="0" bIns="0" rtlCol="0" anchor="ctr"/>
           <a:lstStyle/>
           <a:p>
-            <a:pPr indent="0" marL="0">
-              <a:buNone/>
-            </a:pPr>
-            <a:r>
-              <a:rPr lang="en-US" sz="1150" dirty="0">
+            <a:pPr marL="0" indent="0">
+              <a:buNone/>
+            </a:pPr>
+            <a:r>
+              <a:rPr lang="en-US" sz="1150">
                 <a:solidFill>
                   <a:srgbClr val="292B3D"/>
                 </a:solidFill>
@@ -7888,7 +8523,18 @@
                 <a:ea typeface="Meiryo" pitchFamily="34" charset="-122"/>
                 <a:cs typeface="Meiryo" pitchFamily="34" charset="-120"/>
               </a:rPr>
-              <a:t>購入者向けサポート</a:t>
+              <a:t>Claude Code／Codex CLI</a:t>
+            </a:r>
+            <a:r>
+              <a:rPr lang="ja-JP" altLang="en-US" sz="1150">
+                <a:solidFill>
+                  <a:srgbClr val="292B3D"/>
+                </a:solidFill>
+                <a:latin typeface="Meiryo" pitchFamily="34" charset="0"/>
+                <a:ea typeface="Meiryo" pitchFamily="34" charset="-122"/>
+                <a:cs typeface="Meiryo" pitchFamily="34" charset="-120"/>
+              </a:rPr>
+              <a:t>の利用条件</a:t>
             </a:r>
             <a:endParaRPr lang="en-US" sz="1150" dirty="0"/>
           </a:p>
@@ -7915,11 +8561,11 @@
           <a:bodyPr wrap="square" lIns="0" tIns="0" rIns="0" bIns="0" rtlCol="0" anchor="ctr"/>
           <a:lstStyle/>
           <a:p>
-            <a:pPr indent="0" marL="0">
-              <a:buNone/>
-            </a:pPr>
-            <a:r>
-              <a:rPr lang="en-US" sz="1000" dirty="0">
+            <a:pPr marL="0" indent="0">
+              <a:buNone/>
+            </a:pPr>
+            <a:r>
+              <a:rPr lang="en-US" sz="1000">
                 <a:solidFill>
                   <a:srgbClr val="686A7D"/>
                 </a:solidFill>
@@ -7927,7 +8573,18 @@
                 <a:ea typeface="Meiryo" pitchFamily="34" charset="-122"/>
                 <a:cs typeface="Meiryo" pitchFamily="34" charset="-120"/>
               </a:rPr>
-              <a:t>BOOTHで販売準備中</a:t>
+              <a:t>PicoAgent</a:t>
+            </a:r>
+            <a:r>
+              <a:rPr lang="ja-JP" altLang="en-US" sz="1000">
+                <a:solidFill>
+                  <a:srgbClr val="686A7D"/>
+                </a:solidFill>
+                <a:latin typeface="Meiryo" pitchFamily="34" charset="0"/>
+                <a:ea typeface="Meiryo" pitchFamily="34" charset="-122"/>
+                <a:cs typeface="Meiryo" pitchFamily="34" charset="-120"/>
+              </a:rPr>
+              <a:t>本体は無料公開中</a:t>
             </a:r>
             <a:endParaRPr lang="en-US" sz="1000" dirty="0"/>
           </a:p>
@@ -7954,11 +8611,11 @@
           <a:bodyPr wrap="square" lIns="0" tIns="0" rIns="0" bIns="0" rtlCol="0" anchor="ctr"/>
           <a:lstStyle/>
           <a:p>
-            <a:pPr indent="0" marL="0">
-              <a:buNone/>
-            </a:pPr>
-            <a:r>
-              <a:rPr lang="en-US" sz="950" dirty="0">
+            <a:pPr marL="0" indent="0">
+              <a:buNone/>
+            </a:pPr>
+            <a:r>
+              <a:rPr lang="ja-JP" altLang="en-US" sz="950">
                 <a:solidFill>
                   <a:srgbClr val="686A7D"/>
                 </a:solidFill>
@@ -7966,7 +8623,7 @@
                 <a:ea typeface="Meiryo" pitchFamily="34" charset="-122"/>
                 <a:cs typeface="Meiryo" pitchFamily="34" charset="-120"/>
               </a:rPr>
-              <a:t>ダウンロード販売のデジタル商品のため、購入後の返品・キャンセル・返金は一切お受けしていません。まず無料のベータ版で動作をご確認ください。</a:t>
+              <a:t>開発中のアルファ版のため、機能・画面・設定が変更される場合があります。大事なデータはバックアップしてお使いください。</a:t>
             </a:r>
             <a:endParaRPr lang="en-US" sz="950" dirty="0"/>
           </a:p>
@@ -7993,7 +8650,7 @@
           <a:bodyPr wrap="square" lIns="0" tIns="0" rIns="0" bIns="0" rtlCol="0" anchor="ctr"/>
           <a:lstStyle/>
           <a:p>
-            <a:pPr indent="0" marL="0">
+            <a:pPr marL="0" indent="0">
               <a:buNone/>
             </a:pPr>
             <a:r>
@@ -8005,7 +8662,18 @@
                 <a:ea typeface="Meiryo" pitchFamily="34" charset="-122"/>
                 <a:cs typeface="Meiryo" pitchFamily="34" charset="-120"/>
               </a:rPr>
-              <a:t>PicoAgent v1.0.2 Beta</a:t>
+              <a:t>PicoAgent </a:t>
+            </a:r>
+            <a:r>
+              <a:rPr lang="en-US" sz="850">
+                <a:solidFill>
+                  <a:srgbClr val="A79AA1"/>
+                </a:solidFill>
+                <a:latin typeface="Meiryo" pitchFamily="34" charset="0"/>
+                <a:ea typeface="Meiryo" pitchFamily="34" charset="-122"/>
+                <a:cs typeface="Meiryo" pitchFamily="34" charset="-120"/>
+              </a:rPr>
+              <a:t>v1.0.2 ALPHA</a:t>
             </a:r>
             <a:endParaRPr lang="en-US" sz="850" dirty="0"/>
           </a:p>
@@ -8032,7 +8700,7 @@
           <a:bodyPr wrap="square" lIns="0" tIns="0" rIns="0" bIns="0" rtlCol="0" anchor="ctr"/>
           <a:lstStyle/>
           <a:p>
-            <a:pPr algn="r" indent="0" marL="0">
+            <a:pPr marL="0" indent="0" algn="r">
               <a:buNone/>
             </a:pPr>
             <a:r>
@@ -8064,7 +8732,7 @@
     <p:bg>
       <p:bgPr>
         <a:blipFill dpi="0" rotWithShape="1">
-          <a:blip r:embed="rId1">
+          <a:blip r:embed="rId3">
             <a:lum/>
           </a:blip>
           <a:srcRect/>
@@ -8110,11 +8778,11 @@
           <a:bodyPr wrap="square" lIns="0" tIns="0" rIns="0" bIns="0" rtlCol="0" anchor="ctr"/>
           <a:lstStyle/>
           <a:p>
-            <a:pPr indent="0" marL="0">
-              <a:buNone/>
-            </a:pPr>
-            <a:r>
-              <a:rPr lang="en-US" sz="1100" b="1" spc="300" kern="0" dirty="0">
+            <a:pPr marL="0" indent="0">
+              <a:buNone/>
+            </a:pPr>
+            <a:r>
+              <a:rPr lang="en-US" sz="1100" b="1" kern="0" spc="300" dirty="0">
                 <a:solidFill>
                   <a:srgbClr val="F2A8B8"/>
                 </a:solidFill>
@@ -8149,7 +8817,7 @@
           <a:bodyPr wrap="square" lIns="0" tIns="0" rIns="0" bIns="0" rtlCol="0" anchor="ctr"/>
           <a:lstStyle/>
           <a:p>
-            <a:pPr indent="0" marL="0">
+            <a:pPr marL="0" indent="0">
               <a:lnSpc>
                 <a:spcPts val="5000"/>
               </a:lnSpc>
@@ -8169,7 +8837,7 @@
             <a:endParaRPr lang="en-US" sz="3800" dirty="0"/>
           </a:p>
           <a:p>
-            <a:pPr indent="0" marL="0">
+            <a:pPr marL="0" indent="0">
               <a:lnSpc>
                 <a:spcPts val="5000"/>
               </a:lnSpc>
@@ -8211,9 +8879,42 @@
           <a:bodyPr wrap="square" lIns="0" tIns="0" rIns="0" bIns="0" rtlCol="0" anchor="ctr"/>
           <a:lstStyle/>
           <a:p>
-            <a:pPr indent="0" marL="0">
-              <a:buNone/>
-            </a:pPr>
+            <a:pPr marL="0" indent="0">
+              <a:buNone/>
+            </a:pPr>
+            <a:r>
+              <a:rPr lang="en-US" sz="1350">
+                <a:solidFill>
+                  <a:srgbClr val="C9C4D4"/>
+                </a:solidFill>
+                <a:latin typeface="Meiryo" pitchFamily="34" charset="0"/>
+                <a:ea typeface="Meiryo" pitchFamily="34" charset="-122"/>
+                <a:cs typeface="Meiryo" pitchFamily="34" charset="-120"/>
+              </a:rPr>
+              <a:t>開発中のWindows</a:t>
+            </a:r>
+            <a:r>
+              <a:rPr lang="ja-JP" altLang="en-US" sz="1350">
+                <a:solidFill>
+                  <a:srgbClr val="C9C4D4"/>
+                </a:solidFill>
+                <a:latin typeface="Meiryo" pitchFamily="34" charset="0"/>
+                <a:ea typeface="Meiryo" pitchFamily="34" charset="-122"/>
+                <a:cs typeface="Meiryo" pitchFamily="34" charset="-120"/>
+              </a:rPr>
+              <a:t>アルファ</a:t>
+            </a:r>
+            <a:r>
+              <a:rPr lang="en-US" sz="1350">
+                <a:solidFill>
+                  <a:srgbClr val="C9C4D4"/>
+                </a:solidFill>
+                <a:latin typeface="Meiryo" pitchFamily="34" charset="0"/>
+                <a:ea typeface="Meiryo" pitchFamily="34" charset="-122"/>
+                <a:cs typeface="Meiryo" pitchFamily="34" charset="-120"/>
+              </a:rPr>
+              <a:t>版を</a:t>
+            </a:r>
             <a:r>
               <a:rPr lang="en-US" sz="1350" dirty="0">
                 <a:solidFill>
@@ -8223,7 +8924,7 @@
                 <a:ea typeface="Meiryo" pitchFamily="34" charset="-122"/>
                 <a:cs typeface="Meiryo" pitchFamily="34" charset="-120"/>
               </a:rPr>
-              <a:t>開発中のWindowsベータ版を、無料で試せます。</a:t>
+              <a:t>、無料で試せます。</a:t>
             </a:r>
             <a:endParaRPr lang="en-US" sz="1350" dirty="0"/>
           </a:p>
@@ -8272,11 +8973,11 @@
           <a:bodyPr wrap="square" lIns="0" tIns="0" rIns="0" bIns="0" rtlCol="0" anchor="ctr"/>
           <a:lstStyle/>
           <a:p>
-            <a:pPr algn="ctr" indent="0" marL="0">
-              <a:buNone/>
-            </a:pPr>
-            <a:r>
-              <a:rPr lang="en-US" sz="1300" b="1" spc="60" kern="0" dirty="0">
+            <a:pPr marL="0" indent="0" algn="ctr">
+              <a:buNone/>
+            </a:pPr>
+            <a:r>
+              <a:rPr lang="en-US" sz="1300" b="1" kern="0" spc="60" dirty="0">
                 <a:solidFill>
                   <a:srgbClr val="FFFFFF"/>
                 </a:solidFill>
@@ -8284,7 +8985,29 @@
                 <a:ea typeface="Meiryo" pitchFamily="34" charset="-122"/>
                 <a:cs typeface="Meiryo" pitchFamily="34" charset="-120"/>
               </a:rPr>
-              <a:t>Windows版 v1.0.2 Beta を取得</a:t>
+              <a:t>Windows版 </a:t>
+            </a:r>
+            <a:r>
+              <a:rPr lang="en-US" sz="1300" b="1" kern="0" spc="60">
+                <a:solidFill>
+                  <a:srgbClr val="FFFFFF"/>
+                </a:solidFill>
+                <a:latin typeface="Meiryo" pitchFamily="34" charset="0"/>
+                <a:ea typeface="Meiryo" pitchFamily="34" charset="-122"/>
+                <a:cs typeface="Meiryo" pitchFamily="34" charset="-120"/>
+              </a:rPr>
+              <a:t>v1.0.2 ALPHA </a:t>
+            </a:r>
+            <a:r>
+              <a:rPr lang="en-US" sz="1300" b="1" kern="0" spc="60" dirty="0">
+                <a:solidFill>
+                  <a:srgbClr val="FFFFFF"/>
+                </a:solidFill>
+                <a:latin typeface="Meiryo" pitchFamily="34" charset="0"/>
+                <a:ea typeface="Meiryo" pitchFamily="34" charset="-122"/>
+                <a:cs typeface="Meiryo" pitchFamily="34" charset="-120"/>
+              </a:rPr>
+              <a:t>を取得</a:t>
             </a:r>
             <a:endParaRPr lang="en-US" sz="1300" dirty="0"/>
           </a:p>
@@ -8311,7 +9034,7 @@
           <a:bodyPr wrap="square" lIns="0" tIns="0" rIns="0" bIns="0" rtlCol="0" anchor="ctr"/>
           <a:lstStyle/>
           <a:p>
-            <a:pPr indent="0" marL="0">
+            <a:pPr marL="0" indent="0">
               <a:buNone/>
             </a:pPr>
             <a:r>
@@ -8350,7 +9073,7 @@
           <a:bodyPr wrap="square" lIns="0" tIns="0" rIns="0" bIns="0" rtlCol="0" anchor="ctr"/>
           <a:lstStyle/>
           <a:p>
-            <a:pPr indent="0" marL="0">
+            <a:pPr marL="0" indent="0">
               <a:buNone/>
             </a:pPr>
             <a:r>
@@ -8392,14 +9115,14 @@
       </p:sp>
       <p:pic>
         <p:nvPicPr>
-          <p:cNvPr id="10" name="Image 0" descr="/tmp/claude-0/-home-user-PicoAgent/7130734a-69b9-54b3-90f7-bb7bb9043f8d/scratchpad/deck/img/flat-face-mugi-dark.jpg">    </p:cNvPr>
+          <p:cNvPr id="10" name="Image 0" descr="/tmp/claude-0/-home-user-PicoAgent/7130734a-69b9-54b3-90f7-bb7bb9043f8d/scratchpad/deck/img/flat-face-mugi-dark.jpg"/>
           <p:cNvPicPr>
             <a:picLocks noChangeAspect="1"/>
           </p:cNvPicPr>
           <p:nvPr/>
         </p:nvPicPr>
         <p:blipFill>
-          <a:blip r:embed="rId2"/>
+          <a:blip r:embed="rId4"/>
           <a:stretch>
             <a:fillRect/>
           </a:stretch>
@@ -8428,7 +9151,7 @@
     <p:bg>
       <p:bgPr>
         <a:blipFill dpi="0" rotWithShape="1">
-          <a:blip r:embed="rId1">
+          <a:blip r:embed="rId3">
             <a:lum/>
           </a:blip>
           <a:srcRect/>
@@ -8474,11 +9197,11 @@
           <a:bodyPr wrap="square" lIns="0" tIns="0" rIns="0" bIns="0" rtlCol="0" anchor="ctr"/>
           <a:lstStyle/>
           <a:p>
-            <a:pPr indent="0" marL="0">
-              <a:buNone/>
-            </a:pPr>
-            <a:r>
-              <a:rPr lang="en-US" sz="1050" b="1" spc="240" kern="0" dirty="0">
+            <a:pPr marL="0" indent="0">
+              <a:buNone/>
+            </a:pPr>
+            <a:r>
+              <a:rPr lang="en-US" sz="1050" b="1" kern="0" spc="240" dirty="0">
                 <a:solidFill>
                   <a:srgbClr val="B54862"/>
                 </a:solidFill>
@@ -8513,7 +9236,7 @@
           <a:bodyPr wrap="square" lIns="0" tIns="0" rIns="0" bIns="0" rtlCol="0" anchor="ctr"/>
           <a:lstStyle/>
           <a:p>
-            <a:pPr indent="0" marL="0">
+            <a:pPr marL="0" indent="0">
               <a:lnSpc>
                 <a:spcPts val="4600"/>
               </a:lnSpc>
@@ -8533,7 +9256,7 @@
             <a:endParaRPr lang="en-US" sz="3200" dirty="0"/>
           </a:p>
           <a:p>
-            <a:pPr indent="0" marL="0">
+            <a:pPr marL="0" indent="0">
               <a:lnSpc>
                 <a:spcPts val="4600"/>
               </a:lnSpc>
@@ -8575,7 +9298,7 @@
           <a:bodyPr wrap="square" lIns="0" tIns="0" rIns="0" bIns="0" rtlCol="0" anchor="ctr"/>
           <a:lstStyle/>
           <a:p>
-            <a:pPr indent="0" marL="0">
+            <a:pPr marL="0" indent="0">
               <a:lnSpc>
                 <a:spcPts val="2100"/>
               </a:lnSpc>
@@ -8595,7 +9318,7 @@
             <a:endParaRPr lang="en-US" sz="1250" dirty="0"/>
           </a:p>
           <a:p>
-            <a:pPr indent="0" marL="0">
+            <a:pPr marL="0" indent="0">
               <a:lnSpc>
                 <a:spcPts val="2100"/>
               </a:lnSpc>
@@ -8659,7 +9382,7 @@
           <a:bodyPr wrap="square" lIns="0" tIns="0" rIns="0" bIns="0" rtlCol="0" anchor="ctr"/>
           <a:lstStyle/>
           <a:p>
-            <a:pPr indent="0" marL="0">
+            <a:pPr marL="0" indent="0">
               <a:buNone/>
             </a:pPr>
             <a:r>
@@ -8673,9 +9396,6 @@
               </a:rPr>
               <a:t>70</a:t>
             </a:r>
-            <a:pPr indent="0" marL="0">
-              <a:buNone/>
-            </a:pPr>
             <a:r>
               <a:rPr lang="en-US" sz="1150" b="1" dirty="0">
                 <a:solidFill>
@@ -8712,7 +9432,7 @@
           <a:bodyPr wrap="square" lIns="0" tIns="0" rIns="0" bIns="0" rtlCol="0" anchor="ctr"/>
           <a:lstStyle/>
           <a:p>
-            <a:pPr indent="0" marL="0">
+            <a:pPr marL="0" indent="0">
               <a:lnSpc>
                 <a:spcPts val="1500"/>
               </a:lnSpc>
@@ -8776,7 +9496,7 @@
           <a:bodyPr wrap="square" lIns="0" tIns="0" rIns="0" bIns="0" rtlCol="0" anchor="ctr"/>
           <a:lstStyle/>
           <a:p>
-            <a:pPr indent="0" marL="0">
+            <a:pPr marL="0" indent="0">
               <a:buNone/>
             </a:pPr>
             <a:r>
@@ -8790,9 +9510,6 @@
               </a:rPr>
               <a:t>7</a:t>
             </a:r>
-            <a:pPr indent="0" marL="0">
-              <a:buNone/>
-            </a:pPr>
             <a:r>
               <a:rPr lang="en-US" sz="1150" b="1" dirty="0">
                 <a:solidFill>
@@ -8829,7 +9546,7 @@
           <a:bodyPr wrap="square" lIns="0" tIns="0" rIns="0" bIns="0" rtlCol="0" anchor="ctr"/>
           <a:lstStyle/>
           <a:p>
-            <a:pPr indent="0" marL="0">
+            <a:pPr marL="0" indent="0">
               <a:lnSpc>
                 <a:spcPts val="1500"/>
               </a:lnSpc>
@@ -8893,7 +9610,7 @@
           <a:bodyPr wrap="square" lIns="0" tIns="0" rIns="0" bIns="0" rtlCol="0" anchor="ctr"/>
           <a:lstStyle/>
           <a:p>
-            <a:pPr indent="0" marL="0">
+            <a:pPr marL="0" indent="0">
               <a:buNone/>
             </a:pPr>
             <a:r>
@@ -8907,9 +9624,6 @@
               </a:rPr>
               <a:t>7</a:t>
             </a:r>
-            <a:pPr indent="0" marL="0">
-              <a:buNone/>
-            </a:pPr>
             <a:r>
               <a:rPr lang="en-US" sz="1150" b="1" dirty="0">
                 <a:solidFill>
@@ -8946,7 +9660,7 @@
           <a:bodyPr wrap="square" lIns="0" tIns="0" rIns="0" bIns="0" rtlCol="0" anchor="ctr"/>
           <a:lstStyle/>
           <a:p>
-            <a:pPr indent="0" marL="0">
+            <a:pPr marL="0" indent="0">
               <a:lnSpc>
                 <a:spcPts val="1500"/>
               </a:lnSpc>
@@ -8988,7 +9702,7 @@
           <a:bodyPr wrap="square" lIns="0" tIns="0" rIns="0" bIns="0" rtlCol="0" anchor="ctr"/>
           <a:lstStyle/>
           <a:p>
-            <a:pPr indent="0" marL="0">
+            <a:pPr marL="0" indent="0">
               <a:buNone/>
             </a:pPr>
             <a:r>
@@ -9027,7 +9741,7 @@
           </a:solidFill>
           <a:ln/>
           <a:effectLst>
-            <a:outerShdw sx="100000" sy="100000" kx="0" ky="0" algn="bl" rotWithShape="0" blurRad="152400" dist="38100" dir="5400000">
+            <a:outerShdw blurRad="152400" dist="38100" dir="5400000" algn="bl" rotWithShape="0">
               <a:srgbClr val="8A6070">
                 <a:alpha val="11000"/>
               </a:srgbClr>
@@ -9037,14 +9751,14 @@
       </p:sp>
       <p:pic>
         <p:nvPicPr>
-          <p:cNvPr id="16" name="Image 0" descr="/tmp/claude-0/-home-user-PicoAgent/7130734a-69b9-54b3-90f7-bb7bb9043f8d/scratchpad/deck/img/flat-main.jpg">    </p:cNvPr>
+          <p:cNvPr id="16" name="Image 0" descr="/tmp/claude-0/-home-user-PicoAgent/7130734a-69b9-54b3-90f7-bb7bb9043f8d/scratchpad/deck/img/flat-main.jpg"/>
           <p:cNvPicPr>
             <a:picLocks noChangeAspect="1"/>
           </p:cNvPicPr>
           <p:nvPr/>
         </p:nvPicPr>
         <p:blipFill>
-          <a:blip r:embed="rId2"/>
+          <a:blip r:embed="rId4"/>
           <a:stretch>
             <a:fillRect/>
           </a:stretch>
@@ -9080,7 +9794,7 @@
           </a:solidFill>
           <a:ln/>
           <a:effectLst>
-            <a:outerShdw sx="100000" sy="100000" kx="0" ky="0" algn="bl" rotWithShape="0" blurRad="152400" dist="38100" dir="5400000">
+            <a:outerShdw blurRad="152400" dist="38100" dir="5400000" algn="bl" rotWithShape="0">
               <a:srgbClr val="8A6070">
                 <a:alpha val="11000"/>
               </a:srgbClr>
@@ -9090,14 +9804,14 @@
       </p:sp>
       <p:pic>
         <p:nvPicPr>
-          <p:cNvPr id="18" name="Image 1" descr="/tmp/claude-0/-home-user-PicoAgent/7130734a-69b9-54b3-90f7-bb7bb9043f8d/scratchpad/deck/img/flat-workspace.jpg">    </p:cNvPr>
+          <p:cNvPr id="18" name="Image 1" descr="/tmp/claude-0/-home-user-PicoAgent/7130734a-69b9-54b3-90f7-bb7bb9043f8d/scratchpad/deck/img/flat-workspace.jpg"/>
           <p:cNvPicPr>
             <a:picLocks noChangeAspect="1"/>
           </p:cNvPicPr>
           <p:nvPr/>
         </p:nvPicPr>
         <p:blipFill>
-          <a:blip r:embed="rId3"/>
+          <a:blip r:embed="rId5"/>
           <a:stretch>
             <a:fillRect/>
           </a:stretch>
@@ -9133,7 +9847,7 @@
           <a:bodyPr wrap="square" lIns="0" tIns="0" rIns="0" bIns="0" rtlCol="0" anchor="ctr"/>
           <a:lstStyle/>
           <a:p>
-            <a:pPr indent="0" marL="0">
+            <a:pPr marL="0" indent="0">
               <a:buNone/>
             </a:pPr>
             <a:r>
@@ -9145,7 +9859,18 @@
                 <a:ea typeface="Meiryo" pitchFamily="34" charset="-122"/>
                 <a:cs typeface="Meiryo" pitchFamily="34" charset="-120"/>
               </a:rPr>
-              <a:t>PicoAgent v1.0.2 Beta</a:t>
+              <a:t>PicoAgent </a:t>
+            </a:r>
+            <a:r>
+              <a:rPr lang="en-US" sz="850">
+                <a:solidFill>
+                  <a:srgbClr val="A79AA1"/>
+                </a:solidFill>
+                <a:latin typeface="Meiryo" pitchFamily="34" charset="0"/>
+                <a:ea typeface="Meiryo" pitchFamily="34" charset="-122"/>
+                <a:cs typeface="Meiryo" pitchFamily="34" charset="-120"/>
+              </a:rPr>
+              <a:t>v1.0.2 ALPHA</a:t>
             </a:r>
             <a:endParaRPr lang="en-US" sz="850" dirty="0"/>
           </a:p>
@@ -9172,7 +9897,7 @@
           <a:bodyPr wrap="square" lIns="0" tIns="0" rIns="0" bIns="0" rtlCol="0" anchor="ctr"/>
           <a:lstStyle/>
           <a:p>
-            <a:pPr algn="r" indent="0" marL="0">
+            <a:pPr marL="0" indent="0" algn="r">
               <a:buNone/>
             </a:pPr>
             <a:r>
@@ -9204,7 +9929,7 @@
     <p:bg>
       <p:bgPr>
         <a:blipFill dpi="0" rotWithShape="1">
-          <a:blip r:embed="rId1">
+          <a:blip r:embed="rId3">
             <a:lum/>
           </a:blip>
           <a:srcRect/>
@@ -9250,11 +9975,11 @@
           <a:bodyPr wrap="square" lIns="0" tIns="0" rIns="0" bIns="0" rtlCol="0" anchor="ctr"/>
           <a:lstStyle/>
           <a:p>
-            <a:pPr indent="0" marL="0">
-              <a:buNone/>
-            </a:pPr>
-            <a:r>
-              <a:rPr lang="en-US" sz="1050" b="1" spc="240" kern="0" dirty="0">
+            <a:pPr marL="0" indent="0">
+              <a:buNone/>
+            </a:pPr>
+            <a:r>
+              <a:rPr lang="en-US" sz="1050" b="1" kern="0" spc="240" dirty="0">
                 <a:solidFill>
                   <a:srgbClr val="B54862"/>
                 </a:solidFill>
@@ -9289,7 +10014,7 @@
           <a:bodyPr wrap="square" lIns="0" tIns="0" rIns="0" bIns="0" rtlCol="0" anchor="ctr"/>
           <a:lstStyle/>
           <a:p>
-            <a:pPr indent="0" marL="0">
+            <a:pPr marL="0" indent="0">
               <a:lnSpc>
                 <a:spcPts val="4000"/>
               </a:lnSpc>
@@ -9331,7 +10056,7 @@
           <a:bodyPr wrap="square" lIns="0" tIns="0" rIns="0" bIns="0" rtlCol="0" anchor="ctr"/>
           <a:lstStyle/>
           <a:p>
-            <a:pPr indent="0" marL="0">
+            <a:pPr marL="0" indent="0">
               <a:lnSpc>
                 <a:spcPts val="2100"/>
               </a:lnSpc>
@@ -9378,7 +10103,7 @@
             <a:prstDash val="solid"/>
           </a:ln>
           <a:effectLst>
-            <a:outerShdw sx="100000" sy="100000" kx="0" ky="0" algn="bl" rotWithShape="0" blurRad="152400" dist="38100" dir="5400000">
+            <a:outerShdw blurRad="152400" dist="38100" dir="5400000" algn="bl" rotWithShape="0">
               <a:srgbClr val="8A6070">
                 <a:alpha val="11000"/>
               </a:srgbClr>
@@ -9427,7 +10152,7 @@
           <a:bodyPr wrap="square" lIns="0" tIns="0" rIns="0" bIns="0" rtlCol="0" anchor="ctr"/>
           <a:lstStyle/>
           <a:p>
-            <a:pPr algn="ctr" indent="0" marL="0">
+            <a:pPr marL="0" indent="0" algn="ctr">
               <a:buNone/>
             </a:pPr>
             <a:r>
@@ -9466,11 +10191,11 @@
           <a:bodyPr wrap="square" lIns="0" tIns="0" rIns="0" bIns="0" rtlCol="0" anchor="ctr"/>
           <a:lstStyle/>
           <a:p>
-            <a:pPr indent="0" marL="0">
-              <a:buNone/>
-            </a:pPr>
-            <a:r>
-              <a:rPr lang="en-US" sz="900" b="1" spc="200" kern="0" dirty="0">
+            <a:pPr marL="0" indent="0">
+              <a:buNone/>
+            </a:pPr>
+            <a:r>
+              <a:rPr lang="en-US" sz="900" b="1" kern="0" spc="200" dirty="0">
                 <a:solidFill>
                   <a:srgbClr val="B54862"/>
                 </a:solidFill>
@@ -9505,7 +10230,7 @@
           <a:bodyPr wrap="square" lIns="0" tIns="0" rIns="0" bIns="0" rtlCol="0" anchor="ctr"/>
           <a:lstStyle/>
           <a:p>
-            <a:pPr indent="0" marL="0">
+            <a:pPr marL="0" indent="0">
               <a:buNone/>
             </a:pPr>
             <a:r>
@@ -9667,7 +10392,7 @@
             <a:prstDash val="solid"/>
           </a:ln>
           <a:effectLst>
-            <a:outerShdw sx="100000" sy="100000" kx="0" ky="0" algn="bl" rotWithShape="0" blurRad="152400" dist="38100" dir="5400000">
+            <a:outerShdw blurRad="152400" dist="38100" dir="5400000" algn="bl" rotWithShape="0">
               <a:srgbClr val="8A6070">
                 <a:alpha val="11000"/>
               </a:srgbClr>
@@ -9716,7 +10441,7 @@
           <a:bodyPr wrap="square" lIns="0" tIns="0" rIns="0" bIns="0" rtlCol="0" anchor="ctr"/>
           <a:lstStyle/>
           <a:p>
-            <a:pPr algn="ctr" indent="0" marL="0">
+            <a:pPr marL="0" indent="0" algn="ctr">
               <a:buNone/>
             </a:pPr>
             <a:r>
@@ -9755,11 +10480,11 @@
           <a:bodyPr wrap="square" lIns="0" tIns="0" rIns="0" bIns="0" rtlCol="0" anchor="ctr"/>
           <a:lstStyle/>
           <a:p>
-            <a:pPr indent="0" marL="0">
-              <a:buNone/>
-            </a:pPr>
-            <a:r>
-              <a:rPr lang="en-US" sz="900" b="1" spc="200" kern="0" dirty="0">
+            <a:pPr marL="0" indent="0">
+              <a:buNone/>
+            </a:pPr>
+            <a:r>
+              <a:rPr lang="en-US" sz="900" b="1" kern="0" spc="200" dirty="0">
                 <a:solidFill>
                   <a:srgbClr val="6FB39C"/>
                 </a:solidFill>
@@ -9794,7 +10519,7 @@
           <a:bodyPr wrap="square" lIns="0" tIns="0" rIns="0" bIns="0" rtlCol="0" anchor="ctr"/>
           <a:lstStyle/>
           <a:p>
-            <a:pPr indent="0" marL="0">
+            <a:pPr marL="0" indent="0">
               <a:buNone/>
             </a:pPr>
             <a:r>
@@ -9956,7 +10681,7 @@
             <a:prstDash val="solid"/>
           </a:ln>
           <a:effectLst>
-            <a:outerShdw sx="100000" sy="100000" kx="0" ky="0" algn="bl" rotWithShape="0" blurRad="152400" dist="38100" dir="5400000">
+            <a:outerShdw blurRad="152400" dist="38100" dir="5400000" algn="bl" rotWithShape="0">
               <a:srgbClr val="8A6070">
                 <a:alpha val="11000"/>
               </a:srgbClr>
@@ -10005,7 +10730,7 @@
           <a:bodyPr wrap="square" lIns="0" tIns="0" rIns="0" bIns="0" rtlCol="0" anchor="ctr"/>
           <a:lstStyle/>
           <a:p>
-            <a:pPr algn="ctr" indent="0" marL="0">
+            <a:pPr marL="0" indent="0" algn="ctr">
               <a:buNone/>
             </a:pPr>
             <a:r>
@@ -10044,11 +10769,11 @@
           <a:bodyPr wrap="square" lIns="0" tIns="0" rIns="0" bIns="0" rtlCol="0" anchor="ctr"/>
           <a:lstStyle/>
           <a:p>
-            <a:pPr indent="0" marL="0">
-              <a:buNone/>
-            </a:pPr>
-            <a:r>
-              <a:rPr lang="en-US" sz="900" b="1" spc="200" kern="0" dirty="0">
+            <a:pPr marL="0" indent="0">
+              <a:buNone/>
+            </a:pPr>
+            <a:r>
+              <a:rPr lang="en-US" sz="900" b="1" kern="0" spc="200" dirty="0">
                 <a:solidFill>
                   <a:srgbClr val="8F80C9"/>
                 </a:solidFill>
@@ -10083,7 +10808,7 @@
           <a:bodyPr wrap="square" lIns="0" tIns="0" rIns="0" bIns="0" rtlCol="0" anchor="ctr"/>
           <a:lstStyle/>
           <a:p>
-            <a:pPr indent="0" marL="0">
+            <a:pPr marL="0" indent="0">
               <a:buNone/>
             </a:pPr>
             <a:r>
@@ -10240,7 +10965,7 @@
           <a:bodyPr wrap="square" lIns="0" tIns="0" rIns="0" bIns="0" rtlCol="0" anchor="ctr"/>
           <a:lstStyle/>
           <a:p>
-            <a:pPr indent="0" marL="0">
+            <a:pPr marL="0" indent="0">
               <a:buNone/>
             </a:pPr>
             <a:r>
@@ -10252,7 +10977,18 @@
                 <a:ea typeface="Meiryo" pitchFamily="34" charset="-122"/>
                 <a:cs typeface="Meiryo" pitchFamily="34" charset="-120"/>
               </a:rPr>
-              <a:t>PicoAgent v1.0.2 Beta</a:t>
+              <a:t>PicoAgent </a:t>
+            </a:r>
+            <a:r>
+              <a:rPr lang="en-US" sz="850">
+                <a:solidFill>
+                  <a:srgbClr val="A79AA1"/>
+                </a:solidFill>
+                <a:latin typeface="Meiryo" pitchFamily="34" charset="0"/>
+                <a:ea typeface="Meiryo" pitchFamily="34" charset="-122"/>
+                <a:cs typeface="Meiryo" pitchFamily="34" charset="-120"/>
+              </a:rPr>
+              <a:t>v1.0.2 ALPHA</a:t>
             </a:r>
             <a:endParaRPr lang="en-US" sz="850" dirty="0"/>
           </a:p>
@@ -10279,7 +11015,7 @@
           <a:bodyPr wrap="square" lIns="0" tIns="0" rIns="0" bIns="0" rtlCol="0" anchor="ctr"/>
           <a:lstStyle/>
           <a:p>
-            <a:pPr algn="r" indent="0" marL="0">
+            <a:pPr marL="0" indent="0" algn="r">
               <a:buNone/>
             </a:pPr>
             <a:r>
@@ -10311,7 +11047,7 @@
     <p:bg>
       <p:bgPr>
         <a:blipFill dpi="0" rotWithShape="1">
-          <a:blip r:embed="rId1">
+          <a:blip r:embed="rId3">
             <a:lum/>
           </a:blip>
           <a:srcRect/>
@@ -10357,11 +11093,11 @@
           <a:bodyPr wrap="square" lIns="0" tIns="0" rIns="0" bIns="0" rtlCol="0" anchor="ctr"/>
           <a:lstStyle/>
           <a:p>
-            <a:pPr indent="0" marL="0">
-              <a:buNone/>
-            </a:pPr>
-            <a:r>
-              <a:rPr lang="en-US" sz="1050" b="1" spc="240" kern="0" dirty="0">
+            <a:pPr marL="0" indent="0">
+              <a:buNone/>
+            </a:pPr>
+            <a:r>
+              <a:rPr lang="en-US" sz="1050" b="1" kern="0" spc="240" dirty="0">
                 <a:solidFill>
                   <a:srgbClr val="B54862"/>
                 </a:solidFill>
@@ -10396,7 +11132,7 @@
           <a:bodyPr wrap="square" lIns="0" tIns="0" rIns="0" bIns="0" rtlCol="0" anchor="ctr"/>
           <a:lstStyle/>
           <a:p>
-            <a:pPr indent="0" marL="0">
+            <a:pPr marL="0" indent="0">
               <a:lnSpc>
                 <a:spcPts val="4000"/>
               </a:lnSpc>
@@ -10438,7 +11174,7 @@
           <a:bodyPr wrap="square" lIns="0" tIns="0" rIns="0" bIns="0" rtlCol="0" anchor="ctr"/>
           <a:lstStyle/>
           <a:p>
-            <a:pPr indent="0" marL="0">
+            <a:pPr marL="0" indent="0">
               <a:lnSpc>
                 <a:spcPts val="2100"/>
               </a:lnSpc>
@@ -10485,7 +11221,7 @@
             <a:prstDash val="solid"/>
           </a:ln>
           <a:effectLst>
-            <a:outerShdw sx="100000" sy="100000" kx="0" ky="0" algn="bl" rotWithShape="0" blurRad="152400" dist="38100" dir="5400000">
+            <a:outerShdw blurRad="152400" dist="38100" dir="5400000" algn="bl" rotWithShape="0">
               <a:srgbClr val="8A6070">
                 <a:alpha val="11000"/>
               </a:srgbClr>
@@ -10534,7 +11270,7 @@
           <a:bodyPr wrap="square" lIns="0" tIns="0" rIns="0" bIns="0" rtlCol="0" anchor="ctr"/>
           <a:lstStyle/>
           <a:p>
-            <a:pPr indent="0" marL="0">
+            <a:pPr marL="0" indent="0">
               <a:buNone/>
             </a:pPr>
             <a:r>
@@ -10573,7 +11309,7 @@
           <a:bodyPr wrap="square" lIns="0" tIns="0" rIns="0" bIns="0" rtlCol="0" anchor="ctr"/>
           <a:lstStyle/>
           <a:p>
-            <a:pPr indent="0" marL="0">
+            <a:pPr marL="0" indent="0">
               <a:lnSpc>
                 <a:spcPts val="1400"/>
               </a:lnSpc>
@@ -10620,7 +11356,7 @@
             <a:prstDash val="solid"/>
           </a:ln>
           <a:effectLst>
-            <a:outerShdw sx="100000" sy="100000" kx="0" ky="0" algn="bl" rotWithShape="0" blurRad="152400" dist="38100" dir="5400000">
+            <a:outerShdw blurRad="152400" dist="38100" dir="5400000" algn="bl" rotWithShape="0">
               <a:srgbClr val="8A6070">
                 <a:alpha val="11000"/>
               </a:srgbClr>
@@ -10669,7 +11405,7 @@
           <a:bodyPr wrap="square" lIns="0" tIns="0" rIns="0" bIns="0" rtlCol="0" anchor="ctr"/>
           <a:lstStyle/>
           <a:p>
-            <a:pPr indent="0" marL="0">
+            <a:pPr marL="0" indent="0">
               <a:buNone/>
             </a:pPr>
             <a:r>
@@ -10708,7 +11444,7 @@
           <a:bodyPr wrap="square" lIns="0" tIns="0" rIns="0" bIns="0" rtlCol="0" anchor="ctr"/>
           <a:lstStyle/>
           <a:p>
-            <a:pPr indent="0" marL="0">
+            <a:pPr marL="0" indent="0">
               <a:lnSpc>
                 <a:spcPts val="1400"/>
               </a:lnSpc>
@@ -10755,7 +11491,7 @@
             <a:prstDash val="solid"/>
           </a:ln>
           <a:effectLst>
-            <a:outerShdw sx="100000" sy="100000" kx="0" ky="0" algn="bl" rotWithShape="0" blurRad="152400" dist="38100" dir="5400000">
+            <a:outerShdw blurRad="152400" dist="38100" dir="5400000" algn="bl" rotWithShape="0">
               <a:srgbClr val="8A6070">
                 <a:alpha val="11000"/>
               </a:srgbClr>
@@ -10804,7 +11540,7 @@
           <a:bodyPr wrap="square" lIns="0" tIns="0" rIns="0" bIns="0" rtlCol="0" anchor="ctr"/>
           <a:lstStyle/>
           <a:p>
-            <a:pPr indent="0" marL="0">
+            <a:pPr marL="0" indent="0">
               <a:buNone/>
             </a:pPr>
             <a:r>
@@ -10843,7 +11579,7 @@
           <a:bodyPr wrap="square" lIns="0" tIns="0" rIns="0" bIns="0" rtlCol="0" anchor="ctr"/>
           <a:lstStyle/>
           <a:p>
-            <a:pPr indent="0" marL="0">
+            <a:pPr marL="0" indent="0">
               <a:lnSpc>
                 <a:spcPts val="1400"/>
               </a:lnSpc>
@@ -10890,7 +11626,7 @@
             <a:prstDash val="solid"/>
           </a:ln>
           <a:effectLst>
-            <a:outerShdw sx="100000" sy="100000" kx="0" ky="0" algn="bl" rotWithShape="0" blurRad="152400" dist="38100" dir="5400000">
+            <a:outerShdw blurRad="152400" dist="38100" dir="5400000" algn="bl" rotWithShape="0">
               <a:srgbClr val="8A6070">
                 <a:alpha val="11000"/>
               </a:srgbClr>
@@ -10939,7 +11675,7 @@
           <a:bodyPr wrap="square" lIns="0" tIns="0" rIns="0" bIns="0" rtlCol="0" anchor="ctr"/>
           <a:lstStyle/>
           <a:p>
-            <a:pPr indent="0" marL="0">
+            <a:pPr marL="0" indent="0">
               <a:buNone/>
             </a:pPr>
             <a:r>
@@ -10978,7 +11714,7 @@
           <a:bodyPr wrap="square" lIns="0" tIns="0" rIns="0" bIns="0" rtlCol="0" anchor="ctr"/>
           <a:lstStyle/>
           <a:p>
-            <a:pPr indent="0" marL="0">
+            <a:pPr marL="0" indent="0">
               <a:lnSpc>
                 <a:spcPts val="1400"/>
               </a:lnSpc>
@@ -11025,7 +11761,7 @@
             <a:prstDash val="solid"/>
           </a:ln>
           <a:effectLst>
-            <a:outerShdw sx="100000" sy="100000" kx="0" ky="0" algn="bl" rotWithShape="0" blurRad="152400" dist="38100" dir="5400000">
+            <a:outerShdw blurRad="152400" dist="38100" dir="5400000" algn="bl" rotWithShape="0">
               <a:srgbClr val="8A6070">
                 <a:alpha val="11000"/>
               </a:srgbClr>
@@ -11074,7 +11810,7 @@
           <a:bodyPr wrap="square" lIns="0" tIns="0" rIns="0" bIns="0" rtlCol="0" anchor="ctr"/>
           <a:lstStyle/>
           <a:p>
-            <a:pPr indent="0" marL="0">
+            <a:pPr marL="0" indent="0">
               <a:buNone/>
             </a:pPr>
             <a:r>
@@ -11113,7 +11849,7 @@
           <a:bodyPr wrap="square" lIns="0" tIns="0" rIns="0" bIns="0" rtlCol="0" anchor="ctr"/>
           <a:lstStyle/>
           <a:p>
-            <a:pPr indent="0" marL="0">
+            <a:pPr marL="0" indent="0">
               <a:lnSpc>
                 <a:spcPts val="1400"/>
               </a:lnSpc>
@@ -11160,7 +11896,7 @@
             <a:prstDash val="solid"/>
           </a:ln>
           <a:effectLst>
-            <a:outerShdw sx="100000" sy="100000" kx="0" ky="0" algn="bl" rotWithShape="0" blurRad="152400" dist="38100" dir="5400000">
+            <a:outerShdw blurRad="152400" dist="38100" dir="5400000" algn="bl" rotWithShape="0">
               <a:srgbClr val="8A6070">
                 <a:alpha val="11000"/>
               </a:srgbClr>
@@ -11209,7 +11945,7 @@
           <a:bodyPr wrap="square" lIns="0" tIns="0" rIns="0" bIns="0" rtlCol="0" anchor="ctr"/>
           <a:lstStyle/>
           <a:p>
-            <a:pPr indent="0" marL="0">
+            <a:pPr marL="0" indent="0">
               <a:buNone/>
             </a:pPr>
             <a:r>
@@ -11248,7 +11984,7 @@
           <a:bodyPr wrap="square" lIns="0" tIns="0" rIns="0" bIns="0" rtlCol="0" anchor="ctr"/>
           <a:lstStyle/>
           <a:p>
-            <a:pPr indent="0" marL="0">
+            <a:pPr marL="0" indent="0">
               <a:lnSpc>
                 <a:spcPts val="1400"/>
               </a:lnSpc>
@@ -11295,7 +12031,7 @@
             <a:prstDash val="solid"/>
           </a:ln>
           <a:effectLst>
-            <a:outerShdw sx="100000" sy="100000" kx="0" ky="0" algn="bl" rotWithShape="0" blurRad="152400" dist="38100" dir="5400000">
+            <a:outerShdw blurRad="152400" dist="38100" dir="5400000" algn="bl" rotWithShape="0">
               <a:srgbClr val="8A6070">
                 <a:alpha val="11000"/>
               </a:srgbClr>
@@ -11344,7 +12080,7 @@
           <a:bodyPr wrap="square" lIns="0" tIns="0" rIns="0" bIns="0" rtlCol="0" anchor="ctr"/>
           <a:lstStyle/>
           <a:p>
-            <a:pPr indent="0" marL="0">
+            <a:pPr marL="0" indent="0">
               <a:buNone/>
             </a:pPr>
             <a:r>
@@ -11383,7 +12119,7 @@
           <a:bodyPr wrap="square" lIns="0" tIns="0" rIns="0" bIns="0" rtlCol="0" anchor="ctr"/>
           <a:lstStyle/>
           <a:p>
-            <a:pPr indent="0" marL="0">
+            <a:pPr marL="0" indent="0">
               <a:lnSpc>
                 <a:spcPts val="1400"/>
               </a:lnSpc>
@@ -11430,7 +12166,7 @@
             <a:prstDash val="solid"/>
           </a:ln>
           <a:effectLst>
-            <a:outerShdw sx="100000" sy="100000" kx="0" ky="0" algn="bl" rotWithShape="0" blurRad="152400" dist="38100" dir="5400000">
+            <a:outerShdw blurRad="152400" dist="38100" dir="5400000" algn="bl" rotWithShape="0">
               <a:srgbClr val="8A6070">
                 <a:alpha val="11000"/>
               </a:srgbClr>
@@ -11479,7 +12215,7 @@
           <a:bodyPr wrap="square" lIns="0" tIns="0" rIns="0" bIns="0" rtlCol="0" anchor="ctr"/>
           <a:lstStyle/>
           <a:p>
-            <a:pPr indent="0" marL="0">
+            <a:pPr marL="0" indent="0">
               <a:buNone/>
             </a:pPr>
             <a:r>
@@ -11518,7 +12254,7 @@
           <a:bodyPr wrap="square" lIns="0" tIns="0" rIns="0" bIns="0" rtlCol="0" anchor="ctr"/>
           <a:lstStyle/>
           <a:p>
-            <a:pPr indent="0" marL="0">
+            <a:pPr marL="0" indent="0">
               <a:lnSpc>
                 <a:spcPts val="1400"/>
               </a:lnSpc>
@@ -11560,7 +12296,7 @@
           <a:bodyPr wrap="square" lIns="0" tIns="0" rIns="0" bIns="0" rtlCol="0" anchor="ctr"/>
           <a:lstStyle/>
           <a:p>
-            <a:pPr indent="0" marL="0">
+            <a:pPr marL="0" indent="0">
               <a:buNone/>
             </a:pPr>
             <a:r>
@@ -11599,7 +12335,7 @@
           <a:bodyPr wrap="square" lIns="0" tIns="0" rIns="0" bIns="0" rtlCol="0" anchor="ctr"/>
           <a:lstStyle/>
           <a:p>
-            <a:pPr indent="0" marL="0">
+            <a:pPr marL="0" indent="0">
               <a:buNone/>
             </a:pPr>
             <a:r>
@@ -11611,7 +12347,18 @@
                 <a:ea typeface="Meiryo" pitchFamily="34" charset="-122"/>
                 <a:cs typeface="Meiryo" pitchFamily="34" charset="-120"/>
               </a:rPr>
-              <a:t>PicoAgent v1.0.2 Beta</a:t>
+              <a:t>PicoAgent </a:t>
+            </a:r>
+            <a:r>
+              <a:rPr lang="en-US" sz="850">
+                <a:solidFill>
+                  <a:srgbClr val="A79AA1"/>
+                </a:solidFill>
+                <a:latin typeface="Meiryo" pitchFamily="34" charset="0"/>
+                <a:ea typeface="Meiryo" pitchFamily="34" charset="-122"/>
+                <a:cs typeface="Meiryo" pitchFamily="34" charset="-120"/>
+              </a:rPr>
+              <a:t>v1.0.2 ALPHA</a:t>
             </a:r>
             <a:endParaRPr lang="en-US" sz="850" dirty="0"/>
           </a:p>
@@ -11638,7 +12385,7 @@
           <a:bodyPr wrap="square" lIns="0" tIns="0" rIns="0" bIns="0" rtlCol="0" anchor="ctr"/>
           <a:lstStyle/>
           <a:p>
-            <a:pPr algn="r" indent="0" marL="0">
+            <a:pPr marL="0" indent="0" algn="r">
               <a:buNone/>
             </a:pPr>
             <a:r>
@@ -11670,7 +12417,7 @@
     <p:bg>
       <p:bgPr>
         <a:blipFill dpi="0" rotWithShape="1">
-          <a:blip r:embed="rId1">
+          <a:blip r:embed="rId3">
             <a:lum/>
           </a:blip>
           <a:srcRect/>
@@ -11716,11 +12463,11 @@
           <a:bodyPr wrap="square" lIns="0" tIns="0" rIns="0" bIns="0" rtlCol="0" anchor="ctr"/>
           <a:lstStyle/>
           <a:p>
-            <a:pPr indent="0" marL="0">
-              <a:buNone/>
-            </a:pPr>
-            <a:r>
-              <a:rPr lang="en-US" sz="1050" b="1" spc="240" kern="0" dirty="0">
+            <a:pPr marL="0" indent="0">
+              <a:buNone/>
+            </a:pPr>
+            <a:r>
+              <a:rPr lang="en-US" sz="1050" b="1" kern="0" spc="240" dirty="0">
                 <a:solidFill>
                   <a:srgbClr val="B54862"/>
                 </a:solidFill>
@@ -11755,7 +12502,7 @@
           <a:bodyPr wrap="square" lIns="0" tIns="0" rIns="0" bIns="0" rtlCol="0" anchor="ctr"/>
           <a:lstStyle/>
           <a:p>
-            <a:pPr indent="0" marL="0">
+            <a:pPr marL="0" indent="0">
               <a:lnSpc>
                 <a:spcPts val="4000"/>
               </a:lnSpc>
@@ -11797,7 +12544,7 @@
           <a:bodyPr wrap="square" lIns="0" tIns="0" rIns="0" bIns="0" rtlCol="0" anchor="ctr"/>
           <a:lstStyle/>
           <a:p>
-            <a:pPr indent="0" marL="0">
+            <a:pPr marL="0" indent="0">
               <a:lnSpc>
                 <a:spcPts val="2100"/>
               </a:lnSpc>
@@ -11839,7 +12586,7 @@
           </a:solidFill>
           <a:ln/>
           <a:effectLst>
-            <a:outerShdw sx="100000" sy="100000" kx="0" ky="0" algn="bl" rotWithShape="0" blurRad="152400" dist="38100" dir="5400000">
+            <a:outerShdw blurRad="152400" dist="38100" dir="5400000" algn="bl" rotWithShape="0">
               <a:srgbClr val="8A6070">
                 <a:alpha val="11000"/>
               </a:srgbClr>
@@ -11890,11 +12637,11 @@
           <a:bodyPr wrap="square" lIns="0" tIns="0" rIns="0" bIns="0" rtlCol="0" anchor="ctr"/>
           <a:lstStyle/>
           <a:p>
-            <a:pPr algn="ctr" indent="0" marL="0">
-              <a:buNone/>
-            </a:pPr>
-            <a:r>
-              <a:rPr lang="en-US" sz="900" b="1" spc="60" kern="0" dirty="0">
+            <a:pPr marL="0" indent="0" algn="ctr">
+              <a:buNone/>
+            </a:pPr>
+            <a:r>
+              <a:rPr lang="en-US" sz="900" b="1" kern="0" spc="60" dirty="0">
                 <a:solidFill>
                   <a:srgbClr val="FFFFFF"/>
                 </a:solidFill>
@@ -11929,7 +12676,7 @@
           <a:bodyPr wrap="square" lIns="0" tIns="0" rIns="0" bIns="0" rtlCol="0" anchor="ctr"/>
           <a:lstStyle/>
           <a:p>
-            <a:pPr indent="0" marL="0">
+            <a:pPr marL="0" indent="0">
               <a:buNone/>
             </a:pPr>
             <a:r>
@@ -11968,7 +12715,7 @@
           <a:bodyPr wrap="square" lIns="0" tIns="0" rIns="0" bIns="0" rtlCol="0" anchor="ctr"/>
           <a:lstStyle/>
           <a:p>
-            <a:pPr indent="0" marL="0">
+            <a:pPr marL="0" indent="0">
               <a:lnSpc>
                 <a:spcPts val="1900"/>
               </a:lnSpc>
@@ -12010,7 +12757,7 @@
           <a:bodyPr wrap="square" lIns="0" tIns="0" rIns="0" bIns="0" rtlCol="0" anchor="ctr"/>
           <a:lstStyle/>
           <a:p>
-            <a:pPr indent="0" marL="0">
+            <a:pPr marL="0" indent="0">
               <a:buNone/>
             </a:pPr>
             <a:r>
@@ -12049,7 +12796,7 @@
           <a:bodyPr wrap="square" lIns="0" tIns="0" rIns="0" bIns="0" rtlCol="0" anchor="ctr"/>
           <a:lstStyle/>
           <a:p>
-            <a:pPr indent="0" marL="0">
+            <a:pPr marL="0" indent="0">
               <a:buNone/>
             </a:pPr>
             <a:r>
@@ -12088,7 +12835,7 @@
           <a:bodyPr wrap="square" lIns="0" tIns="0" rIns="0" bIns="0" rtlCol="0" anchor="ctr"/>
           <a:lstStyle/>
           <a:p>
-            <a:pPr indent="0" marL="0">
+            <a:pPr marL="0" indent="0">
               <a:buNone/>
             </a:pPr>
             <a:r>
@@ -12127,7 +12874,7 @@
           <a:bodyPr wrap="square" lIns="0" tIns="0" rIns="0" bIns="0" rtlCol="0" anchor="ctr"/>
           <a:lstStyle/>
           <a:p>
-            <a:pPr indent="0" marL="0">
+            <a:pPr marL="0" indent="0">
               <a:buNone/>
             </a:pPr>
             <a:r>
@@ -12166,7 +12913,7 @@
           <a:bodyPr wrap="square" lIns="0" tIns="0" rIns="0" bIns="0" rtlCol="0" anchor="ctr"/>
           <a:lstStyle/>
           <a:p>
-            <a:pPr indent="0" marL="0">
+            <a:pPr marL="0" indent="0">
               <a:buNone/>
             </a:pPr>
             <a:r>
@@ -12205,7 +12952,7 @@
           <a:bodyPr wrap="square" lIns="0" tIns="0" rIns="0" bIns="0" rtlCol="0" anchor="ctr"/>
           <a:lstStyle/>
           <a:p>
-            <a:pPr indent="0" marL="0">
+            <a:pPr marL="0" indent="0">
               <a:buNone/>
             </a:pPr>
             <a:r>
@@ -12249,7 +12996,7 @@
             <a:prstDash val="solid"/>
           </a:ln>
           <a:effectLst>
-            <a:outerShdw sx="100000" sy="100000" kx="0" ky="0" algn="bl" rotWithShape="0" blurRad="152400" dist="38100" dir="5400000">
+            <a:outerShdw blurRad="152400" dist="38100" dir="5400000" algn="bl" rotWithShape="0">
               <a:srgbClr val="8A6070">
                 <a:alpha val="11000"/>
               </a:srgbClr>
@@ -12300,11 +13047,11 @@
           <a:bodyPr wrap="square" lIns="0" tIns="0" rIns="0" bIns="0" rtlCol="0" anchor="ctr"/>
           <a:lstStyle/>
           <a:p>
-            <a:pPr algn="ctr" indent="0" marL="0">
-              <a:buNone/>
-            </a:pPr>
-            <a:r>
-              <a:rPr lang="en-US" sz="850" b="1" spc="60" kern="0" dirty="0">
+            <a:pPr marL="0" indent="0" algn="ctr">
+              <a:buNone/>
+            </a:pPr>
+            <a:r>
+              <a:rPr lang="en-US" sz="850" b="1" kern="0" spc="60" dirty="0">
                 <a:solidFill>
                   <a:srgbClr val="6FB39C"/>
                 </a:solidFill>
@@ -12339,7 +13086,7 @@
           <a:bodyPr wrap="square" lIns="0" tIns="0" rIns="0" bIns="0" rtlCol="0" anchor="ctr"/>
           <a:lstStyle/>
           <a:p>
-            <a:pPr indent="0" marL="0">
+            <a:pPr marL="0" indent="0">
               <a:buNone/>
             </a:pPr>
             <a:r>
@@ -12378,7 +13125,7 @@
           <a:bodyPr wrap="square" lIns="0" tIns="0" rIns="0" bIns="0" rtlCol="0" anchor="ctr"/>
           <a:lstStyle/>
           <a:p>
-            <a:pPr indent="0" marL="0">
+            <a:pPr marL="0" indent="0">
               <a:lnSpc>
                 <a:spcPts val="1900"/>
               </a:lnSpc>
@@ -12425,7 +13172,7 @@
             <a:prstDash val="solid"/>
           </a:ln>
           <a:effectLst>
-            <a:outerShdw sx="100000" sy="100000" kx="0" ky="0" algn="bl" rotWithShape="0" blurRad="152400" dist="38100" dir="5400000">
+            <a:outerShdw blurRad="152400" dist="38100" dir="5400000" algn="bl" rotWithShape="0">
               <a:srgbClr val="8A6070">
                 <a:alpha val="11000"/>
               </a:srgbClr>
@@ -12476,11 +13223,11 @@
           <a:bodyPr wrap="square" lIns="0" tIns="0" rIns="0" bIns="0" rtlCol="0" anchor="ctr"/>
           <a:lstStyle/>
           <a:p>
-            <a:pPr algn="ctr" indent="0" marL="0">
-              <a:buNone/>
-            </a:pPr>
-            <a:r>
-              <a:rPr lang="en-US" sz="850" b="1" spc="60" kern="0" dirty="0">
+            <a:pPr marL="0" indent="0" algn="ctr">
+              <a:buNone/>
+            </a:pPr>
+            <a:r>
+              <a:rPr lang="en-US" sz="850" b="1" kern="0" spc="60">
                 <a:solidFill>
                   <a:srgbClr val="8F80C9"/>
                 </a:solidFill>
@@ -12488,7 +13235,7 @@
                 <a:ea typeface="Meiryo" pitchFamily="34" charset="-122"/>
                 <a:cs typeface="Meiryo" pitchFamily="34" charset="-120"/>
               </a:rPr>
-              <a:t>CLOUD（任意）</a:t>
+              <a:t>AI / CLI</a:t>
             </a:r>
             <a:endParaRPr lang="en-US" sz="850" dirty="0"/>
           </a:p>
@@ -12515,11 +13262,11 @@
           <a:bodyPr wrap="square" lIns="0" tIns="0" rIns="0" bIns="0" rtlCol="0" anchor="ctr"/>
           <a:lstStyle/>
           <a:p>
-            <a:pPr indent="0" marL="0">
-              <a:buNone/>
-            </a:pPr>
-            <a:r>
-              <a:rPr lang="en-US" sz="1900" b="1" dirty="0">
+            <a:pPr marL="0" indent="0">
+              <a:buNone/>
+            </a:pPr>
+            <a:r>
+              <a:rPr lang="ja-JP" altLang="en-US" sz="1900" b="1">
                 <a:solidFill>
                   <a:srgbClr val="292B3D"/>
                 </a:solidFill>
@@ -12527,7 +13274,18 @@
                 <a:ea typeface="Yu Gothic" pitchFamily="34" charset="-122"/>
                 <a:cs typeface="Yu Gothic" pitchFamily="34" charset="-120"/>
               </a:rPr>
-              <a:t>主要クラウドAI</a:t>
+              <a:t>外部</a:t>
+            </a:r>
+            <a:r>
+              <a:rPr lang="en-US" sz="1900" b="1">
+                <a:solidFill>
+                  <a:srgbClr val="292B3D"/>
+                </a:solidFill>
+                <a:latin typeface="Yu Gothic" pitchFamily="34" charset="0"/>
+                <a:ea typeface="Yu Gothic" pitchFamily="34" charset="-122"/>
+                <a:cs typeface="Yu Gothic" pitchFamily="34" charset="-120"/>
+              </a:rPr>
+              <a:t>AI・CLI</a:t>
             </a:r>
             <a:endParaRPr lang="en-US" sz="1900" dirty="0"/>
           </a:p>
@@ -12554,14 +13312,14 @@
           <a:bodyPr wrap="square" lIns="0" tIns="0" rIns="0" bIns="0" rtlCol="0" anchor="ctr"/>
           <a:lstStyle/>
           <a:p>
-            <a:pPr indent="0" marL="0">
+            <a:pPr marL="0" indent="0">
               <a:lnSpc>
                 <a:spcPts val="1800"/>
               </a:lnSpc>
               <a:buNone/>
             </a:pPr>
             <a:r>
-              <a:rPr lang="en-US" sz="1100" dirty="0">
+              <a:rPr lang="en-US" altLang="ja-JP" sz="1100">
                 <a:solidFill>
                   <a:srgbClr val="686A7D"/>
                 </a:solidFill>
@@ -12569,7 +13327,238 @@
                 <a:ea typeface="Meiryo" pitchFamily="34" charset="-122"/>
                 <a:cs typeface="Meiryo" pitchFamily="34" charset="-120"/>
               </a:rPr>
-              <a:t>OpenAI・Anthropic（Claude）・Google Gemini・DeepSeek・xAI・Mistral、およびOpenAI互換API。APIキーはWindowsでは暗号化して保存します。各社の利用料が発生します。</a:t>
+              <a:t>OpenAI</a:t>
+            </a:r>
+            <a:r>
+              <a:rPr lang="ja-JP" altLang="en-US" sz="1100">
+                <a:solidFill>
+                  <a:srgbClr val="686A7D"/>
+                </a:solidFill>
+                <a:latin typeface="Meiryo" pitchFamily="34" charset="0"/>
+                <a:ea typeface="Meiryo" pitchFamily="34" charset="-122"/>
+                <a:cs typeface="Meiryo" pitchFamily="34" charset="-120"/>
+              </a:rPr>
+              <a:t>・</a:t>
+            </a:r>
+            <a:r>
+              <a:rPr lang="en-US" altLang="ja-JP" sz="1100">
+                <a:solidFill>
+                  <a:srgbClr val="686A7D"/>
+                </a:solidFill>
+                <a:latin typeface="Meiryo" pitchFamily="34" charset="0"/>
+                <a:ea typeface="Meiryo" pitchFamily="34" charset="-122"/>
+                <a:cs typeface="Meiryo" pitchFamily="34" charset="-120"/>
+              </a:rPr>
+              <a:t>Claude</a:t>
+            </a:r>
+            <a:r>
+              <a:rPr lang="ja-JP" altLang="en-US" sz="1100">
+                <a:solidFill>
+                  <a:srgbClr val="686A7D"/>
+                </a:solidFill>
+                <a:latin typeface="Meiryo" pitchFamily="34" charset="0"/>
+                <a:ea typeface="Meiryo" pitchFamily="34" charset="-122"/>
+                <a:cs typeface="Meiryo" pitchFamily="34" charset="-120"/>
+              </a:rPr>
+              <a:t>・</a:t>
+            </a:r>
+            <a:r>
+              <a:rPr lang="en-US" altLang="ja-JP" sz="1100">
+                <a:solidFill>
+                  <a:srgbClr val="686A7D"/>
+                </a:solidFill>
+                <a:latin typeface="Meiryo" pitchFamily="34" charset="0"/>
+                <a:ea typeface="Meiryo" pitchFamily="34" charset="-122"/>
+                <a:cs typeface="Meiryo" pitchFamily="34" charset="-120"/>
+              </a:rPr>
+              <a:t>Gemini</a:t>
+            </a:r>
+            <a:r>
+              <a:rPr lang="ja-JP" altLang="en-US" sz="1100">
+                <a:solidFill>
+                  <a:srgbClr val="686A7D"/>
+                </a:solidFill>
+                <a:latin typeface="Meiryo" pitchFamily="34" charset="0"/>
+                <a:ea typeface="Meiryo" pitchFamily="34" charset="-122"/>
+                <a:cs typeface="Meiryo" pitchFamily="34" charset="-120"/>
+              </a:rPr>
+              <a:t>・</a:t>
+            </a:r>
+            <a:r>
+              <a:rPr lang="en-US" altLang="ja-JP" sz="1100">
+                <a:solidFill>
+                  <a:srgbClr val="686A7D"/>
+                </a:solidFill>
+                <a:latin typeface="Meiryo" pitchFamily="34" charset="0"/>
+                <a:ea typeface="Meiryo" pitchFamily="34" charset="-122"/>
+                <a:cs typeface="Meiryo" pitchFamily="34" charset="-120"/>
+              </a:rPr>
+              <a:t>DeepSeek</a:t>
+            </a:r>
+            <a:r>
+              <a:rPr lang="ja-JP" altLang="en-US" sz="1100">
+                <a:solidFill>
+                  <a:srgbClr val="686A7D"/>
+                </a:solidFill>
+                <a:latin typeface="Meiryo" pitchFamily="34" charset="0"/>
+                <a:ea typeface="Meiryo" pitchFamily="34" charset="-122"/>
+                <a:cs typeface="Meiryo" pitchFamily="34" charset="-120"/>
+              </a:rPr>
+              <a:t>・</a:t>
+            </a:r>
+            <a:r>
+              <a:rPr lang="en-US" altLang="ja-JP" sz="1100">
+                <a:solidFill>
+                  <a:srgbClr val="686A7D"/>
+                </a:solidFill>
+                <a:latin typeface="Meiryo" pitchFamily="34" charset="0"/>
+                <a:ea typeface="Meiryo" pitchFamily="34" charset="-122"/>
+                <a:cs typeface="Meiryo" pitchFamily="34" charset="-120"/>
+              </a:rPr>
+              <a:t>xAI</a:t>
+            </a:r>
+            <a:r>
+              <a:rPr lang="ja-JP" altLang="en-US" sz="1100">
+                <a:solidFill>
+                  <a:srgbClr val="686A7D"/>
+                </a:solidFill>
+                <a:latin typeface="Meiryo" pitchFamily="34" charset="0"/>
+                <a:ea typeface="Meiryo" pitchFamily="34" charset="-122"/>
+                <a:cs typeface="Meiryo" pitchFamily="34" charset="-120"/>
+              </a:rPr>
+              <a:t>・</a:t>
+            </a:r>
+            <a:r>
+              <a:rPr lang="en-US" altLang="ja-JP" sz="1100">
+                <a:solidFill>
+                  <a:srgbClr val="686A7D"/>
+                </a:solidFill>
+                <a:latin typeface="Meiryo" pitchFamily="34" charset="0"/>
+                <a:ea typeface="Meiryo" pitchFamily="34" charset="-122"/>
+                <a:cs typeface="Meiryo" pitchFamily="34" charset="-120"/>
+              </a:rPr>
+              <a:t>Mistral</a:t>
+            </a:r>
+            <a:r>
+              <a:rPr lang="ja-JP" altLang="en-US" sz="1100">
+                <a:solidFill>
+                  <a:srgbClr val="686A7D"/>
+                </a:solidFill>
+                <a:latin typeface="Meiryo" pitchFamily="34" charset="0"/>
+                <a:ea typeface="Meiryo" pitchFamily="34" charset="-122"/>
+                <a:cs typeface="Meiryo" pitchFamily="34" charset="-120"/>
+              </a:rPr>
+              <a:t>・</a:t>
+            </a:r>
+            <a:r>
+              <a:rPr lang="en-US" altLang="ja-JP" sz="1100">
+                <a:solidFill>
+                  <a:srgbClr val="686A7D"/>
+                </a:solidFill>
+                <a:latin typeface="Meiryo" pitchFamily="34" charset="0"/>
+                <a:ea typeface="Meiryo" pitchFamily="34" charset="-122"/>
+                <a:cs typeface="Meiryo" pitchFamily="34" charset="-120"/>
+              </a:rPr>
+              <a:t>OpenAI</a:t>
+            </a:r>
+            <a:r>
+              <a:rPr lang="ja-JP" altLang="en-US" sz="1100">
+                <a:solidFill>
+                  <a:srgbClr val="686A7D"/>
+                </a:solidFill>
+                <a:latin typeface="Meiryo" pitchFamily="34" charset="0"/>
+                <a:ea typeface="Meiryo" pitchFamily="34" charset="-122"/>
+                <a:cs typeface="Meiryo" pitchFamily="34" charset="-120"/>
+              </a:rPr>
+              <a:t>互換</a:t>
+            </a:r>
+            <a:r>
+              <a:rPr lang="en-US" altLang="ja-JP" sz="1100">
+                <a:solidFill>
+                  <a:srgbClr val="686A7D"/>
+                </a:solidFill>
+                <a:latin typeface="Meiryo" pitchFamily="34" charset="0"/>
+                <a:ea typeface="Meiryo" pitchFamily="34" charset="-122"/>
+                <a:cs typeface="Meiryo" pitchFamily="34" charset="-120"/>
+              </a:rPr>
+              <a:t>API</a:t>
+            </a:r>
+            <a:r>
+              <a:rPr lang="ja-JP" altLang="en-US" sz="1100">
+                <a:solidFill>
+                  <a:srgbClr val="686A7D"/>
+                </a:solidFill>
+                <a:latin typeface="Meiryo" pitchFamily="34" charset="0"/>
+                <a:ea typeface="Meiryo" pitchFamily="34" charset="-122"/>
+                <a:cs typeface="Meiryo" pitchFamily="34" charset="-120"/>
+              </a:rPr>
+              <a:t>。</a:t>
+            </a:r>
+            <a:r>
+              <a:rPr lang="en-US" altLang="ja-JP" sz="1100">
+                <a:solidFill>
+                  <a:srgbClr val="686A7D"/>
+                </a:solidFill>
+                <a:latin typeface="Meiryo" pitchFamily="34" charset="0"/>
+                <a:ea typeface="Meiryo" pitchFamily="34" charset="-122"/>
+                <a:cs typeface="Meiryo" pitchFamily="34" charset="-120"/>
+              </a:rPr>
+              <a:t>Claude Code</a:t>
+            </a:r>
+            <a:r>
+              <a:rPr lang="ja-JP" altLang="en-US" sz="1100">
+                <a:solidFill>
+                  <a:srgbClr val="686A7D"/>
+                </a:solidFill>
+                <a:latin typeface="Meiryo" pitchFamily="34" charset="0"/>
+                <a:ea typeface="Meiryo" pitchFamily="34" charset="-122"/>
+                <a:cs typeface="Meiryo" pitchFamily="34" charset="-120"/>
+              </a:rPr>
+              <a:t>／</a:t>
+            </a:r>
+            <a:r>
+              <a:rPr lang="en-US" altLang="ja-JP" sz="1100">
+                <a:solidFill>
+                  <a:srgbClr val="686A7D"/>
+                </a:solidFill>
+                <a:latin typeface="Meiryo" pitchFamily="34" charset="0"/>
+                <a:ea typeface="Meiryo" pitchFamily="34" charset="-122"/>
+                <a:cs typeface="Meiryo" pitchFamily="34" charset="-120"/>
+              </a:rPr>
+              <a:t>Codex CLI</a:t>
+            </a:r>
+            <a:r>
+              <a:rPr lang="ja-JP" altLang="en-US" sz="1100">
+                <a:solidFill>
+                  <a:srgbClr val="686A7D"/>
+                </a:solidFill>
+                <a:latin typeface="Meiryo" pitchFamily="34" charset="0"/>
+                <a:ea typeface="Meiryo" pitchFamily="34" charset="-122"/>
+                <a:cs typeface="Meiryo" pitchFamily="34" charset="-120"/>
+              </a:rPr>
+              <a:t>も指定できます。外部</a:t>
+            </a:r>
+            <a:r>
+              <a:rPr lang="en-US" altLang="ja-JP" sz="1100">
+                <a:solidFill>
+                  <a:srgbClr val="686A7D"/>
+                </a:solidFill>
+                <a:latin typeface="Meiryo" pitchFamily="34" charset="0"/>
+                <a:ea typeface="Meiryo" pitchFamily="34" charset="-122"/>
+                <a:cs typeface="Meiryo" pitchFamily="34" charset="-120"/>
+              </a:rPr>
+              <a:t>AI</a:t>
+            </a:r>
+            <a:r>
+              <a:rPr lang="ja-JP" altLang="en-US" sz="1100">
+                <a:solidFill>
+                  <a:srgbClr val="686A7D"/>
+                </a:solidFill>
+                <a:latin typeface="Meiryo" pitchFamily="34" charset="0"/>
+                <a:ea typeface="Meiryo" pitchFamily="34" charset="-122"/>
+                <a:cs typeface="Meiryo" pitchFamily="34" charset="-120"/>
+              </a:rPr>
+              <a:t>の利用料・各サービスの条件が適用されます。</a:t>
             </a:r>
             <a:endParaRPr lang="en-US" sz="1100" dirty="0"/>
           </a:p>
@@ -12596,7 +13585,7 @@
           <a:bodyPr wrap="square" lIns="0" tIns="0" rIns="0" bIns="0" rtlCol="0" anchor="ctr"/>
           <a:lstStyle/>
           <a:p>
-            <a:pPr indent="0" marL="0">
+            <a:pPr marL="0" indent="0">
               <a:buNone/>
             </a:pPr>
             <a:r>
@@ -12608,7 +13597,18 @@
                 <a:ea typeface="Meiryo" pitchFamily="34" charset="-122"/>
                 <a:cs typeface="Meiryo" pitchFamily="34" charset="-120"/>
               </a:rPr>
-              <a:t>PicoAgent v1.0.2 Beta</a:t>
+              <a:t>PicoAgent </a:t>
+            </a:r>
+            <a:r>
+              <a:rPr lang="en-US" sz="850">
+                <a:solidFill>
+                  <a:srgbClr val="A79AA1"/>
+                </a:solidFill>
+                <a:latin typeface="Meiryo" pitchFamily="34" charset="0"/>
+                <a:ea typeface="Meiryo" pitchFamily="34" charset="-122"/>
+                <a:cs typeface="Meiryo" pitchFamily="34" charset="-120"/>
+              </a:rPr>
+              <a:t>v1.0.2 ALPHA</a:t>
             </a:r>
             <a:endParaRPr lang="en-US" sz="850" dirty="0"/>
           </a:p>
@@ -12635,7 +13635,7 @@
           <a:bodyPr wrap="square" lIns="0" tIns="0" rIns="0" bIns="0" rtlCol="0" anchor="ctr"/>
           <a:lstStyle/>
           <a:p>
-            <a:pPr algn="r" indent="0" marL="0">
+            <a:pPr marL="0" indent="0" algn="r">
               <a:buNone/>
             </a:pPr>
             <a:r>
@@ -12667,7 +13667,7 @@
     <p:bg>
       <p:bgPr>
         <a:blipFill dpi="0" rotWithShape="1">
-          <a:blip r:embed="rId1">
+          <a:blip r:embed="rId3">
             <a:lum/>
           </a:blip>
           <a:srcRect/>
@@ -12713,11 +13713,11 @@
           <a:bodyPr wrap="square" lIns="0" tIns="0" rIns="0" bIns="0" rtlCol="0" anchor="ctr"/>
           <a:lstStyle/>
           <a:p>
-            <a:pPr indent="0" marL="0">
-              <a:buNone/>
-            </a:pPr>
-            <a:r>
-              <a:rPr lang="en-US" sz="1050" b="1" spc="240" kern="0" dirty="0">
+            <a:pPr marL="0" indent="0">
+              <a:buNone/>
+            </a:pPr>
+            <a:r>
+              <a:rPr lang="en-US" sz="1050" b="1" kern="0" spc="240" dirty="0">
                 <a:solidFill>
                   <a:srgbClr val="B54862"/>
                 </a:solidFill>
@@ -12752,7 +13752,7 @@
           <a:bodyPr wrap="square" lIns="0" tIns="0" rIns="0" bIns="0" rtlCol="0" anchor="ctr"/>
           <a:lstStyle/>
           <a:p>
-            <a:pPr indent="0" marL="0">
+            <a:pPr marL="0" indent="0">
               <a:lnSpc>
                 <a:spcPts val="4400"/>
               </a:lnSpc>
@@ -12772,7 +13772,7 @@
             <a:endParaRPr lang="en-US" sz="3200" dirty="0"/>
           </a:p>
           <a:p>
-            <a:pPr indent="0" marL="0">
+            <a:pPr marL="0" indent="0">
               <a:lnSpc>
                 <a:spcPts val="4400"/>
               </a:lnSpc>
@@ -12834,7 +13834,7 @@
           <a:bodyPr wrap="square" lIns="0" tIns="0" rIns="0" bIns="0" rtlCol="0" anchor="ctr"/>
           <a:lstStyle/>
           <a:p>
-            <a:pPr algn="ctr" indent="0" marL="0">
+            <a:pPr marL="0" indent="0" algn="ctr">
               <a:buNone/>
             </a:pPr>
             <a:r>
@@ -12873,7 +13873,7 @@
           <a:bodyPr wrap="square" lIns="0" tIns="0" rIns="0" bIns="0" rtlCol="0" anchor="ctr"/>
           <a:lstStyle/>
           <a:p>
-            <a:pPr indent="0" marL="0">
+            <a:pPr marL="0" indent="0">
               <a:buNone/>
             </a:pPr>
             <a:r>
@@ -12912,7 +13912,7 @@
           <a:bodyPr wrap="square" lIns="0" tIns="0" rIns="0" bIns="0" rtlCol="0" anchor="ctr"/>
           <a:lstStyle/>
           <a:p>
-            <a:pPr indent="0" marL="0">
+            <a:pPr marL="0" indent="0">
               <a:lnSpc>
                 <a:spcPts val="1900"/>
               </a:lnSpc>
@@ -12974,7 +13974,7 @@
           <a:bodyPr wrap="square" lIns="0" tIns="0" rIns="0" bIns="0" rtlCol="0" anchor="ctr"/>
           <a:lstStyle/>
           <a:p>
-            <a:pPr algn="ctr" indent="0" marL="0">
+            <a:pPr marL="0" indent="0" algn="ctr">
               <a:buNone/>
             </a:pPr>
             <a:r>
@@ -13013,7 +14013,7 @@
           <a:bodyPr wrap="square" lIns="0" tIns="0" rIns="0" bIns="0" rtlCol="0" anchor="ctr"/>
           <a:lstStyle/>
           <a:p>
-            <a:pPr indent="0" marL="0">
+            <a:pPr marL="0" indent="0">
               <a:buNone/>
             </a:pPr>
             <a:r>
@@ -13052,7 +14052,7 @@
           <a:bodyPr wrap="square" lIns="0" tIns="0" rIns="0" bIns="0" rtlCol="0" anchor="ctr"/>
           <a:lstStyle/>
           <a:p>
-            <a:pPr indent="0" marL="0">
+            <a:pPr marL="0" indent="0">
               <a:lnSpc>
                 <a:spcPts val="1900"/>
               </a:lnSpc>
@@ -13114,7 +14114,7 @@
           <a:bodyPr wrap="square" lIns="0" tIns="0" rIns="0" bIns="0" rtlCol="0" anchor="ctr"/>
           <a:lstStyle/>
           <a:p>
-            <a:pPr algn="ctr" indent="0" marL="0">
+            <a:pPr marL="0" indent="0" algn="ctr">
               <a:buNone/>
             </a:pPr>
             <a:r>
@@ -13153,7 +14153,7 @@
           <a:bodyPr wrap="square" lIns="0" tIns="0" rIns="0" bIns="0" rtlCol="0" anchor="ctr"/>
           <a:lstStyle/>
           <a:p>
-            <a:pPr indent="0" marL="0">
+            <a:pPr marL="0" indent="0">
               <a:buNone/>
             </a:pPr>
             <a:r>
@@ -13192,7 +14192,7 @@
           <a:bodyPr wrap="square" lIns="0" tIns="0" rIns="0" bIns="0" rtlCol="0" anchor="ctr"/>
           <a:lstStyle/>
           <a:p>
-            <a:pPr indent="0" marL="0">
+            <a:pPr marL="0" indent="0">
               <a:lnSpc>
                 <a:spcPts val="1900"/>
               </a:lnSpc>
@@ -13237,14 +14237,14 @@
       </p:sp>
       <p:pic>
         <p:nvPicPr>
-          <p:cNvPr id="17" name="Image 0" descr="/tmp/claude-0/-home-user-PicoAgent/7130734a-69b9-54b3-90f7-bb7bb9043f8d/scratchpad/deck/img/flat-face-mugi-pink.jpg">    </p:cNvPr>
+          <p:cNvPr id="17" name="Image 0" descr="/tmp/claude-0/-home-user-PicoAgent/7130734a-69b9-54b3-90f7-bb7bb9043f8d/scratchpad/deck/img/flat-face-mugi-pink.jpg"/>
           <p:cNvPicPr>
             <a:picLocks noChangeAspect="1"/>
           </p:cNvPicPr>
           <p:nvPr/>
         </p:nvPicPr>
         <p:blipFill>
-          <a:blip r:embed="rId2"/>
+          <a:blip r:embed="rId4"/>
           <a:stretch>
             <a:fillRect/>
           </a:stretch>
@@ -13280,7 +14280,7 @@
           <a:bodyPr wrap="square" lIns="0" tIns="0" rIns="0" bIns="0" rtlCol="0" anchor="ctr"/>
           <a:lstStyle/>
           <a:p>
-            <a:pPr algn="ctr" indent="0" marL="0">
+            <a:pPr marL="0" indent="0" algn="ctr">
               <a:lnSpc>
                 <a:spcPts val="1700"/>
               </a:lnSpc>
@@ -13322,7 +14322,7 @@
           <a:bodyPr wrap="square" lIns="0" tIns="0" rIns="0" bIns="0" rtlCol="0" anchor="ctr"/>
           <a:lstStyle/>
           <a:p>
-            <a:pPr indent="0" marL="0">
+            <a:pPr marL="0" indent="0">
               <a:buNone/>
             </a:pPr>
             <a:r>
@@ -13334,7 +14334,18 @@
                 <a:ea typeface="Meiryo" pitchFamily="34" charset="-122"/>
                 <a:cs typeface="Meiryo" pitchFamily="34" charset="-120"/>
               </a:rPr>
-              <a:t>PicoAgent v1.0.2 Beta</a:t>
+              <a:t>PicoAgent </a:t>
+            </a:r>
+            <a:r>
+              <a:rPr lang="en-US" sz="850">
+                <a:solidFill>
+                  <a:srgbClr val="A79AA1"/>
+                </a:solidFill>
+                <a:latin typeface="Meiryo" pitchFamily="34" charset="0"/>
+                <a:ea typeface="Meiryo" pitchFamily="34" charset="-122"/>
+                <a:cs typeface="Meiryo" pitchFamily="34" charset="-120"/>
+              </a:rPr>
+              <a:t>v1.0.2 ALPHA</a:t>
             </a:r>
             <a:endParaRPr lang="en-US" sz="850" dirty="0"/>
           </a:p>
@@ -13361,7 +14372,7 @@
           <a:bodyPr wrap="square" lIns="0" tIns="0" rIns="0" bIns="0" rtlCol="0" anchor="ctr"/>
           <a:lstStyle/>
           <a:p>
-            <a:pPr algn="r" indent="0" marL="0">
+            <a:pPr marL="0" indent="0" algn="r">
               <a:buNone/>
             </a:pPr>
             <a:r>
@@ -13393,7 +14404,7 @@
     <p:bg>
       <p:bgPr>
         <a:blipFill dpi="0" rotWithShape="1">
-          <a:blip r:embed="rId1">
+          <a:blip r:embed="rId3">
             <a:lum/>
           </a:blip>
           <a:srcRect/>
@@ -13439,11 +14450,11 @@
           <a:bodyPr wrap="square" lIns="0" tIns="0" rIns="0" bIns="0" rtlCol="0" anchor="ctr"/>
           <a:lstStyle/>
           <a:p>
-            <a:pPr indent="0" marL="0">
-              <a:buNone/>
-            </a:pPr>
-            <a:r>
-              <a:rPr lang="en-US" sz="1050" b="1" spc="240" kern="0" dirty="0">
+            <a:pPr marL="0" indent="0">
+              <a:buNone/>
+            </a:pPr>
+            <a:r>
+              <a:rPr lang="en-US" sz="1050" b="1" kern="0" spc="240" dirty="0">
                 <a:solidFill>
                   <a:srgbClr val="B54862"/>
                 </a:solidFill>
@@ -13478,7 +14489,7 @@
           <a:bodyPr wrap="square" lIns="0" tIns="0" rIns="0" bIns="0" rtlCol="0" anchor="ctr"/>
           <a:lstStyle/>
           <a:p>
-            <a:pPr indent="0" marL="0">
+            <a:pPr marL="0" indent="0">
               <a:lnSpc>
                 <a:spcPts val="4000"/>
               </a:lnSpc>
@@ -13520,13 +14531,35 @@
           <a:bodyPr wrap="square" lIns="0" tIns="0" rIns="0" bIns="0" rtlCol="0" anchor="ctr"/>
           <a:lstStyle/>
           <a:p>
-            <a:pPr indent="0" marL="0">
+            <a:pPr marL="0" indent="0">
               <a:lnSpc>
                 <a:spcPts val="2100"/>
               </a:lnSpc>
               <a:buNone/>
             </a:pPr>
             <a:r>
+              <a:rPr lang="ja-JP" altLang="en-US" sz="1250">
+                <a:solidFill>
+                  <a:srgbClr val="686A7D"/>
+                </a:solidFill>
+                <a:latin typeface="Meiryo" pitchFamily="34" charset="0"/>
+                <a:ea typeface="Meiryo" pitchFamily="34" charset="-122"/>
+                <a:cs typeface="Meiryo" pitchFamily="34" charset="-120"/>
+              </a:rPr>
+              <a:t>アルファ</a:t>
+            </a:r>
+            <a:r>
+              <a:rPr lang="en-US" sz="1250">
+                <a:solidFill>
+                  <a:srgbClr val="686A7D"/>
+                </a:solidFill>
+                <a:latin typeface="Meiryo" pitchFamily="34" charset="0"/>
+                <a:ea typeface="Meiryo" pitchFamily="34" charset="-122"/>
+                <a:cs typeface="Meiryo" pitchFamily="34" charset="-120"/>
+              </a:rPr>
+              <a:t>版に付属する</a:t>
+            </a:r>
+            <a:r>
               <a:rPr lang="en-US" sz="1250" dirty="0">
                 <a:solidFill>
                   <a:srgbClr val="686A7D"/>
@@ -13535,7 +14568,7 @@
                 <a:ea typeface="Meiryo" pitchFamily="34" charset="-122"/>
                 <a:cs typeface="Meiryo" pitchFamily="34" charset="-120"/>
               </a:rPr>
-              <a:t>ベータ版に付属する2Dキャラは、まばたき、口パク、視線、喜び／悲しみ、待機モーションに対応しています。</a:t>
+              <a:t>2Dキャラは、まばたき、口パク、視線、喜び／悲しみ、待機モーションに対応しています。</a:t>
             </a:r>
             <a:endParaRPr lang="en-US" sz="1250" dirty="0"/>
           </a:p>
@@ -13565,255 +14598,7 @@
       </p:sp>
       <p:pic>
         <p:nvPicPr>
-          <p:cNvPr id="6" name="Image 0" descr="/tmp/claude-0/-home-user-PicoAgent/7130734a-69b9-54b3-90f7-bb7bb9043f8d/scratchpad/deck/img/flat-face-mugi.jpg">    </p:cNvPr>
-          <p:cNvPicPr>
-            <a:picLocks noChangeAspect="1"/>
-          </p:cNvPicPr>
-          <p:nvPr/>
-        </p:nvPicPr>
-        <p:blipFill>
-          <a:blip r:embed="rId2"/>
-          <a:stretch>
-            <a:fillRect/>
-          </a:stretch>
-        </p:blipFill>
-        <p:spPr>
-          <a:xfrm>
-            <a:off x="1408176" y="2286000"/>
-            <a:ext cx="996696" cy="1225296"/>
-          </a:xfrm>
-          <a:prstGeom prst="rect">
-            <a:avLst/>
-          </a:prstGeom>
-        </p:spPr>
-      </p:pic>
-      <p:sp>
-        <p:nvSpPr>
-          <p:cNvPr id="7" name="Text 4"/>
-          <p:cNvSpPr/>
-          <p:nvPr/>
-        </p:nvSpPr>
-        <p:spPr>
-          <a:xfrm>
-            <a:off x="713232" y="3493008"/>
-            <a:ext cx="2395728" cy="274320"/>
-          </a:xfrm>
-          <a:prstGeom prst="rect">
-            <a:avLst/>
-          </a:prstGeom>
-          <a:noFill/>
-          <a:ln/>
-        </p:spPr>
-        <p:txBody>
-          <a:bodyPr wrap="square" lIns="0" tIns="0" rIns="0" bIns="0" rtlCol="0" anchor="ctr"/>
-          <a:lstStyle/>
-          <a:p>
-            <a:pPr algn="ctr" indent="0" marL="0">
-              <a:buNone/>
-            </a:pPr>
-            <a:r>
-              <a:rPr lang="en-US" sz="1400" b="1" dirty="0">
-                <a:solidFill>
-                  <a:srgbClr val="292B3D"/>
-                </a:solidFill>
-                <a:latin typeface="Yu Gothic" pitchFamily="34" charset="0"/>
-                <a:ea typeface="Yu Gothic" pitchFamily="34" charset="-122"/>
-                <a:cs typeface="Yu Gothic" pitchFamily="34" charset="-120"/>
-              </a:rPr>
-              <a:t>むぎ</a:t>
-            </a:r>
-            <a:endParaRPr lang="en-US" sz="1400" dirty="0"/>
-          </a:p>
-        </p:txBody>
-      </p:sp>
-      <p:sp>
-        <p:nvSpPr>
-          <p:cNvPr id="8" name="Text 5"/>
-          <p:cNvSpPr/>
-          <p:nvPr/>
-        </p:nvSpPr>
-        <p:spPr>
-          <a:xfrm>
-            <a:off x="694944" y="3749040"/>
-            <a:ext cx="2432304" cy="237744"/>
-          </a:xfrm>
-          <a:prstGeom prst="rect">
-            <a:avLst/>
-          </a:prstGeom>
-          <a:noFill/>
-          <a:ln/>
-        </p:spPr>
-        <p:txBody>
-          <a:bodyPr wrap="square" lIns="0" tIns="0" rIns="0" bIns="0" rtlCol="0" anchor="ctr"/>
-          <a:lstStyle/>
-          <a:p>
-            <a:pPr algn="ctr" indent="0" marL="0">
-              <a:buNone/>
-            </a:pPr>
-            <a:r>
-              <a:rPr lang="en-US" sz="850" dirty="0">
-                <a:solidFill>
-                  <a:srgbClr val="686A7D"/>
-                </a:solidFill>
-                <a:latin typeface="Meiryo" pitchFamily="34" charset="0"/>
-                <a:ea typeface="Meiryo" pitchFamily="34" charset="-122"/>
-                <a:cs typeface="Meiryo" pitchFamily="34" charset="-120"/>
-              </a:rPr>
-              <a:t>明るく寄り添う作業相棒</a:t>
-            </a:r>
-            <a:endParaRPr lang="en-US" sz="850" dirty="0"/>
-          </a:p>
-        </p:txBody>
-      </p:sp>
-      <p:sp>
-        <p:nvSpPr>
-          <p:cNvPr id="9" name="Shape 6"/>
-          <p:cNvSpPr/>
-          <p:nvPr/>
-        </p:nvSpPr>
-        <p:spPr>
-          <a:xfrm>
-            <a:off x="3364992" y="2212848"/>
-            <a:ext cx="2688336" cy="1792224"/>
-          </a:xfrm>
-          <a:prstGeom prst="roundRect">
-            <a:avLst>
-              <a:gd name="adj" fmla="val 8163"/>
-            </a:avLst>
-          </a:prstGeom>
-          <a:solidFill>
-            <a:srgbClr val="ECF8F4"/>
-          </a:solidFill>
-          <a:ln/>
-        </p:spPr>
-      </p:sp>
-      <p:pic>
-        <p:nvPicPr>
-          <p:cNvPr id="10" name="Image 1" descr="/tmp/claude-0/-home-user-PicoAgent/7130734a-69b9-54b3-90f7-bb7bb9043f8d/scratchpad/deck/img/flat-face-rin.jpg">    </p:cNvPr>
-          <p:cNvPicPr>
-            <a:picLocks noChangeAspect="1"/>
-          </p:cNvPicPr>
-          <p:nvPr/>
-        </p:nvPicPr>
-        <p:blipFill>
-          <a:blip r:embed="rId3"/>
-          <a:stretch>
-            <a:fillRect/>
-          </a:stretch>
-        </p:blipFill>
-        <p:spPr>
-          <a:xfrm>
-            <a:off x="4206240" y="2286000"/>
-            <a:ext cx="996696" cy="1225296"/>
-          </a:xfrm>
-          <a:prstGeom prst="rect">
-            <a:avLst/>
-          </a:prstGeom>
-        </p:spPr>
-      </p:pic>
-      <p:sp>
-        <p:nvSpPr>
-          <p:cNvPr id="11" name="Text 7"/>
-          <p:cNvSpPr/>
-          <p:nvPr/>
-        </p:nvSpPr>
-        <p:spPr>
-          <a:xfrm>
-            <a:off x="3511296" y="3493008"/>
-            <a:ext cx="2395728" cy="274320"/>
-          </a:xfrm>
-          <a:prstGeom prst="rect">
-            <a:avLst/>
-          </a:prstGeom>
-          <a:noFill/>
-          <a:ln/>
-        </p:spPr>
-        <p:txBody>
-          <a:bodyPr wrap="square" lIns="0" tIns="0" rIns="0" bIns="0" rtlCol="0" anchor="ctr"/>
-          <a:lstStyle/>
-          <a:p>
-            <a:pPr algn="ctr" indent="0" marL="0">
-              <a:buNone/>
-            </a:pPr>
-            <a:r>
-              <a:rPr lang="en-US" sz="1400" b="1" dirty="0">
-                <a:solidFill>
-                  <a:srgbClr val="292B3D"/>
-                </a:solidFill>
-                <a:latin typeface="Yu Gothic" pitchFamily="34" charset="0"/>
-                <a:ea typeface="Yu Gothic" pitchFamily="34" charset="-122"/>
-                <a:cs typeface="Yu Gothic" pitchFamily="34" charset="-120"/>
-              </a:rPr>
-              <a:t>りん</a:t>
-            </a:r>
-            <a:endParaRPr lang="en-US" sz="1400" dirty="0"/>
-          </a:p>
-        </p:txBody>
-      </p:sp>
-      <p:sp>
-        <p:nvSpPr>
-          <p:cNvPr id="12" name="Text 8"/>
-          <p:cNvSpPr/>
-          <p:nvPr/>
-        </p:nvSpPr>
-        <p:spPr>
-          <a:xfrm>
-            <a:off x="3493008" y="3749040"/>
-            <a:ext cx="2432304" cy="237744"/>
-          </a:xfrm>
-          <a:prstGeom prst="rect">
-            <a:avLst/>
-          </a:prstGeom>
-          <a:noFill/>
-          <a:ln/>
-        </p:spPr>
-        <p:txBody>
-          <a:bodyPr wrap="square" lIns="0" tIns="0" rIns="0" bIns="0" rtlCol="0" anchor="ctr"/>
-          <a:lstStyle/>
-          <a:p>
-            <a:pPr algn="ctr" indent="0" marL="0">
-              <a:buNone/>
-            </a:pPr>
-            <a:r>
-              <a:rPr lang="en-US" sz="850" dirty="0">
-                <a:solidFill>
-                  <a:srgbClr val="686A7D"/>
-                </a:solidFill>
-                <a:latin typeface="Meiryo" pitchFamily="34" charset="0"/>
-                <a:ea typeface="Meiryo" pitchFamily="34" charset="-122"/>
-                <a:cs typeface="Meiryo" pitchFamily="34" charset="-120"/>
-              </a:rPr>
-              <a:t>面倒見がいいツンデレ</a:t>
-            </a:r>
-            <a:endParaRPr lang="en-US" sz="850" dirty="0"/>
-          </a:p>
-        </p:txBody>
-      </p:sp>
-      <p:sp>
-        <p:nvSpPr>
-          <p:cNvPr id="13" name="Shape 9"/>
-          <p:cNvSpPr/>
-          <p:nvPr/>
-        </p:nvSpPr>
-        <p:spPr>
-          <a:xfrm>
-            <a:off x="6163056" y="2212848"/>
-            <a:ext cx="2688336" cy="1792224"/>
-          </a:xfrm>
-          <a:prstGeom prst="roundRect">
-            <a:avLst>
-              <a:gd name="adj" fmla="val 8163"/>
-            </a:avLst>
-          </a:prstGeom>
-          <a:solidFill>
-            <a:srgbClr val="FFF0F3"/>
-          </a:solidFill>
-          <a:ln/>
-        </p:spPr>
-      </p:sp>
-      <p:pic>
-        <p:nvPicPr>
-          <p:cNvPr id="14" name="Image 2" descr="/tmp/claude-0/-home-user-PicoAgent/7130734a-69b9-54b3-90f7-bb7bb9043f8d/scratchpad/deck/img/flat-face-mai.jpg">    </p:cNvPr>
+          <p:cNvPr id="6" name="Image 0" descr="/tmp/claude-0/-home-user-PicoAgent/7130734a-69b9-54b3-90f7-bb7bb9043f8d/scratchpad/deck/img/flat-face-mugi.jpg"/>
           <p:cNvPicPr>
             <a:picLocks noChangeAspect="1"/>
           </p:cNvPicPr>
@@ -13827,7 +14612,7 @@
         </p:blipFill>
         <p:spPr>
           <a:xfrm>
-            <a:off x="7004304" y="2286000"/>
+            <a:off x="1408176" y="2286000"/>
             <a:ext cx="996696" cy="1225296"/>
           </a:xfrm>
           <a:prstGeom prst="rect">
@@ -13837,13 +14622,13 @@
       </p:pic>
       <p:sp>
         <p:nvSpPr>
-          <p:cNvPr id="15" name="Text 10"/>
-          <p:cNvSpPr/>
-          <p:nvPr/>
-        </p:nvSpPr>
-        <p:spPr>
-          <a:xfrm>
-            <a:off x="6309360" y="3493008"/>
+          <p:cNvPr id="7" name="Text 4"/>
+          <p:cNvSpPr/>
+          <p:nvPr/>
+        </p:nvSpPr>
+        <p:spPr>
+          <a:xfrm>
+            <a:off x="713232" y="3493008"/>
             <a:ext cx="2395728" cy="274320"/>
           </a:xfrm>
           <a:prstGeom prst="rect">
@@ -13856,7 +14641,7 @@
           <a:bodyPr wrap="square" lIns="0" tIns="0" rIns="0" bIns="0" rtlCol="0" anchor="ctr"/>
           <a:lstStyle/>
           <a:p>
-            <a:pPr algn="ctr" indent="0" marL="0">
+            <a:pPr marL="0" indent="0" algn="ctr">
               <a:buNone/>
             </a:pPr>
             <a:r>
@@ -13868,7 +14653,7 @@
                 <a:ea typeface="Yu Gothic" pitchFamily="34" charset="-122"/>
                 <a:cs typeface="Yu Gothic" pitchFamily="34" charset="-120"/>
               </a:rPr>
-              <a:t>まい</a:t>
+              <a:t>むぎ</a:t>
             </a:r>
             <a:endParaRPr lang="en-US" sz="1400" dirty="0"/>
           </a:p>
@@ -13876,13 +14661,13 @@
       </p:sp>
       <p:sp>
         <p:nvSpPr>
-          <p:cNvPr id="16" name="Text 11"/>
-          <p:cNvSpPr/>
-          <p:nvPr/>
-        </p:nvSpPr>
-        <p:spPr>
-          <a:xfrm>
-            <a:off x="6291072" y="3749040"/>
+          <p:cNvPr id="8" name="Text 5"/>
+          <p:cNvSpPr/>
+          <p:nvPr/>
+        </p:nvSpPr>
+        <p:spPr>
+          <a:xfrm>
+            <a:off x="694944" y="3749040"/>
             <a:ext cx="2432304" cy="237744"/>
           </a:xfrm>
           <a:prstGeom prst="rect">
@@ -13895,7 +14680,7 @@
           <a:bodyPr wrap="square" lIns="0" tIns="0" rIns="0" bIns="0" rtlCol="0" anchor="ctr"/>
           <a:lstStyle/>
           <a:p>
-            <a:pPr algn="ctr" indent="0" marL="0">
+            <a:pPr marL="0" indent="0" algn="ctr">
               <a:buNone/>
             </a:pPr>
             <a:r>
@@ -13907,7 +14692,7 @@
                 <a:ea typeface="Meiryo" pitchFamily="34" charset="-122"/>
                 <a:cs typeface="Meiryo" pitchFamily="34" charset="-120"/>
               </a:rPr>
-              <a:t>包容力のあるお姉さん</a:t>
+              <a:t>明るく寄り添う作業相棒</a:t>
             </a:r>
             <a:endParaRPr lang="en-US" sz="850" dirty="0"/>
           </a:p>
@@ -13915,13 +14700,13 @@
       </p:sp>
       <p:sp>
         <p:nvSpPr>
-          <p:cNvPr id="17" name="Shape 12"/>
-          <p:cNvSpPr/>
-          <p:nvPr/>
-        </p:nvSpPr>
-        <p:spPr>
-          <a:xfrm>
-            <a:off x="8961120" y="2212848"/>
+          <p:cNvPr id="9" name="Shape 6"/>
+          <p:cNvSpPr/>
+          <p:nvPr/>
+        </p:nvSpPr>
+        <p:spPr>
+          <a:xfrm>
+            <a:off x="3364992" y="2212848"/>
             <a:ext cx="2688336" cy="1792224"/>
           </a:xfrm>
           <a:prstGeom prst="roundRect">
@@ -13937,7 +14722,7 @@
       </p:sp>
       <p:pic>
         <p:nvPicPr>
-          <p:cNvPr id="18" name="Image 3" descr="/tmp/claude-0/-home-user-PicoAgent/7130734a-69b9-54b3-90f7-bb7bb9043f8d/scratchpad/deck/img/flat-face-koharu.jpg">    </p:cNvPr>
+          <p:cNvPr id="10" name="Image 1" descr="/tmp/claude-0/-home-user-PicoAgent/7130734a-69b9-54b3-90f7-bb7bb9043f8d/scratchpad/deck/img/flat-face-rin.jpg"/>
           <p:cNvPicPr>
             <a:picLocks noChangeAspect="1"/>
           </p:cNvPicPr>
@@ -13951,7 +14736,7 @@
         </p:blipFill>
         <p:spPr>
           <a:xfrm>
-            <a:off x="9802368" y="2286000"/>
+            <a:off x="4206240" y="2286000"/>
             <a:ext cx="996696" cy="1225296"/>
           </a:xfrm>
           <a:prstGeom prst="rect">
@@ -13961,13 +14746,13 @@
       </p:pic>
       <p:sp>
         <p:nvSpPr>
-          <p:cNvPr id="19" name="Text 13"/>
-          <p:cNvSpPr/>
-          <p:nvPr/>
-        </p:nvSpPr>
-        <p:spPr>
-          <a:xfrm>
-            <a:off x="9107424" y="3493008"/>
+          <p:cNvPr id="11" name="Text 7"/>
+          <p:cNvSpPr/>
+          <p:nvPr/>
+        </p:nvSpPr>
+        <p:spPr>
+          <a:xfrm>
+            <a:off x="3511296" y="3493008"/>
             <a:ext cx="2395728" cy="274320"/>
           </a:xfrm>
           <a:prstGeom prst="rect">
@@ -13980,7 +14765,7 @@
           <a:bodyPr wrap="square" lIns="0" tIns="0" rIns="0" bIns="0" rtlCol="0" anchor="ctr"/>
           <a:lstStyle/>
           <a:p>
-            <a:pPr algn="ctr" indent="0" marL="0">
+            <a:pPr marL="0" indent="0" algn="ctr">
               <a:buNone/>
             </a:pPr>
             <a:r>
@@ -13992,7 +14777,7 @@
                 <a:ea typeface="Yu Gothic" pitchFamily="34" charset="-122"/>
                 <a:cs typeface="Yu Gothic" pitchFamily="34" charset="-120"/>
               </a:rPr>
-              <a:t>こはる</a:t>
+              <a:t>りん</a:t>
             </a:r>
             <a:endParaRPr lang="en-US" sz="1400" dirty="0"/>
           </a:p>
@@ -14000,13 +14785,13 @@
       </p:sp>
       <p:sp>
         <p:nvSpPr>
-          <p:cNvPr id="20" name="Text 14"/>
-          <p:cNvSpPr/>
-          <p:nvPr/>
-        </p:nvSpPr>
-        <p:spPr>
-          <a:xfrm>
-            <a:off x="9089136" y="3749040"/>
+          <p:cNvPr id="12" name="Text 8"/>
+          <p:cNvSpPr/>
+          <p:nvPr/>
+        </p:nvSpPr>
+        <p:spPr>
+          <a:xfrm>
+            <a:off x="3493008" y="3749040"/>
             <a:ext cx="2432304" cy="237744"/>
           </a:xfrm>
           <a:prstGeom prst="rect">
@@ -14019,7 +14804,7 @@
           <a:bodyPr wrap="square" lIns="0" tIns="0" rIns="0" bIns="0" rtlCol="0" anchor="ctr"/>
           <a:lstStyle/>
           <a:p>
-            <a:pPr algn="ctr" indent="0" marL="0">
+            <a:pPr marL="0" indent="0" algn="ctr">
               <a:buNone/>
             </a:pPr>
             <a:r>
@@ -14031,7 +14816,7 @@
                 <a:ea typeface="Meiryo" pitchFamily="34" charset="-122"/>
                 <a:cs typeface="Meiryo" pitchFamily="34" charset="-120"/>
               </a:rPr>
-              <a:t>親しみやすい作業相棒</a:t>
+              <a:t>面倒見がいいツンデレ</a:t>
             </a:r>
             <a:endParaRPr lang="en-US" sz="850" dirty="0"/>
           </a:p>
@@ -14039,13 +14824,13 @@
       </p:sp>
       <p:sp>
         <p:nvSpPr>
-          <p:cNvPr id="21" name="Shape 15"/>
-          <p:cNvSpPr/>
-          <p:nvPr/>
-        </p:nvSpPr>
-        <p:spPr>
-          <a:xfrm>
-            <a:off x="566928" y="4169664"/>
+          <p:cNvPr id="13" name="Shape 9"/>
+          <p:cNvSpPr/>
+          <p:nvPr/>
+        </p:nvSpPr>
+        <p:spPr>
+          <a:xfrm>
+            <a:off x="6163056" y="2212848"/>
             <a:ext cx="2688336" cy="1792224"/>
           </a:xfrm>
           <a:prstGeom prst="roundRect">
@@ -14061,7 +14846,7 @@
       </p:sp>
       <p:pic>
         <p:nvPicPr>
-          <p:cNvPr id="22" name="Image 4" descr="/tmp/claude-0/-home-user-PicoAgent/7130734a-69b9-54b3-90f7-bb7bb9043f8d/scratchpad/deck/img/flat-face-sena.jpg">    </p:cNvPr>
+          <p:cNvPr id="14" name="Image 2" descr="/tmp/claude-0/-home-user-PicoAgent/7130734a-69b9-54b3-90f7-bb7bb9043f8d/scratchpad/deck/img/flat-face-mai.jpg"/>
           <p:cNvPicPr>
             <a:picLocks noChangeAspect="1"/>
           </p:cNvPicPr>
@@ -14075,7 +14860,7 @@
         </p:blipFill>
         <p:spPr>
           <a:xfrm>
-            <a:off x="1408176" y="4242816"/>
+            <a:off x="7004304" y="2286000"/>
             <a:ext cx="996696" cy="1225296"/>
           </a:xfrm>
           <a:prstGeom prst="rect">
@@ -14085,13 +14870,13 @@
       </p:pic>
       <p:sp>
         <p:nvSpPr>
-          <p:cNvPr id="23" name="Text 16"/>
-          <p:cNvSpPr/>
-          <p:nvPr/>
-        </p:nvSpPr>
-        <p:spPr>
-          <a:xfrm>
-            <a:off x="713232" y="5449824"/>
+          <p:cNvPr id="15" name="Text 10"/>
+          <p:cNvSpPr/>
+          <p:nvPr/>
+        </p:nvSpPr>
+        <p:spPr>
+          <a:xfrm>
+            <a:off x="6309360" y="3493008"/>
             <a:ext cx="2395728" cy="274320"/>
           </a:xfrm>
           <a:prstGeom prst="rect">
@@ -14104,7 +14889,7 @@
           <a:bodyPr wrap="square" lIns="0" tIns="0" rIns="0" bIns="0" rtlCol="0" anchor="ctr"/>
           <a:lstStyle/>
           <a:p>
-            <a:pPr algn="ctr" indent="0" marL="0">
+            <a:pPr marL="0" indent="0" algn="ctr">
               <a:buNone/>
             </a:pPr>
             <a:r>
@@ -14116,7 +14901,7 @@
                 <a:ea typeface="Yu Gothic" pitchFamily="34" charset="-122"/>
                 <a:cs typeface="Yu Gothic" pitchFamily="34" charset="-120"/>
               </a:rPr>
-              <a:t>セナ</a:t>
+              <a:t>まい</a:t>
             </a:r>
             <a:endParaRPr lang="en-US" sz="1400" dirty="0"/>
           </a:p>
@@ -14124,13 +14909,13 @@
       </p:sp>
       <p:sp>
         <p:nvSpPr>
-          <p:cNvPr id="24" name="Text 17"/>
-          <p:cNvSpPr/>
-          <p:nvPr/>
-        </p:nvSpPr>
-        <p:spPr>
-          <a:xfrm>
-            <a:off x="694944" y="5705856"/>
+          <p:cNvPr id="16" name="Text 11"/>
+          <p:cNvSpPr/>
+          <p:nvPr/>
+        </p:nvSpPr>
+        <p:spPr>
+          <a:xfrm>
+            <a:off x="6291072" y="3749040"/>
             <a:ext cx="2432304" cy="237744"/>
           </a:xfrm>
           <a:prstGeom prst="rect">
@@ -14143,7 +14928,7 @@
           <a:bodyPr wrap="square" lIns="0" tIns="0" rIns="0" bIns="0" rtlCol="0" anchor="ctr"/>
           <a:lstStyle/>
           <a:p>
-            <a:pPr algn="ctr" indent="0" marL="0">
+            <a:pPr marL="0" indent="0" algn="ctr">
               <a:buNone/>
             </a:pPr>
             <a:r>
@@ -14155,7 +14940,7 @@
                 <a:ea typeface="Meiryo" pitchFamily="34" charset="-122"/>
                 <a:cs typeface="Meiryo" pitchFamily="34" charset="-120"/>
               </a:rPr>
-              <a:t>凛とした歌姫系</a:t>
+              <a:t>包容力のあるお姉さん</a:t>
             </a:r>
             <a:endParaRPr lang="en-US" sz="850" dirty="0"/>
           </a:p>
@@ -14163,13 +14948,13 @@
       </p:sp>
       <p:sp>
         <p:nvSpPr>
-          <p:cNvPr id="25" name="Shape 18"/>
-          <p:cNvSpPr/>
-          <p:nvPr/>
-        </p:nvSpPr>
-        <p:spPr>
-          <a:xfrm>
-            <a:off x="3364992" y="4169664"/>
+          <p:cNvPr id="17" name="Shape 12"/>
+          <p:cNvSpPr/>
+          <p:nvPr/>
+        </p:nvSpPr>
+        <p:spPr>
+          <a:xfrm>
+            <a:off x="8961120" y="2212848"/>
             <a:ext cx="2688336" cy="1792224"/>
           </a:xfrm>
           <a:prstGeom prst="roundRect">
@@ -14185,7 +14970,7 @@
       </p:sp>
       <p:pic>
         <p:nvPicPr>
-          <p:cNvPr id="26" name="Image 5" descr="/tmp/claude-0/-home-user-PicoAgent/7130734a-69b9-54b3-90f7-bb7bb9043f8d/scratchpad/deck/img/flat-face-noa.jpg">    </p:cNvPr>
+          <p:cNvPr id="18" name="Image 3" descr="/tmp/claude-0/-home-user-PicoAgent/7130734a-69b9-54b3-90f7-bb7bb9043f8d/scratchpad/deck/img/flat-face-koharu.jpg"/>
           <p:cNvPicPr>
             <a:picLocks noChangeAspect="1"/>
           </p:cNvPicPr>
@@ -14199,7 +14984,7 @@
         </p:blipFill>
         <p:spPr>
           <a:xfrm>
-            <a:off x="4206240" y="4242816"/>
+            <a:off x="9802368" y="2286000"/>
             <a:ext cx="996696" cy="1225296"/>
           </a:xfrm>
           <a:prstGeom prst="rect">
@@ -14209,13 +14994,13 @@
       </p:pic>
       <p:sp>
         <p:nvSpPr>
-          <p:cNvPr id="27" name="Text 19"/>
-          <p:cNvSpPr/>
-          <p:nvPr/>
-        </p:nvSpPr>
-        <p:spPr>
-          <a:xfrm>
-            <a:off x="3511296" y="5449824"/>
+          <p:cNvPr id="19" name="Text 13"/>
+          <p:cNvSpPr/>
+          <p:nvPr/>
+        </p:nvSpPr>
+        <p:spPr>
+          <a:xfrm>
+            <a:off x="9107424" y="3493008"/>
             <a:ext cx="2395728" cy="274320"/>
           </a:xfrm>
           <a:prstGeom prst="rect">
@@ -14228,7 +15013,7 @@
           <a:bodyPr wrap="square" lIns="0" tIns="0" rIns="0" bIns="0" rtlCol="0" anchor="ctr"/>
           <a:lstStyle/>
           <a:p>
-            <a:pPr algn="ctr" indent="0" marL="0">
+            <a:pPr marL="0" indent="0" algn="ctr">
               <a:buNone/>
             </a:pPr>
             <a:r>
@@ -14240,7 +15025,7 @@
                 <a:ea typeface="Yu Gothic" pitchFamily="34" charset="-122"/>
                 <a:cs typeface="Yu Gothic" pitchFamily="34" charset="-120"/>
               </a:rPr>
-              <a:t>ノア</a:t>
+              <a:t>こはる</a:t>
             </a:r>
             <a:endParaRPr lang="en-US" sz="1400" dirty="0"/>
           </a:p>
@@ -14248,13 +15033,13 @@
       </p:sp>
       <p:sp>
         <p:nvSpPr>
-          <p:cNvPr id="28" name="Text 20"/>
-          <p:cNvSpPr/>
-          <p:nvPr/>
-        </p:nvSpPr>
-        <p:spPr>
-          <a:xfrm>
-            <a:off x="3493008" y="5705856"/>
+          <p:cNvPr id="20" name="Text 14"/>
+          <p:cNvSpPr/>
+          <p:nvPr/>
+        </p:nvSpPr>
+        <p:spPr>
+          <a:xfrm>
+            <a:off x="9089136" y="3749040"/>
             <a:ext cx="2432304" cy="237744"/>
           </a:xfrm>
           <a:prstGeom prst="rect">
@@ -14267,7 +15052,7 @@
           <a:bodyPr wrap="square" lIns="0" tIns="0" rIns="0" bIns="0" rtlCol="0" anchor="ctr"/>
           <a:lstStyle/>
           <a:p>
-            <a:pPr algn="ctr" indent="0" marL="0">
+            <a:pPr marL="0" indent="0" algn="ctr">
               <a:buNone/>
             </a:pPr>
             <a:r>
@@ -14279,7 +15064,7 @@
                 <a:ea typeface="Meiryo" pitchFamily="34" charset="-122"/>
                 <a:cs typeface="Meiryo" pitchFamily="34" charset="-120"/>
               </a:rPr>
-              <a:t>上品な吸血姫風メイド</a:t>
+              <a:t>親しみやすい作業相棒</a:t>
             </a:r>
             <a:endParaRPr lang="en-US" sz="850" dirty="0"/>
           </a:p>
@@ -14287,13 +15072,13 @@
       </p:sp>
       <p:sp>
         <p:nvSpPr>
-          <p:cNvPr id="29" name="Shape 21"/>
-          <p:cNvSpPr/>
-          <p:nvPr/>
-        </p:nvSpPr>
-        <p:spPr>
-          <a:xfrm>
-            <a:off x="6163056" y="4169664"/>
+          <p:cNvPr id="21" name="Shape 15"/>
+          <p:cNvSpPr/>
+          <p:nvPr/>
+        </p:nvSpPr>
+        <p:spPr>
+          <a:xfrm>
+            <a:off x="566928" y="4169664"/>
             <a:ext cx="2688336" cy="1792224"/>
           </a:xfrm>
           <a:prstGeom prst="roundRect">
@@ -14309,7 +15094,7 @@
       </p:sp>
       <p:pic>
         <p:nvPicPr>
-          <p:cNvPr id="30" name="Image 6" descr="/tmp/claude-0/-home-user-PicoAgent/7130734a-69b9-54b3-90f7-bb7bb9043f8d/scratchpad/deck/img/flat-face-photoreal-prototype.jpg">    </p:cNvPr>
+          <p:cNvPr id="22" name="Image 4" descr="/tmp/claude-0/-home-user-PicoAgent/7130734a-69b9-54b3-90f7-bb7bb9043f8d/scratchpad/deck/img/flat-face-sena.jpg"/>
           <p:cNvPicPr>
             <a:picLocks noChangeAspect="1"/>
           </p:cNvPicPr>
@@ -14323,7 +15108,7 @@
         </p:blipFill>
         <p:spPr>
           <a:xfrm>
-            <a:off x="7004304" y="4242816"/>
+            <a:off x="1408176" y="4242816"/>
             <a:ext cx="996696" cy="1225296"/>
           </a:xfrm>
           <a:prstGeom prst="rect">
@@ -14333,13 +15118,13 @@
       </p:pic>
       <p:sp>
         <p:nvSpPr>
-          <p:cNvPr id="31" name="Text 22"/>
-          <p:cNvSpPr/>
-          <p:nvPr/>
-        </p:nvSpPr>
-        <p:spPr>
-          <a:xfrm>
-            <a:off x="6309360" y="5449824"/>
+          <p:cNvPr id="23" name="Text 16"/>
+          <p:cNvSpPr/>
+          <p:nvPr/>
+        </p:nvSpPr>
+        <p:spPr>
+          <a:xfrm>
+            <a:off x="713232" y="5449824"/>
             <a:ext cx="2395728" cy="274320"/>
           </a:xfrm>
           <a:prstGeom prst="rect">
@@ -14352,7 +15137,7 @@
           <a:bodyPr wrap="square" lIns="0" tIns="0" rIns="0" bIns="0" rtlCol="0" anchor="ctr"/>
           <a:lstStyle/>
           <a:p>
-            <a:pPr algn="ctr" indent="0" marL="0">
+            <a:pPr marL="0" indent="0" algn="ctr">
               <a:buNone/>
             </a:pPr>
             <a:r>
@@ -14364,7 +15149,7 @@
                 <a:ea typeface="Yu Gothic" pitchFamily="34" charset="-122"/>
                 <a:cs typeface="Yu Gothic" pitchFamily="34" charset="-120"/>
               </a:rPr>
-              <a:t>実写2Dテスト</a:t>
+              <a:t>セナ</a:t>
             </a:r>
             <a:endParaRPr lang="en-US" sz="1400" dirty="0"/>
           </a:p>
@@ -14372,13 +15157,13 @@
       </p:sp>
       <p:sp>
         <p:nvSpPr>
-          <p:cNvPr id="32" name="Text 23"/>
-          <p:cNvSpPr/>
-          <p:nvPr/>
-        </p:nvSpPr>
-        <p:spPr>
-          <a:xfrm>
-            <a:off x="6291072" y="5705856"/>
+          <p:cNvPr id="24" name="Text 17"/>
+          <p:cNvSpPr/>
+          <p:nvPr/>
+        </p:nvSpPr>
+        <p:spPr>
+          <a:xfrm>
+            <a:off x="694944" y="5705856"/>
             <a:ext cx="2432304" cy="237744"/>
           </a:xfrm>
           <a:prstGeom prst="rect">
@@ -14391,7 +15176,7 @@
           <a:bodyPr wrap="square" lIns="0" tIns="0" rIns="0" bIns="0" rtlCol="0" anchor="ctr"/>
           <a:lstStyle/>
           <a:p>
-            <a:pPr algn="ctr" indent="0" marL="0">
+            <a:pPr marL="0" indent="0" algn="ctr">
               <a:buNone/>
             </a:pPr>
             <a:r>
@@ -14403,7 +15188,7 @@
                 <a:ea typeface="Meiryo" pitchFamily="34" charset="-122"/>
                 <a:cs typeface="Meiryo" pitchFamily="34" charset="-120"/>
               </a:rPr>
-              <a:t>84フレーム／目・口7段階</a:t>
+              <a:t>凛とした歌姫系</a:t>
             </a:r>
             <a:endParaRPr lang="en-US" sz="850" dirty="0"/>
           </a:p>
@@ -14411,13 +15196,13 @@
       </p:sp>
       <p:sp>
         <p:nvSpPr>
-          <p:cNvPr id="33" name="Shape 24"/>
-          <p:cNvSpPr/>
-          <p:nvPr/>
-        </p:nvSpPr>
-        <p:spPr>
-          <a:xfrm>
-            <a:off x="8961120" y="4169664"/>
+          <p:cNvPr id="25" name="Shape 18"/>
+          <p:cNvSpPr/>
+          <p:nvPr/>
+        </p:nvSpPr>
+        <p:spPr>
+          <a:xfrm>
+            <a:off x="3364992" y="4169664"/>
             <a:ext cx="2688336" cy="1792224"/>
           </a:xfrm>
           <a:prstGeom prst="roundRect">
@@ -14426,14 +15211,14 @@
             </a:avLst>
           </a:prstGeom>
           <a:solidFill>
-            <a:srgbClr val="F2EFFC"/>
+            <a:srgbClr val="ECF8F4"/>
           </a:solidFill>
           <a:ln/>
         </p:spPr>
       </p:sp>
       <p:pic>
         <p:nvPicPr>
-          <p:cNvPr id="34" name="Image 7" descr="/tmp/claude-0/-home-user-PicoAgent/7130734a-69b9-54b3-90f7-bb7bb9043f8d/scratchpad/deck/img/flat-face-hiyori.jpg">    </p:cNvPr>
+          <p:cNvPr id="26" name="Image 5" descr="/tmp/claude-0/-home-user-PicoAgent/7130734a-69b9-54b3-90f7-bb7bb9043f8d/scratchpad/deck/img/flat-face-noa.jpg"/>
           <p:cNvPicPr>
             <a:picLocks noChangeAspect="1"/>
           </p:cNvPicPr>
@@ -14447,7 +15232,7 @@
         </p:blipFill>
         <p:spPr>
           <a:xfrm>
-            <a:off x="9802368" y="4242816"/>
+            <a:off x="4206240" y="4242816"/>
             <a:ext cx="996696" cy="1225296"/>
           </a:xfrm>
           <a:prstGeom prst="rect">
@@ -14457,13 +15242,13 @@
       </p:pic>
       <p:sp>
         <p:nvSpPr>
-          <p:cNvPr id="35" name="Text 25"/>
-          <p:cNvSpPr/>
-          <p:nvPr/>
-        </p:nvSpPr>
-        <p:spPr>
-          <a:xfrm>
-            <a:off x="9107424" y="5449824"/>
+          <p:cNvPr id="27" name="Text 19"/>
+          <p:cNvSpPr/>
+          <p:nvPr/>
+        </p:nvSpPr>
+        <p:spPr>
+          <a:xfrm>
+            <a:off x="3511296" y="5449824"/>
             <a:ext cx="2395728" cy="274320"/>
           </a:xfrm>
           <a:prstGeom prst="rect">
@@ -14476,7 +15261,7 @@
           <a:bodyPr wrap="square" lIns="0" tIns="0" rIns="0" bIns="0" rtlCol="0" anchor="ctr"/>
           <a:lstStyle/>
           <a:p>
-            <a:pPr algn="ctr" indent="0" marL="0">
+            <a:pPr marL="0" indent="0" algn="ctr">
               <a:buNone/>
             </a:pPr>
             <a:r>
@@ -14488,6 +15273,254 @@
                 <a:ea typeface="Yu Gothic" pitchFamily="34" charset="-122"/>
                 <a:cs typeface="Yu Gothic" pitchFamily="34" charset="-120"/>
               </a:rPr>
+              <a:t>ノア</a:t>
+            </a:r>
+            <a:endParaRPr lang="en-US" sz="1400" dirty="0"/>
+          </a:p>
+        </p:txBody>
+      </p:sp>
+      <p:sp>
+        <p:nvSpPr>
+          <p:cNvPr id="28" name="Text 20"/>
+          <p:cNvSpPr/>
+          <p:nvPr/>
+        </p:nvSpPr>
+        <p:spPr>
+          <a:xfrm>
+            <a:off x="3493008" y="5705856"/>
+            <a:ext cx="2432304" cy="237744"/>
+          </a:xfrm>
+          <a:prstGeom prst="rect">
+            <a:avLst/>
+          </a:prstGeom>
+          <a:noFill/>
+          <a:ln/>
+        </p:spPr>
+        <p:txBody>
+          <a:bodyPr wrap="square" lIns="0" tIns="0" rIns="0" bIns="0" rtlCol="0" anchor="ctr"/>
+          <a:lstStyle/>
+          <a:p>
+            <a:pPr marL="0" indent="0" algn="ctr">
+              <a:buNone/>
+            </a:pPr>
+            <a:r>
+              <a:rPr lang="en-US" sz="850" dirty="0">
+                <a:solidFill>
+                  <a:srgbClr val="686A7D"/>
+                </a:solidFill>
+                <a:latin typeface="Meiryo" pitchFamily="34" charset="0"/>
+                <a:ea typeface="Meiryo" pitchFamily="34" charset="-122"/>
+                <a:cs typeface="Meiryo" pitchFamily="34" charset="-120"/>
+              </a:rPr>
+              <a:t>上品な吸血姫風メイド</a:t>
+            </a:r>
+            <a:endParaRPr lang="en-US" sz="850" dirty="0"/>
+          </a:p>
+        </p:txBody>
+      </p:sp>
+      <p:sp>
+        <p:nvSpPr>
+          <p:cNvPr id="29" name="Shape 21"/>
+          <p:cNvSpPr/>
+          <p:nvPr/>
+        </p:nvSpPr>
+        <p:spPr>
+          <a:xfrm>
+            <a:off x="6163056" y="4169664"/>
+            <a:ext cx="2688336" cy="1792224"/>
+          </a:xfrm>
+          <a:prstGeom prst="roundRect">
+            <a:avLst>
+              <a:gd name="adj" fmla="val 8163"/>
+            </a:avLst>
+          </a:prstGeom>
+          <a:solidFill>
+            <a:srgbClr val="FFF0F3"/>
+          </a:solidFill>
+          <a:ln/>
+        </p:spPr>
+      </p:sp>
+      <p:pic>
+        <p:nvPicPr>
+          <p:cNvPr id="30" name="Image 6" descr="/tmp/claude-0/-home-user-PicoAgent/7130734a-69b9-54b3-90f7-bb7bb9043f8d/scratchpad/deck/img/flat-face-photoreal-prototype.jpg"/>
+          <p:cNvPicPr>
+            <a:picLocks noChangeAspect="1"/>
+          </p:cNvPicPr>
+          <p:nvPr/>
+        </p:nvPicPr>
+        <p:blipFill>
+          <a:blip r:embed="rId10"/>
+          <a:stretch>
+            <a:fillRect/>
+          </a:stretch>
+        </p:blipFill>
+        <p:spPr>
+          <a:xfrm>
+            <a:off x="7004304" y="4242816"/>
+            <a:ext cx="996696" cy="1225296"/>
+          </a:xfrm>
+          <a:prstGeom prst="rect">
+            <a:avLst/>
+          </a:prstGeom>
+        </p:spPr>
+      </p:pic>
+      <p:sp>
+        <p:nvSpPr>
+          <p:cNvPr id="31" name="Text 22"/>
+          <p:cNvSpPr/>
+          <p:nvPr/>
+        </p:nvSpPr>
+        <p:spPr>
+          <a:xfrm>
+            <a:off x="6309360" y="5449824"/>
+            <a:ext cx="2395728" cy="274320"/>
+          </a:xfrm>
+          <a:prstGeom prst="rect">
+            <a:avLst/>
+          </a:prstGeom>
+          <a:noFill/>
+          <a:ln/>
+        </p:spPr>
+        <p:txBody>
+          <a:bodyPr wrap="square" lIns="0" tIns="0" rIns="0" bIns="0" rtlCol="0" anchor="ctr"/>
+          <a:lstStyle/>
+          <a:p>
+            <a:pPr marL="0" indent="0" algn="ctr">
+              <a:buNone/>
+            </a:pPr>
+            <a:r>
+              <a:rPr lang="en-US" sz="1400" b="1" dirty="0">
+                <a:solidFill>
+                  <a:srgbClr val="292B3D"/>
+                </a:solidFill>
+                <a:latin typeface="Yu Gothic" pitchFamily="34" charset="0"/>
+                <a:ea typeface="Yu Gothic" pitchFamily="34" charset="-122"/>
+                <a:cs typeface="Yu Gothic" pitchFamily="34" charset="-120"/>
+              </a:rPr>
+              <a:t>実写2Dテスト</a:t>
+            </a:r>
+            <a:endParaRPr lang="en-US" sz="1400" dirty="0"/>
+          </a:p>
+        </p:txBody>
+      </p:sp>
+      <p:sp>
+        <p:nvSpPr>
+          <p:cNvPr id="32" name="Text 23"/>
+          <p:cNvSpPr/>
+          <p:nvPr/>
+        </p:nvSpPr>
+        <p:spPr>
+          <a:xfrm>
+            <a:off x="6291072" y="5705856"/>
+            <a:ext cx="2432304" cy="237744"/>
+          </a:xfrm>
+          <a:prstGeom prst="rect">
+            <a:avLst/>
+          </a:prstGeom>
+          <a:noFill/>
+          <a:ln/>
+        </p:spPr>
+        <p:txBody>
+          <a:bodyPr wrap="square" lIns="0" tIns="0" rIns="0" bIns="0" rtlCol="0" anchor="ctr"/>
+          <a:lstStyle/>
+          <a:p>
+            <a:pPr marL="0" indent="0" algn="ctr">
+              <a:buNone/>
+            </a:pPr>
+            <a:r>
+              <a:rPr lang="en-US" sz="850" dirty="0">
+                <a:solidFill>
+                  <a:srgbClr val="686A7D"/>
+                </a:solidFill>
+                <a:latin typeface="Meiryo" pitchFamily="34" charset="0"/>
+                <a:ea typeface="Meiryo" pitchFamily="34" charset="-122"/>
+                <a:cs typeface="Meiryo" pitchFamily="34" charset="-120"/>
+              </a:rPr>
+              <a:t>84フレーム／目・口7段階</a:t>
+            </a:r>
+            <a:endParaRPr lang="en-US" sz="850" dirty="0"/>
+          </a:p>
+        </p:txBody>
+      </p:sp>
+      <p:sp>
+        <p:nvSpPr>
+          <p:cNvPr id="33" name="Shape 24"/>
+          <p:cNvSpPr/>
+          <p:nvPr/>
+        </p:nvSpPr>
+        <p:spPr>
+          <a:xfrm>
+            <a:off x="8961120" y="4169664"/>
+            <a:ext cx="2688336" cy="1792224"/>
+          </a:xfrm>
+          <a:prstGeom prst="roundRect">
+            <a:avLst>
+              <a:gd name="adj" fmla="val 8163"/>
+            </a:avLst>
+          </a:prstGeom>
+          <a:solidFill>
+            <a:srgbClr val="F2EFFC"/>
+          </a:solidFill>
+          <a:ln/>
+        </p:spPr>
+      </p:sp>
+      <p:pic>
+        <p:nvPicPr>
+          <p:cNvPr id="34" name="Image 7" descr="/tmp/claude-0/-home-user-PicoAgent/7130734a-69b9-54b3-90f7-bb7bb9043f8d/scratchpad/deck/img/flat-face-hiyori.jpg"/>
+          <p:cNvPicPr>
+            <a:picLocks noChangeAspect="1"/>
+          </p:cNvPicPr>
+          <p:nvPr/>
+        </p:nvPicPr>
+        <p:blipFill>
+          <a:blip r:embed="rId11"/>
+          <a:stretch>
+            <a:fillRect/>
+          </a:stretch>
+        </p:blipFill>
+        <p:spPr>
+          <a:xfrm>
+            <a:off x="9802368" y="4242816"/>
+            <a:ext cx="996696" cy="1225296"/>
+          </a:xfrm>
+          <a:prstGeom prst="rect">
+            <a:avLst/>
+          </a:prstGeom>
+        </p:spPr>
+      </p:pic>
+      <p:sp>
+        <p:nvSpPr>
+          <p:cNvPr id="35" name="Text 25"/>
+          <p:cNvSpPr/>
+          <p:nvPr/>
+        </p:nvSpPr>
+        <p:spPr>
+          <a:xfrm>
+            <a:off x="9107424" y="5449824"/>
+            <a:ext cx="2395728" cy="274320"/>
+          </a:xfrm>
+          <a:prstGeom prst="rect">
+            <a:avLst/>
+          </a:prstGeom>
+          <a:noFill/>
+          <a:ln/>
+        </p:spPr>
+        <p:txBody>
+          <a:bodyPr wrap="square" lIns="0" tIns="0" rIns="0" bIns="0" rtlCol="0" anchor="ctr"/>
+          <a:lstStyle/>
+          <a:p>
+            <a:pPr marL="0" indent="0" algn="ctr">
+              <a:buNone/>
+            </a:pPr>
+            <a:r>
+              <a:rPr lang="en-US" sz="1400" b="1" dirty="0">
+                <a:solidFill>
+                  <a:srgbClr val="292B3D"/>
+                </a:solidFill>
+                <a:latin typeface="Yu Gothic" pitchFamily="34" charset="0"/>
+                <a:ea typeface="Yu Gothic" pitchFamily="34" charset="-122"/>
+                <a:cs typeface="Yu Gothic" pitchFamily="34" charset="-120"/>
+              </a:rPr>
               <a:t>ひより</a:t>
             </a:r>
             <a:endParaRPr lang="en-US" sz="1400" dirty="0"/>
@@ -14515,7 +15548,7 @@
           <a:bodyPr wrap="square" lIns="0" tIns="0" rIns="0" bIns="0" rtlCol="0" anchor="ctr"/>
           <a:lstStyle/>
           <a:p>
-            <a:pPr algn="ctr" indent="0" marL="0">
+            <a:pPr marL="0" indent="0" algn="ctr">
               <a:buNone/>
             </a:pPr>
             <a:r>
@@ -14554,7 +15587,7 @@
           <a:bodyPr wrap="square" lIns="0" tIns="0" rIns="0" bIns="0" rtlCol="0" anchor="ctr"/>
           <a:lstStyle/>
           <a:p>
-            <a:pPr indent="0" marL="0">
+            <a:pPr marL="0" indent="0">
               <a:lnSpc>
                 <a:spcPts val="1400"/>
               </a:lnSpc>
@@ -14574,7 +15607,7 @@
             <a:endParaRPr lang="en-US" sz="900" dirty="0"/>
           </a:p>
           <a:p>
-            <a:pPr indent="0" marL="0">
+            <a:pPr marL="0" indent="0">
               <a:lnSpc>
                 <a:spcPts val="1400"/>
               </a:lnSpc>
@@ -14616,7 +15649,7 @@
           <a:bodyPr wrap="square" lIns="0" tIns="0" rIns="0" bIns="0" rtlCol="0" anchor="ctr"/>
           <a:lstStyle/>
           <a:p>
-            <a:pPr indent="0" marL="0">
+            <a:pPr marL="0" indent="0">
               <a:buNone/>
             </a:pPr>
             <a:r>
@@ -14628,7 +15661,18 @@
                 <a:ea typeface="Meiryo" pitchFamily="34" charset="-122"/>
                 <a:cs typeface="Meiryo" pitchFamily="34" charset="-120"/>
               </a:rPr>
-              <a:t>PicoAgent v1.0.2 Beta</a:t>
+              <a:t>PicoAgent </a:t>
+            </a:r>
+            <a:r>
+              <a:rPr lang="en-US" sz="850">
+                <a:solidFill>
+                  <a:srgbClr val="A79AA1"/>
+                </a:solidFill>
+                <a:latin typeface="Meiryo" pitchFamily="34" charset="0"/>
+                <a:ea typeface="Meiryo" pitchFamily="34" charset="-122"/>
+                <a:cs typeface="Meiryo" pitchFamily="34" charset="-120"/>
+              </a:rPr>
+              <a:t>v1.0.2 ALPHA</a:t>
             </a:r>
             <a:endParaRPr lang="en-US" sz="850" dirty="0"/>
           </a:p>
@@ -14655,7 +15699,7 @@
           <a:bodyPr wrap="square" lIns="0" tIns="0" rIns="0" bIns="0" rtlCol="0" anchor="ctr"/>
           <a:lstStyle/>
           <a:p>
-            <a:pPr algn="r" indent="0" marL="0">
+            <a:pPr marL="0" indent="0" algn="r">
               <a:buNone/>
             </a:pPr>
             <a:r>
@@ -14687,7 +15731,7 @@
     <p:bg>
       <p:bgPr>
         <a:blipFill dpi="0" rotWithShape="1">
-          <a:blip r:embed="rId1">
+          <a:blip r:embed="rId5">
             <a:lum/>
           </a:blip>
           <a:srcRect/>
@@ -14733,11 +15777,11 @@
           <a:bodyPr wrap="square" lIns="0" tIns="0" rIns="0" bIns="0" rtlCol="0" anchor="ctr"/>
           <a:lstStyle/>
           <a:p>
-            <a:pPr indent="0" marL="0">
-              <a:buNone/>
-            </a:pPr>
-            <a:r>
-              <a:rPr lang="en-US" sz="1050" b="1" spc="240" kern="0" dirty="0">
+            <a:pPr marL="0" indent="0">
+              <a:buNone/>
+            </a:pPr>
+            <a:r>
+              <a:rPr lang="en-US" sz="1050" b="1" kern="0" spc="240" dirty="0">
                 <a:solidFill>
                   <a:srgbClr val="B54862"/>
                 </a:solidFill>
@@ -14772,7 +15816,7 @@
           <a:bodyPr wrap="square" lIns="0" tIns="0" rIns="0" bIns="0" rtlCol="0" anchor="ctr"/>
           <a:lstStyle/>
           <a:p>
-            <a:pPr indent="0" marL="0">
+            <a:pPr marL="0" indent="0">
               <a:lnSpc>
                 <a:spcPts val="4000"/>
               </a:lnSpc>
@@ -14814,7 +15858,7 @@
           <a:bodyPr wrap="square" lIns="0" tIns="0" rIns="0" bIns="0" rtlCol="0" anchor="ctr"/>
           <a:lstStyle/>
           <a:p>
-            <a:pPr indent="0" marL="0">
+            <a:pPr marL="0" indent="0">
               <a:lnSpc>
                 <a:spcPts val="2100"/>
               </a:lnSpc>
@@ -14861,7 +15905,7 @@
             <a:prstDash val="solid"/>
           </a:ln>
           <a:effectLst>
-            <a:outerShdw sx="100000" sy="100000" kx="0" ky="0" algn="bl" rotWithShape="0" blurRad="152400" dist="38100" dir="5400000">
+            <a:outerShdw blurRad="152400" dist="38100" dir="5400000" algn="bl" rotWithShape="0">
               <a:srgbClr val="8A6070">
                 <a:alpha val="11000"/>
               </a:srgbClr>
@@ -14869,30 +15913,6 @@
           </a:effectLst>
         </p:spPr>
       </p:sp>
-      <p:pic>
-        <p:nvPicPr>
-          <p:cNvPr id="6" name="Image 0" descr="/tmp/claude-0/-home-user-PicoAgent/7130734a-69b9-54b3-90f7-bb7bb9043f8d/scratchpad/deck/img/flat-stream.jpg">    </p:cNvPr>
-          <p:cNvPicPr>
-            <a:picLocks noChangeAspect="1"/>
-          </p:cNvPicPr>
-          <p:nvPr/>
-        </p:nvPicPr>
-        <p:blipFill>
-          <a:blip r:embed="rId2"/>
-          <a:stretch>
-            <a:fillRect/>
-          </a:stretch>
-        </p:blipFill>
-        <p:spPr>
-          <a:xfrm>
-            <a:off x="713232" y="2249424"/>
-            <a:ext cx="2633472" cy="1097280"/>
-          </a:xfrm>
-          <a:prstGeom prst="rect">
-            <a:avLst/>
-          </a:prstGeom>
-        </p:spPr>
-      </p:pic>
       <p:sp>
         <p:nvSpPr>
           <p:cNvPr id="7" name="Text 4"/>
@@ -14914,11 +15934,11 @@
           <a:bodyPr wrap="square" lIns="0" tIns="0" rIns="0" bIns="0" rtlCol="0" anchor="ctr"/>
           <a:lstStyle/>
           <a:p>
-            <a:pPr indent="0" marL="0">
-              <a:buNone/>
-            </a:pPr>
-            <a:r>
-              <a:rPr lang="en-US" sz="800" b="1" spc="180" kern="0" dirty="0">
+            <a:pPr marL="0" indent="0">
+              <a:buNone/>
+            </a:pPr>
+            <a:r>
+              <a:rPr lang="en-US" sz="800" b="1" kern="0" spc="180" dirty="0">
                 <a:solidFill>
                   <a:srgbClr val="B54862"/>
                 </a:solidFill>
@@ -14953,7 +15973,7 @@
           <a:bodyPr wrap="square" lIns="0" tIns="0" rIns="0" bIns="0" rtlCol="0" anchor="ctr"/>
           <a:lstStyle/>
           <a:p>
-            <a:pPr indent="0" marL="0">
+            <a:pPr marL="0" indent="0">
               <a:buNone/>
             </a:pPr>
             <a:r>
@@ -14992,7 +16012,7 @@
           <a:bodyPr wrap="square" lIns="0" tIns="0" rIns="0" bIns="0" rtlCol="0" anchor="ctr"/>
           <a:lstStyle/>
           <a:p>
-            <a:pPr indent="0" marL="0">
+            <a:pPr marL="0" indent="0">
               <a:lnSpc>
                 <a:spcPts val="1500"/>
               </a:lnSpc>
@@ -15039,7 +16059,7 @@
             <a:prstDash val="solid"/>
           </a:ln>
           <a:effectLst>
-            <a:outerShdw sx="100000" sy="100000" kx="0" ky="0" algn="bl" rotWithShape="0" blurRad="152400" dist="38100" dir="5400000">
+            <a:outerShdw blurRad="152400" dist="38100" dir="5400000" algn="bl" rotWithShape="0">
               <a:srgbClr val="8A6070">
                 <a:alpha val="11000"/>
               </a:srgbClr>
@@ -15049,14 +16069,14 @@
       </p:sp>
       <p:pic>
         <p:nvPicPr>
-          <p:cNvPr id="11" name="Image 1" descr="/tmp/claude-0/-home-user-PicoAgent/7130734a-69b9-54b3-90f7-bb7bb9043f8d/scratchpad/deck/img/flat-workspace.jpg">    </p:cNvPr>
+          <p:cNvPr id="11" name="Image 1" descr="/tmp/claude-0/-home-user-PicoAgent/7130734a-69b9-54b3-90f7-bb7bb9043f8d/scratchpad/deck/img/flat-workspace.jpg"/>
           <p:cNvPicPr>
             <a:picLocks noChangeAspect="1"/>
           </p:cNvPicPr>
           <p:nvPr/>
         </p:nvPicPr>
         <p:blipFill>
-          <a:blip r:embed="rId3"/>
+          <a:blip r:embed="rId6"/>
           <a:stretch>
             <a:fillRect/>
           </a:stretch>
@@ -15092,11 +16112,11 @@
           <a:bodyPr wrap="square" lIns="0" tIns="0" rIns="0" bIns="0" rtlCol="0" anchor="ctr"/>
           <a:lstStyle/>
           <a:p>
-            <a:pPr indent="0" marL="0">
-              <a:buNone/>
-            </a:pPr>
-            <a:r>
-              <a:rPr lang="en-US" sz="800" b="1" spc="180" kern="0" dirty="0">
+            <a:pPr marL="0" indent="0">
+              <a:buNone/>
+            </a:pPr>
+            <a:r>
+              <a:rPr lang="en-US" sz="800" b="1" kern="0" spc="180" dirty="0">
                 <a:solidFill>
                   <a:srgbClr val="B54862"/>
                 </a:solidFill>
@@ -15131,7 +16151,7 @@
           <a:bodyPr wrap="square" lIns="0" tIns="0" rIns="0" bIns="0" rtlCol="0" anchor="ctr"/>
           <a:lstStyle/>
           <a:p>
-            <a:pPr indent="0" marL="0">
+            <a:pPr marL="0" indent="0">
               <a:buNone/>
             </a:pPr>
             <a:r>
@@ -15170,7 +16190,7 @@
           <a:bodyPr wrap="square" lIns="0" tIns="0" rIns="0" bIns="0" rtlCol="0" anchor="ctr"/>
           <a:lstStyle/>
           <a:p>
-            <a:pPr indent="0" marL="0">
+            <a:pPr marL="0" indent="0">
               <a:lnSpc>
                 <a:spcPts val="1500"/>
               </a:lnSpc>
@@ -15217,7 +16237,7 @@
             <a:prstDash val="solid"/>
           </a:ln>
           <a:effectLst>
-            <a:outerShdw sx="100000" sy="100000" kx="0" ky="0" algn="bl" rotWithShape="0" blurRad="152400" dist="38100" dir="5400000">
+            <a:outerShdw blurRad="152400" dist="38100" dir="5400000" algn="bl" rotWithShape="0">
               <a:srgbClr val="8A6070">
                 <a:alpha val="11000"/>
               </a:srgbClr>
@@ -15227,14 +16247,14 @@
       </p:sp>
       <p:pic>
         <p:nvPicPr>
-          <p:cNvPr id="16" name="Image 2" descr="/tmp/claude-0/-home-user-PicoAgent/7130734a-69b9-54b3-90f7-bb7bb9043f8d/scratchpad/deck/img/flat-chat.jpg">    </p:cNvPr>
+          <p:cNvPr id="16" name="Image 2" descr="/tmp/claude-0/-home-user-PicoAgent/7130734a-69b9-54b3-90f7-bb7bb9043f8d/scratchpad/deck/img/flat-chat.jpg"/>
           <p:cNvPicPr>
             <a:picLocks noChangeAspect="1"/>
           </p:cNvPicPr>
           <p:nvPr/>
         </p:nvPicPr>
         <p:blipFill>
-          <a:blip r:embed="rId4"/>
+          <a:blip r:embed="rId7"/>
           <a:stretch>
             <a:fillRect/>
           </a:stretch>
@@ -15270,11 +16290,11 @@
           <a:bodyPr wrap="square" lIns="0" tIns="0" rIns="0" bIns="0" rtlCol="0" anchor="ctr"/>
           <a:lstStyle/>
           <a:p>
-            <a:pPr indent="0" marL="0">
-              <a:buNone/>
-            </a:pPr>
-            <a:r>
-              <a:rPr lang="en-US" sz="800" b="1" spc="180" kern="0" dirty="0">
+            <a:pPr marL="0" indent="0">
+              <a:buNone/>
+            </a:pPr>
+            <a:r>
+              <a:rPr lang="en-US" sz="800" b="1" kern="0" spc="180" dirty="0">
                 <a:solidFill>
                   <a:srgbClr val="B54862"/>
                 </a:solidFill>
@@ -15309,7 +16329,7 @@
           <a:bodyPr wrap="square" lIns="0" tIns="0" rIns="0" bIns="0" rtlCol="0" anchor="ctr"/>
           <a:lstStyle/>
           <a:p>
-            <a:pPr indent="0" marL="0">
+            <a:pPr marL="0" indent="0">
               <a:buNone/>
             </a:pPr>
             <a:r>
@@ -15348,7 +16368,7 @@
           <a:bodyPr wrap="square" lIns="0" tIns="0" rIns="0" bIns="0" rtlCol="0" anchor="ctr"/>
           <a:lstStyle/>
           <a:p>
-            <a:pPr indent="0" marL="0">
+            <a:pPr marL="0" indent="0">
               <a:lnSpc>
                 <a:spcPts val="1500"/>
               </a:lnSpc>
@@ -15412,7 +16432,7 @@
           <a:bodyPr wrap="square" lIns="0" tIns="0" rIns="0" bIns="0" rtlCol="0" anchor="ctr"/>
           <a:lstStyle/>
           <a:p>
-            <a:pPr indent="0" marL="0">
+            <a:pPr marL="0" indent="0">
               <a:buNone/>
             </a:pPr>
             <a:r>
@@ -15451,7 +16471,7 @@
           <a:bodyPr wrap="square" lIns="0" tIns="0" rIns="0" bIns="0" rtlCol="0" anchor="ctr"/>
           <a:lstStyle/>
           <a:p>
-            <a:pPr indent="0" marL="0">
+            <a:pPr marL="0" indent="0">
               <a:lnSpc>
                 <a:spcPts val="1400"/>
               </a:lnSpc>
@@ -15515,7 +16535,7 @@
           <a:bodyPr wrap="square" lIns="0" tIns="0" rIns="0" bIns="0" rtlCol="0" anchor="ctr"/>
           <a:lstStyle/>
           <a:p>
-            <a:pPr indent="0" marL="0">
+            <a:pPr marL="0" indent="0">
               <a:buNone/>
             </a:pPr>
             <a:r>
@@ -15554,7 +16574,7 @@
           <a:bodyPr wrap="square" lIns="0" tIns="0" rIns="0" bIns="0" rtlCol="0" anchor="ctr"/>
           <a:lstStyle/>
           <a:p>
-            <a:pPr indent="0" marL="0">
+            <a:pPr marL="0" indent="0">
               <a:lnSpc>
                 <a:spcPts val="1400"/>
               </a:lnSpc>
@@ -15618,7 +16638,7 @@
           <a:bodyPr wrap="square" lIns="0" tIns="0" rIns="0" bIns="0" rtlCol="0" anchor="ctr"/>
           <a:lstStyle/>
           <a:p>
-            <a:pPr indent="0" marL="0">
+            <a:pPr marL="0" indent="0">
               <a:buNone/>
             </a:pPr>
             <a:r>
@@ -15657,7 +16677,7 @@
           <a:bodyPr wrap="square" lIns="0" tIns="0" rIns="0" bIns="0" rtlCol="0" anchor="ctr"/>
           <a:lstStyle/>
           <a:p>
-            <a:pPr indent="0" marL="0">
+            <a:pPr marL="0" indent="0">
               <a:lnSpc>
                 <a:spcPts val="1400"/>
               </a:lnSpc>
@@ -15721,7 +16741,7 @@
           <a:bodyPr wrap="square" lIns="0" tIns="0" rIns="0" bIns="0" rtlCol="0" anchor="ctr"/>
           <a:lstStyle/>
           <a:p>
-            <a:pPr indent="0" marL="0">
+            <a:pPr marL="0" indent="0">
               <a:buNone/>
             </a:pPr>
             <a:r>
@@ -15760,7 +16780,7 @@
           <a:bodyPr wrap="square" lIns="0" tIns="0" rIns="0" bIns="0" rtlCol="0" anchor="ctr"/>
           <a:lstStyle/>
           <a:p>
-            <a:pPr indent="0" marL="0">
+            <a:pPr marL="0" indent="0">
               <a:lnSpc>
                 <a:spcPts val="1400"/>
               </a:lnSpc>
@@ -15802,7 +16822,7 @@
           <a:bodyPr wrap="square" lIns="0" tIns="0" rIns="0" bIns="0" rtlCol="0" anchor="ctr"/>
           <a:lstStyle/>
           <a:p>
-            <a:pPr indent="0" marL="0">
+            <a:pPr marL="0" indent="0">
               <a:buNone/>
             </a:pPr>
             <a:r>
@@ -15841,7 +16861,7 @@
           <a:bodyPr wrap="square" lIns="0" tIns="0" rIns="0" bIns="0" rtlCol="0" anchor="ctr"/>
           <a:lstStyle/>
           <a:p>
-            <a:pPr indent="0" marL="0">
+            <a:pPr marL="0" indent="0">
               <a:buNone/>
             </a:pPr>
             <a:r>
@@ -15853,7 +16873,18 @@
                 <a:ea typeface="Meiryo" pitchFamily="34" charset="-122"/>
                 <a:cs typeface="Meiryo" pitchFamily="34" charset="-120"/>
               </a:rPr>
-              <a:t>PicoAgent v1.0.2 Beta</a:t>
+              <a:t>PicoAgent </a:t>
+            </a:r>
+            <a:r>
+              <a:rPr lang="en-US" sz="850">
+                <a:solidFill>
+                  <a:srgbClr val="A79AA1"/>
+                </a:solidFill>
+                <a:latin typeface="Meiryo" pitchFamily="34" charset="0"/>
+                <a:ea typeface="Meiryo" pitchFamily="34" charset="-122"/>
+                <a:cs typeface="Meiryo" pitchFamily="34" charset="-120"/>
+              </a:rPr>
+              <a:t>v1.0.2 ALPHA</a:t>
             </a:r>
             <a:endParaRPr lang="en-US" sz="850" dirty="0"/>
           </a:p>
@@ -15880,7 +16911,7 @@
           <a:bodyPr wrap="square" lIns="0" tIns="0" rIns="0" bIns="0" rtlCol="0" anchor="ctr"/>
           <a:lstStyle/>
           <a:p>
-            <a:pPr algn="r" indent="0" marL="0">
+            <a:pPr marL="0" indent="0" algn="r">
               <a:buNone/>
             </a:pPr>
             <a:r>
@@ -15898,11 +16929,184 @@
           </a:p>
         </p:txBody>
       </p:sp>
+      <p:pic>
+        <p:nvPicPr>
+          <p:cNvPr id="6" name="配信画面 6秒動画" descr="むぎが口パク、考え中、待機へ移る配信画面の6秒動画">
+            <a:hlinkClick r:id="" action="ppaction://media"/>
+            <a:extLst>
+              <a:ext uri="{FF2B5EF4-FFF2-40B4-BE49-F238E27FC236}">
+                <a16:creationId xmlns:a16="http://schemas.microsoft.com/office/drawing/2014/main" id="{83524CA7-7DBB-472D-667C-7455A213D5D1}"/>
+              </a:ext>
+            </a:extLst>
+          </p:cNvPr>
+          <p:cNvPicPr>
+            <a:picLocks noChangeAspect="1"/>
+          </p:cNvPicPr>
+          <p:nvPr>
+            <a:videoFile r:link="rId2"/>
+            <p:extLst>
+              <p:ext uri="{DAA4B4D4-6D71-4841-9C94-3DE7FCFB9230}">
+                <p14:media xmlns:p14="http://schemas.microsoft.com/office/powerpoint/2010/main" r:embed="rId1"/>
+              </p:ext>
+            </p:extLst>
+          </p:nvPr>
+        </p:nvPicPr>
+        <p:blipFill>
+          <a:blip r:embed="rId8"/>
+          <a:stretch>
+            <a:fillRect/>
+          </a:stretch>
+        </p:blipFill>
+        <p:spPr>
+          <a:xfrm>
+            <a:off x="713232" y="2249424"/>
+            <a:ext cx="2633472" cy="1097280"/>
+          </a:xfrm>
+          <a:prstGeom prst="rect">
+            <a:avLst/>
+          </a:prstGeom>
+        </p:spPr>
+      </p:pic>
     </p:spTree>
   </p:cSld>
   <p:clrMapOvr>
     <a:masterClrMapping/>
   </p:clrMapOvr>
+  <p:timing>
+    <p:tnLst>
+      <p:par>
+        <p:cTn id="1" dur="indefinite" restart="never" nodeType="tmRoot">
+          <p:childTnLst>
+            <p:seq concurrent="1" nextAc="seek">
+              <p:cTn id="2" dur="indefinite" nodeType="mainSeq">
+                <p:childTnLst>
+                  <p:par>
+                    <p:cTn id="3" fill="hold">
+                      <p:stCondLst>
+                        <p:cond delay="indefinite"/>
+                      </p:stCondLst>
+                      <p:childTnLst>
+                        <p:par>
+                          <p:cTn id="4" fill="hold">
+                            <p:stCondLst>
+                              <p:cond delay="0"/>
+                            </p:stCondLst>
+                            <p:childTnLst>
+                              <p:par>
+                                <p:cTn id="5" presetID="1" presetClass="mediacall" presetSubtype="0" fill="hold" nodeType="clickEffect">
+                                  <p:stCondLst>
+                                    <p:cond delay="0"/>
+                                  </p:stCondLst>
+                                  <p:childTnLst>
+                                    <p:cmd type="call" cmd="playFrom(0.0)">
+                                      <p:cBhvr>
+                                        <p:cTn id="6" dur="1" fill="hold"/>
+                                        <p:tgtEl>
+                                          <p:spTgt spid="6"/>
+                                        </p:tgtEl>
+                                      </p:cBhvr>
+                                    </p:cmd>
+                                  </p:childTnLst>
+                                </p:cTn>
+                              </p:par>
+                            </p:childTnLst>
+                          </p:cTn>
+                        </p:par>
+                      </p:childTnLst>
+                    </p:cTn>
+                  </p:par>
+                </p:childTnLst>
+              </p:cTn>
+              <p:prevCondLst>
+                <p:cond evt="onPrev" delay="0">
+                  <p:tgtEl>
+                    <p:sldTgt/>
+                  </p:tgtEl>
+                </p:cond>
+              </p:prevCondLst>
+              <p:nextCondLst>
+                <p:cond evt="onNext" delay="0">
+                  <p:tgtEl>
+                    <p:sldTgt/>
+                  </p:tgtEl>
+                </p:cond>
+              </p:nextCondLst>
+            </p:seq>
+            <p:video>
+              <p:cMediaNode vol="80000">
+                <p:cTn id="7" repeatCount="indefinite" fill="remove" display="0">
+                  <p:stCondLst>
+                    <p:cond delay="indefinite"/>
+                  </p:stCondLst>
+                </p:cTn>
+                <p:tgtEl>
+                  <p:spTgt spid="6"/>
+                </p:tgtEl>
+              </p:cMediaNode>
+            </p:video>
+            <p:seq concurrent="1" nextAc="seek">
+              <p:cTn id="8" restart="whenNotActive" fill="hold" evtFilter="cancelBubble" nodeType="interactiveSeq">
+                <p:stCondLst>
+                  <p:cond evt="onClick" delay="0">
+                    <p:tgtEl>
+                      <p:spTgt spid="6"/>
+                    </p:tgtEl>
+                  </p:cond>
+                </p:stCondLst>
+                <p:endSync evt="end" delay="0">
+                  <p:rtn val="all"/>
+                </p:endSync>
+                <p:childTnLst>
+                  <p:par>
+                    <p:cTn id="9" fill="hold">
+                      <p:stCondLst>
+                        <p:cond delay="0"/>
+                      </p:stCondLst>
+                      <p:childTnLst>
+                        <p:par>
+                          <p:cTn id="10" fill="hold">
+                            <p:stCondLst>
+                              <p:cond delay="0"/>
+                            </p:stCondLst>
+                            <p:childTnLst>
+                              <p:par>
+                                <p:cTn id="11" presetID="2" presetClass="mediacall" presetSubtype="0" fill="hold" nodeType="clickEffect">
+                                  <p:stCondLst>
+                                    <p:cond delay="0"/>
+                                  </p:stCondLst>
+                                  <p:childTnLst>
+                                    <p:cmd type="call" cmd="togglePause">
+                                      <p:cBhvr>
+                                        <p:cTn id="12" dur="1" fill="hold"/>
+                                        <p:tgtEl>
+                                          <p:spTgt spid="6"/>
+                                        </p:tgtEl>
+                                      </p:cBhvr>
+                                    </p:cmd>
+                                  </p:childTnLst>
+                                </p:cTn>
+                              </p:par>
+                            </p:childTnLst>
+                          </p:cTn>
+                        </p:par>
+                      </p:childTnLst>
+                    </p:cTn>
+                  </p:par>
+                </p:childTnLst>
+              </p:cTn>
+              <p:nextCondLst>
+                <p:cond evt="onClick" delay="0">
+                  <p:tgtEl>
+                    <p:spTgt spid="6"/>
+                  </p:tgtEl>
+                </p:cond>
+              </p:nextCondLst>
+            </p:seq>
+          </p:childTnLst>
+        </p:cTn>
+      </p:par>
+    </p:tnLst>
+  </p:timing>
 </p:sld>
 </file>
 
@@ -15912,7 +17116,7 @@
     <p:bg>
       <p:bgPr>
         <a:blipFill dpi="0" rotWithShape="1">
-          <a:blip r:embed="rId1">
+          <a:blip r:embed="rId3">
             <a:lum/>
           </a:blip>
           <a:srcRect/>
@@ -15958,11 +17162,11 @@
           <a:bodyPr wrap="square" lIns="0" tIns="0" rIns="0" bIns="0" rtlCol="0" anchor="ctr"/>
           <a:lstStyle/>
           <a:p>
-            <a:pPr indent="0" marL="0">
-              <a:buNone/>
-            </a:pPr>
-            <a:r>
-              <a:rPr lang="en-US" sz="1050" b="1" spc="240" kern="0" dirty="0">
+            <a:pPr marL="0" indent="0">
+              <a:buNone/>
+            </a:pPr>
+            <a:r>
+              <a:rPr lang="en-US" sz="1050" b="1" kern="0" spc="240" dirty="0">
                 <a:solidFill>
                   <a:srgbClr val="FFF0F3"/>
                 </a:solidFill>
@@ -15997,7 +17201,7 @@
           <a:bodyPr wrap="square" lIns="0" tIns="0" rIns="0" bIns="0" rtlCol="0" anchor="ctr"/>
           <a:lstStyle/>
           <a:p>
-            <a:pPr indent="0" marL="0">
+            <a:pPr marL="0" indent="0">
               <a:lnSpc>
                 <a:spcPts val="4000"/>
               </a:lnSpc>
@@ -16039,7 +17243,7 @@
           <a:bodyPr wrap="square" lIns="0" tIns="0" rIns="0" bIns="0" rtlCol="0" anchor="ctr"/>
           <a:lstStyle/>
           <a:p>
-            <a:pPr indent="0" marL="0">
+            <a:pPr marL="0" indent="0">
               <a:lnSpc>
                 <a:spcPts val="2100"/>
               </a:lnSpc>
@@ -16130,7 +17334,7 @@
           <a:bodyPr wrap="square" lIns="0" tIns="0" rIns="0" bIns="0" rtlCol="0" anchor="ctr"/>
           <a:lstStyle/>
           <a:p>
-            <a:pPr algn="ctr" indent="0" marL="0">
+            <a:pPr marL="0" indent="0" algn="ctr">
               <a:buNone/>
             </a:pPr>
             <a:r>
@@ -16169,7 +17373,7 @@
           <a:bodyPr wrap="square" lIns="0" tIns="0" rIns="0" bIns="0" rtlCol="0" anchor="ctr"/>
           <a:lstStyle/>
           <a:p>
-            <a:pPr indent="0" marL="0">
+            <a:pPr marL="0" indent="0">
               <a:buNone/>
             </a:pPr>
             <a:r>
@@ -16208,7 +17412,7 @@
           <a:bodyPr wrap="square" lIns="0" tIns="0" rIns="0" bIns="0" rtlCol="0" anchor="ctr"/>
           <a:lstStyle/>
           <a:p>
-            <a:pPr indent="0" marL="0">
+            <a:pPr marL="0" indent="0">
               <a:lnSpc>
                 <a:spcPts val="1700"/>
               </a:lnSpc>
@@ -16299,7 +17503,7 @@
           <a:bodyPr wrap="square" lIns="0" tIns="0" rIns="0" bIns="0" rtlCol="0" anchor="ctr"/>
           <a:lstStyle/>
           <a:p>
-            <a:pPr algn="ctr" indent="0" marL="0">
+            <a:pPr marL="0" indent="0" algn="ctr">
               <a:buNone/>
             </a:pPr>
             <a:r>
@@ -16338,7 +17542,7 @@
           <a:bodyPr wrap="square" lIns="0" tIns="0" rIns="0" bIns="0" rtlCol="0" anchor="ctr"/>
           <a:lstStyle/>
           <a:p>
-            <a:pPr indent="0" marL="0">
+            <a:pPr marL="0" indent="0">
               <a:buNone/>
             </a:pPr>
             <a:r>
@@ -16377,7 +17581,7 @@
           <a:bodyPr wrap="square" lIns="0" tIns="0" rIns="0" bIns="0" rtlCol="0" anchor="ctr"/>
           <a:lstStyle/>
           <a:p>
-            <a:pPr indent="0" marL="0">
+            <a:pPr marL="0" indent="0">
               <a:lnSpc>
                 <a:spcPts val="1700"/>
               </a:lnSpc>
@@ -16468,7 +17672,7 @@
           <a:bodyPr wrap="square" lIns="0" tIns="0" rIns="0" bIns="0" rtlCol="0" anchor="ctr"/>
           <a:lstStyle/>
           <a:p>
-            <a:pPr algn="ctr" indent="0" marL="0">
+            <a:pPr marL="0" indent="0" algn="ctr">
               <a:buNone/>
             </a:pPr>
             <a:r>
@@ -16507,7 +17711,7 @@
           <a:bodyPr wrap="square" lIns="0" tIns="0" rIns="0" bIns="0" rtlCol="0" anchor="ctr"/>
           <a:lstStyle/>
           <a:p>
-            <a:pPr indent="0" marL="0">
+            <a:pPr marL="0" indent="0">
               <a:buNone/>
             </a:pPr>
             <a:r>
@@ -16546,7 +17750,7 @@
           <a:bodyPr wrap="square" lIns="0" tIns="0" rIns="0" bIns="0" rtlCol="0" anchor="ctr"/>
           <a:lstStyle/>
           <a:p>
-            <a:pPr indent="0" marL="0">
+            <a:pPr marL="0" indent="0">
               <a:lnSpc>
                 <a:spcPts val="1700"/>
               </a:lnSpc>
@@ -16588,7 +17792,7 @@
           <a:bodyPr wrap="square" lIns="0" tIns="0" rIns="0" bIns="0" rtlCol="0" anchor="ctr"/>
           <a:lstStyle/>
           <a:p>
-            <a:pPr indent="0" marL="0">
+            <a:pPr marL="0" indent="0">
               <a:buNone/>
             </a:pPr>
             <a:r>
@@ -16600,7 +17804,18 @@
                 <a:ea typeface="Meiryo" pitchFamily="34" charset="-122"/>
                 <a:cs typeface="Meiryo" pitchFamily="34" charset="-120"/>
               </a:rPr>
-              <a:t>PicoAgent v1.0.2 Beta</a:t>
+              <a:t>PicoAgent </a:t>
+            </a:r>
+            <a:r>
+              <a:rPr lang="en-US" sz="850">
+                <a:solidFill>
+                  <a:srgbClr val="8E88A0"/>
+                </a:solidFill>
+                <a:latin typeface="Meiryo" pitchFamily="34" charset="0"/>
+                <a:ea typeface="Meiryo" pitchFamily="34" charset="-122"/>
+                <a:cs typeface="Meiryo" pitchFamily="34" charset="-120"/>
+              </a:rPr>
+              <a:t>v1.0.2 ALPHA</a:t>
             </a:r>
             <a:endParaRPr lang="en-US" sz="850" dirty="0"/>
           </a:p>
@@ -16627,7 +17842,7 @@
           <a:bodyPr wrap="square" lIns="0" tIns="0" rIns="0" bIns="0" rtlCol="0" anchor="ctr"/>
           <a:lstStyle/>
           <a:p>
-            <a:pPr algn="r" indent="0" marL="0">
+            <a:pPr marL="0" indent="0" algn="r">
               <a:buNone/>
             </a:pPr>
             <a:r>
@@ -16946,4 +18161,299 @@
     </a:ext>
   </a:extLst>
 </a:theme>
+</file>
+
+<file path=ppt/theme/theme2.xml><?xml version="1.0" encoding="utf-8"?>
+<a:theme xmlns:a="http://schemas.openxmlformats.org/drawingml/2006/main" name="Office テーマ">
+  <a:themeElements>
+    <a:clrScheme name="Office">
+      <a:dk1>
+        <a:sysClr val="windowText" lastClr="000000"/>
+      </a:dk1>
+      <a:lt1>
+        <a:sysClr val="window" lastClr="FFFFFF"/>
+      </a:lt1>
+      <a:dk2>
+        <a:srgbClr val="44546A"/>
+      </a:dk2>
+      <a:lt2>
+        <a:srgbClr val="E7E6E6"/>
+      </a:lt2>
+      <a:accent1>
+        <a:srgbClr val="4472C4"/>
+      </a:accent1>
+      <a:accent2>
+        <a:srgbClr val="ED7D31"/>
+      </a:accent2>
+      <a:accent3>
+        <a:srgbClr val="A5A5A5"/>
+      </a:accent3>
+      <a:accent4>
+        <a:srgbClr val="FFC000"/>
+      </a:accent4>
+      <a:accent5>
+        <a:srgbClr val="5B9BD5"/>
+      </a:accent5>
+      <a:accent6>
+        <a:srgbClr val="70AD47"/>
+      </a:accent6>
+      <a:hlink>
+        <a:srgbClr val="0563C1"/>
+      </a:hlink>
+      <a:folHlink>
+        <a:srgbClr val="954F72"/>
+      </a:folHlink>
+    </a:clrScheme>
+    <a:fontScheme name="Office">
+      <a:majorFont>
+        <a:latin typeface="游ゴシック Light" panose="020F0302020204030204"/>
+        <a:ea typeface=""/>
+        <a:cs typeface=""/>
+        <a:font script="Jpan" typeface="游ゴシック Light"/>
+        <a:font script="Hang" typeface="맑은 고딕"/>
+        <a:font script="Hans" typeface="等线 Light"/>
+        <a:font script="Hant" typeface="新細明體"/>
+        <a:font script="Arab" typeface="Times New Roman"/>
+        <a:font script="Hebr" typeface="Times New Roman"/>
+        <a:font script="Thai" typeface="Angsana New"/>
+        <a:font script="Ethi" typeface="Nyala"/>
+        <a:font script="Beng" typeface="Vrinda"/>
+        <a:font script="Gujr" typeface="Shruti"/>
+        <a:font script="Khmr" typeface="MoolBoran"/>
+        <a:font script="Knda" typeface="Tunga"/>
+        <a:font script="Guru" typeface="Raavi"/>
+        <a:font script="Cans" typeface="Euphemia"/>
+        <a:font script="Cher" typeface="Plantagenet Cherokee"/>
+        <a:font script="Yiii" typeface="Microsoft Yi Baiti"/>
+        <a:font script="Tibt" typeface="Microsoft Himalaya"/>
+        <a:font script="Thaa" typeface="MV Boli"/>
+        <a:font script="Deva" typeface="Mangal"/>
+        <a:font script="Telu" typeface="Gautami"/>
+        <a:font script="Taml" typeface="Latha"/>
+        <a:font script="Syrc" typeface="Estrangelo Edessa"/>
+        <a:font script="Orya" typeface="Kalinga"/>
+        <a:font script="Mlym" typeface="Kartika"/>
+        <a:font script="Laoo" typeface="DokChampa"/>
+        <a:font script="Sinh" typeface="Iskoola Pota"/>
+        <a:font script="Mong" typeface="Mongolian Baiti"/>
+        <a:font script="Viet" typeface="Times New Roman"/>
+        <a:font script="Uigh" typeface="Microsoft Uighur"/>
+        <a:font script="Geor" typeface="Sylfaen"/>
+        <a:font script="Armn" typeface="Arial"/>
+        <a:font script="Bugi" typeface="Leelawadee UI"/>
+        <a:font script="Bopo" typeface="Microsoft JhengHei"/>
+        <a:font script="Java" typeface="Javanese Text"/>
+        <a:font script="Lisu" typeface="Segoe UI"/>
+        <a:font script="Mymr" typeface="Myanmar Text"/>
+        <a:font script="Nkoo" typeface="Ebrima"/>
+        <a:font script="Olck" typeface="Nirmala UI"/>
+        <a:font script="Osma" typeface="Ebrima"/>
+        <a:font script="Phag" typeface="Phagspa"/>
+        <a:font script="Syrn" typeface="Estrangelo Edessa"/>
+        <a:font script="Syrj" typeface="Estrangelo Edessa"/>
+        <a:font script="Syre" typeface="Estrangelo Edessa"/>
+        <a:font script="Sora" typeface="Nirmala UI"/>
+        <a:font script="Tale" typeface="Microsoft Tai Le"/>
+        <a:font script="Talu" typeface="Microsoft New Tai Lue"/>
+        <a:font script="Tfng" typeface="Ebrima"/>
+      </a:majorFont>
+      <a:minorFont>
+        <a:latin typeface="游ゴシック" panose="020F0502020204030204"/>
+        <a:ea typeface=""/>
+        <a:cs typeface=""/>
+        <a:font script="Jpan" typeface="游ゴシック"/>
+        <a:font script="Hang" typeface="맑은 고딕"/>
+        <a:font script="Hans" typeface="等线"/>
+        <a:font script="Hant" typeface="新細明體"/>
+        <a:font script="Arab" typeface="Arial"/>
+        <a:font script="Hebr" typeface="Arial"/>
+        <a:font script="Thai" typeface="Cordia New"/>
+        <a:font script="Ethi" typeface="Nyala"/>
+        <a:font script="Beng" typeface="Vrinda"/>
+        <a:font script="Gujr" typeface="Shruti"/>
+        <a:font script="Khmr" typeface="DaunPenh"/>
+        <a:font script="Knda" typeface="Tunga"/>
+        <a:font script="Guru" typeface="Raavi"/>
+        <a:font script="Cans" typeface="Euphemia"/>
+        <a:font script="Cher" typeface="Plantagenet Cherokee"/>
+        <a:font script="Yiii" typeface="Microsoft Yi Baiti"/>
+        <a:font script="Tibt" typeface="Microsoft Himalaya"/>
+        <a:font script="Thaa" typeface="MV Boli"/>
+        <a:font script="Deva" typeface="Mangal"/>
+        <a:font script="Telu" typeface="Gautami"/>
+        <a:font script="Taml" typeface="Latha"/>
+        <a:font script="Syrc" typeface="Estrangelo Edessa"/>
+        <a:font script="Orya" typeface="Kalinga"/>
+        <a:font script="Mlym" typeface="Kartika"/>
+        <a:font script="Laoo" typeface="DokChampa"/>
+        <a:font script="Sinh" typeface="Iskoola Pota"/>
+        <a:font script="Mong" typeface="Mongolian Baiti"/>
+        <a:font script="Viet" typeface="Arial"/>
+        <a:font script="Uigh" typeface="Microsoft Uighur"/>
+        <a:font script="Geor" typeface="Sylfaen"/>
+        <a:font script="Armn" typeface="Arial"/>
+        <a:font script="Bugi" typeface="Leelawadee UI"/>
+        <a:font script="Bopo" typeface="Microsoft JhengHei"/>
+        <a:font script="Java" typeface="Javanese Text"/>
+        <a:font script="Lisu" typeface="Segoe UI"/>
+        <a:font script="Mymr" typeface="Myanmar Text"/>
+        <a:font script="Nkoo" typeface="Ebrima"/>
+        <a:font script="Olck" typeface="Nirmala UI"/>
+        <a:font script="Osma" typeface="Ebrima"/>
+        <a:font script="Phag" typeface="Phagspa"/>
+        <a:font script="Syrn" typeface="Estrangelo Edessa"/>
+        <a:font script="Syrj" typeface="Estrangelo Edessa"/>
+        <a:font script="Syre" typeface="Estrangelo Edessa"/>
+        <a:font script="Sora" typeface="Nirmala UI"/>
+        <a:font script="Tale" typeface="Microsoft Tai Le"/>
+        <a:font script="Talu" typeface="Microsoft New Tai Lue"/>
+        <a:font script="Tfng" typeface="Ebrima"/>
+      </a:minorFont>
+    </a:fontScheme>
+    <a:fmtScheme name="Office">
+      <a:fillStyleLst>
+        <a:solidFill>
+          <a:schemeClr val="phClr"/>
+        </a:solidFill>
+        <a:gradFill rotWithShape="1">
+          <a:gsLst>
+            <a:gs pos="0">
+              <a:schemeClr val="phClr">
+                <a:lumMod val="110000"/>
+                <a:satMod val="105000"/>
+                <a:tint val="67000"/>
+              </a:schemeClr>
+            </a:gs>
+            <a:gs pos="50000">
+              <a:schemeClr val="phClr">
+                <a:lumMod val="105000"/>
+                <a:satMod val="103000"/>
+                <a:tint val="73000"/>
+              </a:schemeClr>
+            </a:gs>
+            <a:gs pos="100000">
+              <a:schemeClr val="phClr">
+                <a:lumMod val="105000"/>
+                <a:satMod val="109000"/>
+                <a:tint val="81000"/>
+              </a:schemeClr>
+            </a:gs>
+          </a:gsLst>
+          <a:lin ang="5400000" scaled="0"/>
+        </a:gradFill>
+        <a:gradFill rotWithShape="1">
+          <a:gsLst>
+            <a:gs pos="0">
+              <a:schemeClr val="phClr">
+                <a:satMod val="103000"/>
+                <a:lumMod val="102000"/>
+                <a:tint val="94000"/>
+              </a:schemeClr>
+            </a:gs>
+            <a:gs pos="50000">
+              <a:schemeClr val="phClr">
+                <a:satMod val="110000"/>
+                <a:lumMod val="100000"/>
+                <a:shade val="100000"/>
+              </a:schemeClr>
+            </a:gs>
+            <a:gs pos="100000">
+              <a:schemeClr val="phClr">
+                <a:lumMod val="99000"/>
+                <a:satMod val="120000"/>
+                <a:shade val="78000"/>
+              </a:schemeClr>
+            </a:gs>
+          </a:gsLst>
+          <a:lin ang="5400000" scaled="0"/>
+        </a:gradFill>
+      </a:fillStyleLst>
+      <a:lnStyleLst>
+        <a:ln w="6350" cap="flat" cmpd="sng" algn="ctr">
+          <a:solidFill>
+            <a:schemeClr val="phClr"/>
+          </a:solidFill>
+          <a:prstDash val="solid"/>
+          <a:miter lim="800000"/>
+        </a:ln>
+        <a:ln w="12700" cap="flat" cmpd="sng" algn="ctr">
+          <a:solidFill>
+            <a:schemeClr val="phClr"/>
+          </a:solidFill>
+          <a:prstDash val="solid"/>
+          <a:miter lim="800000"/>
+        </a:ln>
+        <a:ln w="19050" cap="flat" cmpd="sng" algn="ctr">
+          <a:solidFill>
+            <a:schemeClr val="phClr"/>
+          </a:solidFill>
+          <a:prstDash val="solid"/>
+          <a:miter lim="800000"/>
+        </a:ln>
+      </a:lnStyleLst>
+      <a:effectStyleLst>
+        <a:effectStyle>
+          <a:effectLst/>
+        </a:effectStyle>
+        <a:effectStyle>
+          <a:effectLst/>
+        </a:effectStyle>
+        <a:effectStyle>
+          <a:effectLst>
+            <a:outerShdw blurRad="57150" dist="19050" dir="5400000" algn="ctr" rotWithShape="0">
+              <a:srgbClr val="000000">
+                <a:alpha val="63000"/>
+              </a:srgbClr>
+            </a:outerShdw>
+          </a:effectLst>
+        </a:effectStyle>
+      </a:effectStyleLst>
+      <a:bgFillStyleLst>
+        <a:solidFill>
+          <a:schemeClr val="phClr"/>
+        </a:solidFill>
+        <a:solidFill>
+          <a:schemeClr val="phClr">
+            <a:tint val="95000"/>
+            <a:satMod val="170000"/>
+          </a:schemeClr>
+        </a:solidFill>
+        <a:gradFill rotWithShape="1">
+          <a:gsLst>
+            <a:gs pos="0">
+              <a:schemeClr val="phClr">
+                <a:tint val="93000"/>
+                <a:satMod val="150000"/>
+                <a:shade val="98000"/>
+                <a:lumMod val="102000"/>
+              </a:schemeClr>
+            </a:gs>
+            <a:gs pos="50000">
+              <a:schemeClr val="phClr">
+                <a:tint val="98000"/>
+                <a:satMod val="130000"/>
+                <a:shade val="90000"/>
+                <a:lumMod val="103000"/>
+              </a:schemeClr>
+            </a:gs>
+            <a:gs pos="100000">
+              <a:schemeClr val="phClr">
+                <a:shade val="63000"/>
+                <a:satMod val="120000"/>
+              </a:schemeClr>
+            </a:gs>
+          </a:gsLst>
+          <a:lin ang="5400000" scaled="0"/>
+        </a:gradFill>
+      </a:bgFillStyleLst>
+    </a:fmtScheme>
+  </a:themeElements>
+  <a:objectDefaults/>
+  <a:extraClrSchemeLst/>
+  <a:extLst>
+    <a:ext uri="{05A4C25C-085E-4340-85A3-A5531E510DB2}">
+      <thm15:themeFamily xmlns:thm15="http://schemas.microsoft.com/office/thememl/2012/main" name="Office Theme" id="{62F939B6-93AF-4DB8-9C6B-D6C7DFDC589F}" vid="{4A3C46E8-61CC-4603-A589-7422A47A8E4A}"/>
+    </a:ext>
+  </a:extLst>
+</a:theme>
 </file>